--- a/Calendario2025/Presentaciones/13_QoS.pptx
+++ b/Calendario2025/Presentaciones/13_QoS.pptx
@@ -5,7 +5,7 @@
     <p:sldMasterId id="2147483648" r:id="rId1"/>
   </p:sldMasterIdLst>
   <p:notesMasterIdLst>
-    <p:notesMasterId r:id="rId38"/>
+    <p:notesMasterId r:id="rId27"/>
   </p:notesMasterIdLst>
   <p:sldIdLst>
     <p:sldId id="379" r:id="rId2"/>
@@ -20,30 +20,19 @@
     <p:sldId id="1244" r:id="rId11"/>
     <p:sldId id="1276" r:id="rId12"/>
     <p:sldId id="1245" r:id="rId13"/>
-    <p:sldId id="1248" r:id="rId14"/>
-    <p:sldId id="1246" r:id="rId15"/>
-    <p:sldId id="1247" r:id="rId16"/>
-    <p:sldId id="1251" r:id="rId17"/>
-    <p:sldId id="1250" r:id="rId18"/>
-    <p:sldId id="1252" r:id="rId19"/>
-    <p:sldId id="1253" r:id="rId20"/>
-    <p:sldId id="1254" r:id="rId21"/>
-    <p:sldId id="1255" r:id="rId22"/>
-    <p:sldId id="1257" r:id="rId23"/>
-    <p:sldId id="1258" r:id="rId24"/>
-    <p:sldId id="1259" r:id="rId25"/>
-    <p:sldId id="1260" r:id="rId26"/>
-    <p:sldId id="1263" r:id="rId27"/>
-    <p:sldId id="1264" r:id="rId28"/>
-    <p:sldId id="1265" r:id="rId29"/>
-    <p:sldId id="1269" r:id="rId30"/>
-    <p:sldId id="1268" r:id="rId31"/>
-    <p:sldId id="1270" r:id="rId32"/>
-    <p:sldId id="1271" r:id="rId33"/>
-    <p:sldId id="1274" r:id="rId34"/>
-    <p:sldId id="1272" r:id="rId35"/>
-    <p:sldId id="1273" r:id="rId36"/>
-    <p:sldId id="1275" r:id="rId37"/>
+    <p:sldId id="1259" r:id="rId14"/>
+    <p:sldId id="1260" r:id="rId15"/>
+    <p:sldId id="1263" r:id="rId16"/>
+    <p:sldId id="1264" r:id="rId17"/>
+    <p:sldId id="1265" r:id="rId18"/>
+    <p:sldId id="1269" r:id="rId19"/>
+    <p:sldId id="1268" r:id="rId20"/>
+    <p:sldId id="1270" r:id="rId21"/>
+    <p:sldId id="1271" r:id="rId22"/>
+    <p:sldId id="1274" r:id="rId23"/>
+    <p:sldId id="1272" r:id="rId24"/>
+    <p:sldId id="1273" r:id="rId25"/>
+    <p:sldId id="1275" r:id="rId26"/>
   </p:sldIdLst>
   <p:sldSz cx="9144000" cy="6858000" type="screen4x3"/>
   <p:notesSz cx="6858000" cy="9144000"/>
@@ -243,7 +232,7 @@
           <a:p>
             <a:fld id="{2D445F07-8756-451B-A938-0248325FC7BB}" type="datetimeFigureOut">
               <a:rPr lang="es-MX" smtClean="0"/>
-              <a:t>29/04/2024</a:t>
+              <a:t>28/04/2025</a:t>
             </a:fld>
             <a:endParaRPr lang="es-MX" dirty="0"/>
           </a:p>
@@ -744,7 +733,7 @@
           <a:p>
             <a:fld id="{5641018C-6CAF-B84E-B92C-ECB119457FBA}" type="slidenum">
               <a:rPr lang="en-US" smtClean="0"/>
-              <a:t>13</a:t>
+              <a:t>14</a:t>
             </a:fld>
             <a:endParaRPr lang="en-US" dirty="0"/>
           </a:p>
@@ -753,7 +742,7 @@
     </p:spTree>
     <p:extLst>
       <p:ext uri="{BB962C8B-B14F-4D97-AF65-F5344CB8AC3E}">
-        <p14:creationId xmlns:p14="http://schemas.microsoft.com/office/powerpoint/2010/main" val="3860137921"/>
+        <p14:creationId xmlns:p14="http://schemas.microsoft.com/office/powerpoint/2010/main" val="2644084006"/>
       </p:ext>
     </p:extLst>
   </p:cSld>
@@ -828,7 +817,7 @@
           <a:p>
             <a:fld id="{5641018C-6CAF-B84E-B92C-ECB119457FBA}" type="slidenum">
               <a:rPr lang="en-US" smtClean="0"/>
-              <a:t>14</a:t>
+              <a:t>15</a:t>
             </a:fld>
             <a:endParaRPr lang="en-US" dirty="0"/>
           </a:p>
@@ -837,7 +826,7 @@
     </p:spTree>
     <p:extLst>
       <p:ext uri="{BB962C8B-B14F-4D97-AF65-F5344CB8AC3E}">
-        <p14:creationId xmlns:p14="http://schemas.microsoft.com/office/powerpoint/2010/main" val="3608655254"/>
+        <p14:creationId xmlns:p14="http://schemas.microsoft.com/office/powerpoint/2010/main" val="1306764172"/>
       </p:ext>
     </p:extLst>
   </p:cSld>
@@ -912,7 +901,7 @@
           <a:p>
             <a:fld id="{5641018C-6CAF-B84E-B92C-ECB119457FBA}" type="slidenum">
               <a:rPr lang="en-US" smtClean="0"/>
-              <a:t>15</a:t>
+              <a:t>16</a:t>
             </a:fld>
             <a:endParaRPr lang="en-US" dirty="0"/>
           </a:p>
@@ -921,7 +910,7 @@
     </p:spTree>
     <p:extLst>
       <p:ext uri="{BB962C8B-B14F-4D97-AF65-F5344CB8AC3E}">
-        <p14:creationId xmlns:p14="http://schemas.microsoft.com/office/powerpoint/2010/main" val="2822468311"/>
+        <p14:creationId xmlns:p14="http://schemas.microsoft.com/office/powerpoint/2010/main" val="403880143"/>
       </p:ext>
     </p:extLst>
   </p:cSld>
@@ -996,7 +985,7 @@
           <a:p>
             <a:fld id="{5641018C-6CAF-B84E-B92C-ECB119457FBA}" type="slidenum">
               <a:rPr lang="en-US" smtClean="0"/>
-              <a:t>16</a:t>
+              <a:t>17</a:t>
             </a:fld>
             <a:endParaRPr lang="en-US" dirty="0"/>
           </a:p>
@@ -1005,7 +994,7 @@
     </p:spTree>
     <p:extLst>
       <p:ext uri="{BB962C8B-B14F-4D97-AF65-F5344CB8AC3E}">
-        <p14:creationId xmlns:p14="http://schemas.microsoft.com/office/powerpoint/2010/main" val="323028133"/>
+        <p14:creationId xmlns:p14="http://schemas.microsoft.com/office/powerpoint/2010/main" val="1733043944"/>
       </p:ext>
     </p:extLst>
   </p:cSld>
@@ -1080,7 +1069,7 @@
           <a:p>
             <a:fld id="{5641018C-6CAF-B84E-B92C-ECB119457FBA}" type="slidenum">
               <a:rPr lang="en-US" smtClean="0"/>
-              <a:t>17</a:t>
+              <a:t>18</a:t>
             </a:fld>
             <a:endParaRPr lang="en-US" dirty="0"/>
           </a:p>
@@ -1089,7 +1078,7 @@
     </p:spTree>
     <p:extLst>
       <p:ext uri="{BB962C8B-B14F-4D97-AF65-F5344CB8AC3E}">
-        <p14:creationId xmlns:p14="http://schemas.microsoft.com/office/powerpoint/2010/main" val="1980204064"/>
+        <p14:creationId xmlns:p14="http://schemas.microsoft.com/office/powerpoint/2010/main" val="4275122519"/>
       </p:ext>
     </p:extLst>
   </p:cSld>
@@ -1164,7 +1153,7 @@
           <a:p>
             <a:fld id="{5641018C-6CAF-B84E-B92C-ECB119457FBA}" type="slidenum">
               <a:rPr lang="en-US" smtClean="0"/>
-              <a:t>18</a:t>
+              <a:t>19</a:t>
             </a:fld>
             <a:endParaRPr lang="en-US" dirty="0"/>
           </a:p>
@@ -1173,7 +1162,7 @@
     </p:spTree>
     <p:extLst>
       <p:ext uri="{BB962C8B-B14F-4D97-AF65-F5344CB8AC3E}">
-        <p14:creationId xmlns:p14="http://schemas.microsoft.com/office/powerpoint/2010/main" val="1281391939"/>
+        <p14:creationId xmlns:p14="http://schemas.microsoft.com/office/powerpoint/2010/main" val="1716839726"/>
       </p:ext>
     </p:extLst>
   </p:cSld>
@@ -1248,7 +1237,7 @@
           <a:p>
             <a:fld id="{5641018C-6CAF-B84E-B92C-ECB119457FBA}" type="slidenum">
               <a:rPr lang="en-US" smtClean="0"/>
-              <a:t>19</a:t>
+              <a:t>20</a:t>
             </a:fld>
             <a:endParaRPr lang="en-US" dirty="0"/>
           </a:p>
@@ -1257,7 +1246,7 @@
     </p:spTree>
     <p:extLst>
       <p:ext uri="{BB962C8B-B14F-4D97-AF65-F5344CB8AC3E}">
-        <p14:creationId xmlns:p14="http://schemas.microsoft.com/office/powerpoint/2010/main" val="2086041061"/>
+        <p14:creationId xmlns:p14="http://schemas.microsoft.com/office/powerpoint/2010/main" val="233203746"/>
       </p:ext>
     </p:extLst>
   </p:cSld>
@@ -1332,7 +1321,7 @@
           <a:p>
             <a:fld id="{5641018C-6CAF-B84E-B92C-ECB119457FBA}" type="slidenum">
               <a:rPr lang="en-US" smtClean="0"/>
-              <a:t>20</a:t>
+              <a:t>21</a:t>
             </a:fld>
             <a:endParaRPr lang="en-US" dirty="0"/>
           </a:p>
@@ -1341,7 +1330,7 @@
     </p:spTree>
     <p:extLst>
       <p:ext uri="{BB962C8B-B14F-4D97-AF65-F5344CB8AC3E}">
-        <p14:creationId xmlns:p14="http://schemas.microsoft.com/office/powerpoint/2010/main" val="394912259"/>
+        <p14:creationId xmlns:p14="http://schemas.microsoft.com/office/powerpoint/2010/main" val="2433778308"/>
       </p:ext>
     </p:extLst>
   </p:cSld>
@@ -1416,7 +1405,7 @@
           <a:p>
             <a:fld id="{5641018C-6CAF-B84E-B92C-ECB119457FBA}" type="slidenum">
               <a:rPr lang="en-US" smtClean="0"/>
-              <a:t>21</a:t>
+              <a:t>22</a:t>
             </a:fld>
             <a:endParaRPr lang="en-US" dirty="0"/>
           </a:p>
@@ -1425,7 +1414,7 @@
     </p:spTree>
     <p:extLst>
       <p:ext uri="{BB962C8B-B14F-4D97-AF65-F5344CB8AC3E}">
-        <p14:creationId xmlns:p14="http://schemas.microsoft.com/office/powerpoint/2010/main" val="504869384"/>
+        <p14:creationId xmlns:p14="http://schemas.microsoft.com/office/powerpoint/2010/main" val="4047125594"/>
       </p:ext>
     </p:extLst>
   </p:cSld>
@@ -1584,7 +1573,7 @@
           <a:p>
             <a:fld id="{5641018C-6CAF-B84E-B92C-ECB119457FBA}" type="slidenum">
               <a:rPr lang="en-US" smtClean="0"/>
-              <a:t>22</a:t>
+              <a:t>23</a:t>
             </a:fld>
             <a:endParaRPr lang="en-US" dirty="0"/>
           </a:p>
@@ -1593,7 +1582,7 @@
     </p:spTree>
     <p:extLst>
       <p:ext uri="{BB962C8B-B14F-4D97-AF65-F5344CB8AC3E}">
-        <p14:creationId xmlns:p14="http://schemas.microsoft.com/office/powerpoint/2010/main" val="1150545563"/>
+        <p14:creationId xmlns:p14="http://schemas.microsoft.com/office/powerpoint/2010/main" val="3686057752"/>
       </p:ext>
     </p:extLst>
   </p:cSld>
@@ -1668,7 +1657,7 @@
           <a:p>
             <a:fld id="{5641018C-6CAF-B84E-B92C-ECB119457FBA}" type="slidenum">
               <a:rPr lang="en-US" smtClean="0"/>
-              <a:t>23</a:t>
+              <a:t>24</a:t>
             </a:fld>
             <a:endParaRPr lang="en-US" dirty="0"/>
           </a:p>
@@ -1677,7 +1666,7 @@
     </p:spTree>
     <p:extLst>
       <p:ext uri="{BB962C8B-B14F-4D97-AF65-F5344CB8AC3E}">
-        <p14:creationId xmlns:p14="http://schemas.microsoft.com/office/powerpoint/2010/main" val="2973476796"/>
+        <p14:creationId xmlns:p14="http://schemas.microsoft.com/office/powerpoint/2010/main" val="1008097442"/>
       </p:ext>
     </p:extLst>
   </p:cSld>
@@ -1761,595 +1750,7 @@
     </p:spTree>
     <p:extLst>
       <p:ext uri="{BB962C8B-B14F-4D97-AF65-F5344CB8AC3E}">
-        <p14:creationId xmlns:p14="http://schemas.microsoft.com/office/powerpoint/2010/main" val="2644084006"/>
-      </p:ext>
-    </p:extLst>
-  </p:cSld>
-  <p:clrMapOvr>
-    <a:masterClrMapping/>
-  </p:clrMapOvr>
-</p:notes>
-</file>
-
-<file path=ppt/notesSlides/notesSlide23.xml><?xml version="1.0" encoding="utf-8"?>
-<p:notes xmlns:a="http://schemas.openxmlformats.org/drawingml/2006/main" xmlns:r="http://schemas.openxmlformats.org/officeDocument/2006/relationships" xmlns:p="http://schemas.openxmlformats.org/presentationml/2006/main">
-  <p:cSld>
-    <p:spTree>
-      <p:nvGrpSpPr>
-        <p:cNvPr id="1" name=""/>
-        <p:cNvGrpSpPr/>
-        <p:nvPr/>
-      </p:nvGrpSpPr>
-      <p:grpSpPr>
-        <a:xfrm>
-          <a:off x="0" y="0"/>
-          <a:ext cx="0" cy="0"/>
-          <a:chOff x="0" y="0"/>
-          <a:chExt cx="0" cy="0"/>
-        </a:xfrm>
-      </p:grpSpPr>
-      <p:sp>
-        <p:nvSpPr>
-          <p:cNvPr id="2" name="Slide Image Placeholder 1"/>
-          <p:cNvSpPr>
-            <a:spLocks noGrp="1" noRot="1" noChangeAspect="1"/>
-          </p:cNvSpPr>
-          <p:nvPr>
-            <p:ph type="sldImg"/>
-          </p:nvPr>
-        </p:nvSpPr>
-        <p:spPr/>
-      </p:sp>
-      <p:sp>
-        <p:nvSpPr>
-          <p:cNvPr id="3" name="Notes Placeholder 2"/>
-          <p:cNvSpPr>
-            <a:spLocks noGrp="1"/>
-          </p:cNvSpPr>
-          <p:nvPr>
-            <p:ph type="body" idx="1"/>
-          </p:nvPr>
-        </p:nvSpPr>
-        <p:spPr/>
-        <p:txBody>
-          <a:bodyPr/>
-          <a:lstStyle/>
-          <a:p>
-            <a:endParaRPr lang="en-US" dirty="0"/>
-          </a:p>
-        </p:txBody>
-      </p:sp>
-      <p:sp>
-        <p:nvSpPr>
-          <p:cNvPr id="4" name="Slide Number Placeholder 3"/>
-          <p:cNvSpPr>
-            <a:spLocks noGrp="1"/>
-          </p:cNvSpPr>
-          <p:nvPr>
-            <p:ph type="sldNum" sz="quarter" idx="5"/>
-          </p:nvPr>
-        </p:nvSpPr>
-        <p:spPr/>
-        <p:txBody>
-          <a:bodyPr/>
-          <a:lstStyle/>
-          <a:p>
-            <a:fld id="{5641018C-6CAF-B84E-B92C-ECB119457FBA}" type="slidenum">
-              <a:rPr lang="en-US" smtClean="0"/>
-              <a:t>26</a:t>
-            </a:fld>
-            <a:endParaRPr lang="en-US" dirty="0"/>
-          </a:p>
-        </p:txBody>
-      </p:sp>
-    </p:spTree>
-    <p:extLst>
-      <p:ext uri="{BB962C8B-B14F-4D97-AF65-F5344CB8AC3E}">
-        <p14:creationId xmlns:p14="http://schemas.microsoft.com/office/powerpoint/2010/main" val="1306764172"/>
-      </p:ext>
-    </p:extLst>
-  </p:cSld>
-  <p:clrMapOvr>
-    <a:masterClrMapping/>
-  </p:clrMapOvr>
-</p:notes>
-</file>
-
-<file path=ppt/notesSlides/notesSlide24.xml><?xml version="1.0" encoding="utf-8"?>
-<p:notes xmlns:a="http://schemas.openxmlformats.org/drawingml/2006/main" xmlns:r="http://schemas.openxmlformats.org/officeDocument/2006/relationships" xmlns:p="http://schemas.openxmlformats.org/presentationml/2006/main">
-  <p:cSld>
-    <p:spTree>
-      <p:nvGrpSpPr>
-        <p:cNvPr id="1" name=""/>
-        <p:cNvGrpSpPr/>
-        <p:nvPr/>
-      </p:nvGrpSpPr>
-      <p:grpSpPr>
-        <a:xfrm>
-          <a:off x="0" y="0"/>
-          <a:ext cx="0" cy="0"/>
-          <a:chOff x="0" y="0"/>
-          <a:chExt cx="0" cy="0"/>
-        </a:xfrm>
-      </p:grpSpPr>
-      <p:sp>
-        <p:nvSpPr>
-          <p:cNvPr id="2" name="Slide Image Placeholder 1"/>
-          <p:cNvSpPr>
-            <a:spLocks noGrp="1" noRot="1" noChangeAspect="1"/>
-          </p:cNvSpPr>
-          <p:nvPr>
-            <p:ph type="sldImg"/>
-          </p:nvPr>
-        </p:nvSpPr>
-        <p:spPr/>
-      </p:sp>
-      <p:sp>
-        <p:nvSpPr>
-          <p:cNvPr id="3" name="Notes Placeholder 2"/>
-          <p:cNvSpPr>
-            <a:spLocks noGrp="1"/>
-          </p:cNvSpPr>
-          <p:nvPr>
-            <p:ph type="body" idx="1"/>
-          </p:nvPr>
-        </p:nvSpPr>
-        <p:spPr/>
-        <p:txBody>
-          <a:bodyPr/>
-          <a:lstStyle/>
-          <a:p>
-            <a:endParaRPr lang="en-US" dirty="0"/>
-          </a:p>
-        </p:txBody>
-      </p:sp>
-      <p:sp>
-        <p:nvSpPr>
-          <p:cNvPr id="4" name="Slide Number Placeholder 3"/>
-          <p:cNvSpPr>
-            <a:spLocks noGrp="1"/>
-          </p:cNvSpPr>
-          <p:nvPr>
-            <p:ph type="sldNum" sz="quarter" idx="5"/>
-          </p:nvPr>
-        </p:nvSpPr>
-        <p:spPr/>
-        <p:txBody>
-          <a:bodyPr/>
-          <a:lstStyle/>
-          <a:p>
-            <a:fld id="{5641018C-6CAF-B84E-B92C-ECB119457FBA}" type="slidenum">
-              <a:rPr lang="en-US" smtClean="0"/>
-              <a:t>27</a:t>
-            </a:fld>
-            <a:endParaRPr lang="en-US" dirty="0"/>
-          </a:p>
-        </p:txBody>
-      </p:sp>
-    </p:spTree>
-    <p:extLst>
-      <p:ext uri="{BB962C8B-B14F-4D97-AF65-F5344CB8AC3E}">
-        <p14:creationId xmlns:p14="http://schemas.microsoft.com/office/powerpoint/2010/main" val="403880143"/>
-      </p:ext>
-    </p:extLst>
-  </p:cSld>
-  <p:clrMapOvr>
-    <a:masterClrMapping/>
-  </p:clrMapOvr>
-</p:notes>
-</file>
-
-<file path=ppt/notesSlides/notesSlide25.xml><?xml version="1.0" encoding="utf-8"?>
-<p:notes xmlns:a="http://schemas.openxmlformats.org/drawingml/2006/main" xmlns:r="http://schemas.openxmlformats.org/officeDocument/2006/relationships" xmlns:p="http://schemas.openxmlformats.org/presentationml/2006/main">
-  <p:cSld>
-    <p:spTree>
-      <p:nvGrpSpPr>
-        <p:cNvPr id="1" name=""/>
-        <p:cNvGrpSpPr/>
-        <p:nvPr/>
-      </p:nvGrpSpPr>
-      <p:grpSpPr>
-        <a:xfrm>
-          <a:off x="0" y="0"/>
-          <a:ext cx="0" cy="0"/>
-          <a:chOff x="0" y="0"/>
-          <a:chExt cx="0" cy="0"/>
-        </a:xfrm>
-      </p:grpSpPr>
-      <p:sp>
-        <p:nvSpPr>
-          <p:cNvPr id="2" name="Slide Image Placeholder 1"/>
-          <p:cNvSpPr>
-            <a:spLocks noGrp="1" noRot="1" noChangeAspect="1"/>
-          </p:cNvSpPr>
-          <p:nvPr>
-            <p:ph type="sldImg"/>
-          </p:nvPr>
-        </p:nvSpPr>
-        <p:spPr/>
-      </p:sp>
-      <p:sp>
-        <p:nvSpPr>
-          <p:cNvPr id="3" name="Notes Placeholder 2"/>
-          <p:cNvSpPr>
-            <a:spLocks noGrp="1"/>
-          </p:cNvSpPr>
-          <p:nvPr>
-            <p:ph type="body" idx="1"/>
-          </p:nvPr>
-        </p:nvSpPr>
-        <p:spPr/>
-        <p:txBody>
-          <a:bodyPr/>
-          <a:lstStyle/>
-          <a:p>
-            <a:endParaRPr lang="en-US" dirty="0"/>
-          </a:p>
-        </p:txBody>
-      </p:sp>
-      <p:sp>
-        <p:nvSpPr>
-          <p:cNvPr id="4" name="Slide Number Placeholder 3"/>
-          <p:cNvSpPr>
-            <a:spLocks noGrp="1"/>
-          </p:cNvSpPr>
-          <p:nvPr>
-            <p:ph type="sldNum" sz="quarter" idx="5"/>
-          </p:nvPr>
-        </p:nvSpPr>
-        <p:spPr/>
-        <p:txBody>
-          <a:bodyPr/>
-          <a:lstStyle/>
-          <a:p>
-            <a:fld id="{5641018C-6CAF-B84E-B92C-ECB119457FBA}" type="slidenum">
-              <a:rPr lang="en-US" smtClean="0"/>
-              <a:t>28</a:t>
-            </a:fld>
-            <a:endParaRPr lang="en-US" dirty="0"/>
-          </a:p>
-        </p:txBody>
-      </p:sp>
-    </p:spTree>
-    <p:extLst>
-      <p:ext uri="{BB962C8B-B14F-4D97-AF65-F5344CB8AC3E}">
-        <p14:creationId xmlns:p14="http://schemas.microsoft.com/office/powerpoint/2010/main" val="1733043944"/>
-      </p:ext>
-    </p:extLst>
-  </p:cSld>
-  <p:clrMapOvr>
-    <a:masterClrMapping/>
-  </p:clrMapOvr>
-</p:notes>
-</file>
-
-<file path=ppt/notesSlides/notesSlide26.xml><?xml version="1.0" encoding="utf-8"?>
-<p:notes xmlns:a="http://schemas.openxmlformats.org/drawingml/2006/main" xmlns:r="http://schemas.openxmlformats.org/officeDocument/2006/relationships" xmlns:p="http://schemas.openxmlformats.org/presentationml/2006/main">
-  <p:cSld>
-    <p:spTree>
-      <p:nvGrpSpPr>
-        <p:cNvPr id="1" name=""/>
-        <p:cNvGrpSpPr/>
-        <p:nvPr/>
-      </p:nvGrpSpPr>
-      <p:grpSpPr>
-        <a:xfrm>
-          <a:off x="0" y="0"/>
-          <a:ext cx="0" cy="0"/>
-          <a:chOff x="0" y="0"/>
-          <a:chExt cx="0" cy="0"/>
-        </a:xfrm>
-      </p:grpSpPr>
-      <p:sp>
-        <p:nvSpPr>
-          <p:cNvPr id="2" name="Slide Image Placeholder 1"/>
-          <p:cNvSpPr>
-            <a:spLocks noGrp="1" noRot="1" noChangeAspect="1"/>
-          </p:cNvSpPr>
-          <p:nvPr>
-            <p:ph type="sldImg"/>
-          </p:nvPr>
-        </p:nvSpPr>
-        <p:spPr/>
-      </p:sp>
-      <p:sp>
-        <p:nvSpPr>
-          <p:cNvPr id="3" name="Notes Placeholder 2"/>
-          <p:cNvSpPr>
-            <a:spLocks noGrp="1"/>
-          </p:cNvSpPr>
-          <p:nvPr>
-            <p:ph type="body" idx="1"/>
-          </p:nvPr>
-        </p:nvSpPr>
-        <p:spPr/>
-        <p:txBody>
-          <a:bodyPr/>
-          <a:lstStyle/>
-          <a:p>
-            <a:endParaRPr lang="en-US" dirty="0"/>
-          </a:p>
-        </p:txBody>
-      </p:sp>
-      <p:sp>
-        <p:nvSpPr>
-          <p:cNvPr id="4" name="Slide Number Placeholder 3"/>
-          <p:cNvSpPr>
-            <a:spLocks noGrp="1"/>
-          </p:cNvSpPr>
-          <p:nvPr>
-            <p:ph type="sldNum" sz="quarter" idx="5"/>
-          </p:nvPr>
-        </p:nvSpPr>
-        <p:spPr/>
-        <p:txBody>
-          <a:bodyPr/>
-          <a:lstStyle/>
-          <a:p>
-            <a:fld id="{5641018C-6CAF-B84E-B92C-ECB119457FBA}" type="slidenum">
-              <a:rPr lang="en-US" smtClean="0"/>
-              <a:t>29</a:t>
-            </a:fld>
-            <a:endParaRPr lang="en-US" dirty="0"/>
-          </a:p>
-        </p:txBody>
-      </p:sp>
-    </p:spTree>
-    <p:extLst>
-      <p:ext uri="{BB962C8B-B14F-4D97-AF65-F5344CB8AC3E}">
-        <p14:creationId xmlns:p14="http://schemas.microsoft.com/office/powerpoint/2010/main" val="4275122519"/>
-      </p:ext>
-    </p:extLst>
-  </p:cSld>
-  <p:clrMapOvr>
-    <a:masterClrMapping/>
-  </p:clrMapOvr>
-</p:notes>
-</file>
-
-<file path=ppt/notesSlides/notesSlide27.xml><?xml version="1.0" encoding="utf-8"?>
-<p:notes xmlns:a="http://schemas.openxmlformats.org/drawingml/2006/main" xmlns:r="http://schemas.openxmlformats.org/officeDocument/2006/relationships" xmlns:p="http://schemas.openxmlformats.org/presentationml/2006/main">
-  <p:cSld>
-    <p:spTree>
-      <p:nvGrpSpPr>
-        <p:cNvPr id="1" name=""/>
-        <p:cNvGrpSpPr/>
-        <p:nvPr/>
-      </p:nvGrpSpPr>
-      <p:grpSpPr>
-        <a:xfrm>
-          <a:off x="0" y="0"/>
-          <a:ext cx="0" cy="0"/>
-          <a:chOff x="0" y="0"/>
-          <a:chExt cx="0" cy="0"/>
-        </a:xfrm>
-      </p:grpSpPr>
-      <p:sp>
-        <p:nvSpPr>
-          <p:cNvPr id="2" name="Slide Image Placeholder 1"/>
-          <p:cNvSpPr>
-            <a:spLocks noGrp="1" noRot="1" noChangeAspect="1"/>
-          </p:cNvSpPr>
-          <p:nvPr>
-            <p:ph type="sldImg"/>
-          </p:nvPr>
-        </p:nvSpPr>
-        <p:spPr/>
-      </p:sp>
-      <p:sp>
-        <p:nvSpPr>
-          <p:cNvPr id="3" name="Notes Placeholder 2"/>
-          <p:cNvSpPr>
-            <a:spLocks noGrp="1"/>
-          </p:cNvSpPr>
-          <p:nvPr>
-            <p:ph type="body" idx="1"/>
-          </p:nvPr>
-        </p:nvSpPr>
-        <p:spPr/>
-        <p:txBody>
-          <a:bodyPr/>
-          <a:lstStyle/>
-          <a:p>
-            <a:endParaRPr lang="en-US" dirty="0"/>
-          </a:p>
-        </p:txBody>
-      </p:sp>
-      <p:sp>
-        <p:nvSpPr>
-          <p:cNvPr id="4" name="Slide Number Placeholder 3"/>
-          <p:cNvSpPr>
-            <a:spLocks noGrp="1"/>
-          </p:cNvSpPr>
-          <p:nvPr>
-            <p:ph type="sldNum" sz="quarter" idx="5"/>
-          </p:nvPr>
-        </p:nvSpPr>
-        <p:spPr/>
-        <p:txBody>
-          <a:bodyPr/>
-          <a:lstStyle/>
-          <a:p>
-            <a:fld id="{5641018C-6CAF-B84E-B92C-ECB119457FBA}" type="slidenum">
-              <a:rPr lang="en-US" smtClean="0"/>
-              <a:t>30</a:t>
-            </a:fld>
-            <a:endParaRPr lang="en-US" dirty="0"/>
-          </a:p>
-        </p:txBody>
-      </p:sp>
-    </p:spTree>
-    <p:extLst>
-      <p:ext uri="{BB962C8B-B14F-4D97-AF65-F5344CB8AC3E}">
-        <p14:creationId xmlns:p14="http://schemas.microsoft.com/office/powerpoint/2010/main" val="1716839726"/>
-      </p:ext>
-    </p:extLst>
-  </p:cSld>
-  <p:clrMapOvr>
-    <a:masterClrMapping/>
-  </p:clrMapOvr>
-</p:notes>
-</file>
-
-<file path=ppt/notesSlides/notesSlide28.xml><?xml version="1.0" encoding="utf-8"?>
-<p:notes xmlns:a="http://schemas.openxmlformats.org/drawingml/2006/main" xmlns:r="http://schemas.openxmlformats.org/officeDocument/2006/relationships" xmlns:p="http://schemas.openxmlformats.org/presentationml/2006/main">
-  <p:cSld>
-    <p:spTree>
-      <p:nvGrpSpPr>
-        <p:cNvPr id="1" name=""/>
-        <p:cNvGrpSpPr/>
-        <p:nvPr/>
-      </p:nvGrpSpPr>
-      <p:grpSpPr>
-        <a:xfrm>
-          <a:off x="0" y="0"/>
-          <a:ext cx="0" cy="0"/>
-          <a:chOff x="0" y="0"/>
-          <a:chExt cx="0" cy="0"/>
-        </a:xfrm>
-      </p:grpSpPr>
-      <p:sp>
-        <p:nvSpPr>
-          <p:cNvPr id="2" name="Slide Image Placeholder 1"/>
-          <p:cNvSpPr>
-            <a:spLocks noGrp="1" noRot="1" noChangeAspect="1"/>
-          </p:cNvSpPr>
-          <p:nvPr>
-            <p:ph type="sldImg"/>
-          </p:nvPr>
-        </p:nvSpPr>
-        <p:spPr/>
-      </p:sp>
-      <p:sp>
-        <p:nvSpPr>
-          <p:cNvPr id="3" name="Notes Placeholder 2"/>
-          <p:cNvSpPr>
-            <a:spLocks noGrp="1"/>
-          </p:cNvSpPr>
-          <p:nvPr>
-            <p:ph type="body" idx="1"/>
-          </p:nvPr>
-        </p:nvSpPr>
-        <p:spPr/>
-        <p:txBody>
-          <a:bodyPr/>
-          <a:lstStyle/>
-          <a:p>
-            <a:endParaRPr lang="en-US" dirty="0"/>
-          </a:p>
-        </p:txBody>
-      </p:sp>
-      <p:sp>
-        <p:nvSpPr>
-          <p:cNvPr id="4" name="Slide Number Placeholder 3"/>
-          <p:cNvSpPr>
-            <a:spLocks noGrp="1"/>
-          </p:cNvSpPr>
-          <p:nvPr>
-            <p:ph type="sldNum" sz="quarter" idx="5"/>
-          </p:nvPr>
-        </p:nvSpPr>
-        <p:spPr/>
-        <p:txBody>
-          <a:bodyPr/>
-          <a:lstStyle/>
-          <a:p>
-            <a:fld id="{5641018C-6CAF-B84E-B92C-ECB119457FBA}" type="slidenum">
-              <a:rPr lang="en-US" smtClean="0"/>
-              <a:t>31</a:t>
-            </a:fld>
-            <a:endParaRPr lang="en-US" dirty="0"/>
-          </a:p>
-        </p:txBody>
-      </p:sp>
-    </p:spTree>
-    <p:extLst>
-      <p:ext uri="{BB962C8B-B14F-4D97-AF65-F5344CB8AC3E}">
-        <p14:creationId xmlns:p14="http://schemas.microsoft.com/office/powerpoint/2010/main" val="233203746"/>
-      </p:ext>
-    </p:extLst>
-  </p:cSld>
-  <p:clrMapOvr>
-    <a:masterClrMapping/>
-  </p:clrMapOvr>
-</p:notes>
-</file>
-
-<file path=ppt/notesSlides/notesSlide29.xml><?xml version="1.0" encoding="utf-8"?>
-<p:notes xmlns:a="http://schemas.openxmlformats.org/drawingml/2006/main" xmlns:r="http://schemas.openxmlformats.org/officeDocument/2006/relationships" xmlns:p="http://schemas.openxmlformats.org/presentationml/2006/main">
-  <p:cSld>
-    <p:spTree>
-      <p:nvGrpSpPr>
-        <p:cNvPr id="1" name=""/>
-        <p:cNvGrpSpPr/>
-        <p:nvPr/>
-      </p:nvGrpSpPr>
-      <p:grpSpPr>
-        <a:xfrm>
-          <a:off x="0" y="0"/>
-          <a:ext cx="0" cy="0"/>
-          <a:chOff x="0" y="0"/>
-          <a:chExt cx="0" cy="0"/>
-        </a:xfrm>
-      </p:grpSpPr>
-      <p:sp>
-        <p:nvSpPr>
-          <p:cNvPr id="2" name="Slide Image Placeholder 1"/>
-          <p:cNvSpPr>
-            <a:spLocks noGrp="1" noRot="1" noChangeAspect="1"/>
-          </p:cNvSpPr>
-          <p:nvPr>
-            <p:ph type="sldImg"/>
-          </p:nvPr>
-        </p:nvSpPr>
-        <p:spPr/>
-      </p:sp>
-      <p:sp>
-        <p:nvSpPr>
-          <p:cNvPr id="3" name="Notes Placeholder 2"/>
-          <p:cNvSpPr>
-            <a:spLocks noGrp="1"/>
-          </p:cNvSpPr>
-          <p:nvPr>
-            <p:ph type="body" idx="1"/>
-          </p:nvPr>
-        </p:nvSpPr>
-        <p:spPr/>
-        <p:txBody>
-          <a:bodyPr/>
-          <a:lstStyle/>
-          <a:p>
-            <a:endParaRPr lang="en-US" dirty="0"/>
-          </a:p>
-        </p:txBody>
-      </p:sp>
-      <p:sp>
-        <p:nvSpPr>
-          <p:cNvPr id="4" name="Slide Number Placeholder 3"/>
-          <p:cNvSpPr>
-            <a:spLocks noGrp="1"/>
-          </p:cNvSpPr>
-          <p:nvPr>
-            <p:ph type="sldNum" sz="quarter" idx="5"/>
-          </p:nvPr>
-        </p:nvSpPr>
-        <p:spPr/>
-        <p:txBody>
-          <a:bodyPr/>
-          <a:lstStyle/>
-          <a:p>
-            <a:fld id="{5641018C-6CAF-B84E-B92C-ECB119457FBA}" type="slidenum">
-              <a:rPr lang="en-US" smtClean="0"/>
-              <a:t>32</a:t>
-            </a:fld>
-            <a:endParaRPr lang="en-US" dirty="0"/>
-          </a:p>
-        </p:txBody>
-      </p:sp>
-    </p:spTree>
-    <p:extLst>
-      <p:ext uri="{BB962C8B-B14F-4D97-AF65-F5344CB8AC3E}">
-        <p14:creationId xmlns:p14="http://schemas.microsoft.com/office/powerpoint/2010/main" val="2433778308"/>
+        <p14:creationId xmlns:p14="http://schemas.microsoft.com/office/powerpoint/2010/main" val="671229995"/>
       </p:ext>
     </p:extLst>
   </p:cSld>
@@ -2434,342 +1835,6 @@
     <p:extLst>
       <p:ext uri="{BB962C8B-B14F-4D97-AF65-F5344CB8AC3E}">
         <p14:creationId xmlns:p14="http://schemas.microsoft.com/office/powerpoint/2010/main" val="1220011153"/>
-      </p:ext>
-    </p:extLst>
-  </p:cSld>
-  <p:clrMapOvr>
-    <a:masterClrMapping/>
-  </p:clrMapOvr>
-</p:notes>
-</file>
-
-<file path=ppt/notesSlides/notesSlide30.xml><?xml version="1.0" encoding="utf-8"?>
-<p:notes xmlns:a="http://schemas.openxmlformats.org/drawingml/2006/main" xmlns:r="http://schemas.openxmlformats.org/officeDocument/2006/relationships" xmlns:p="http://schemas.openxmlformats.org/presentationml/2006/main">
-  <p:cSld>
-    <p:spTree>
-      <p:nvGrpSpPr>
-        <p:cNvPr id="1" name=""/>
-        <p:cNvGrpSpPr/>
-        <p:nvPr/>
-      </p:nvGrpSpPr>
-      <p:grpSpPr>
-        <a:xfrm>
-          <a:off x="0" y="0"/>
-          <a:ext cx="0" cy="0"/>
-          <a:chOff x="0" y="0"/>
-          <a:chExt cx="0" cy="0"/>
-        </a:xfrm>
-      </p:grpSpPr>
-      <p:sp>
-        <p:nvSpPr>
-          <p:cNvPr id="2" name="Slide Image Placeholder 1"/>
-          <p:cNvSpPr>
-            <a:spLocks noGrp="1" noRot="1" noChangeAspect="1"/>
-          </p:cNvSpPr>
-          <p:nvPr>
-            <p:ph type="sldImg"/>
-          </p:nvPr>
-        </p:nvSpPr>
-        <p:spPr/>
-      </p:sp>
-      <p:sp>
-        <p:nvSpPr>
-          <p:cNvPr id="3" name="Notes Placeholder 2"/>
-          <p:cNvSpPr>
-            <a:spLocks noGrp="1"/>
-          </p:cNvSpPr>
-          <p:nvPr>
-            <p:ph type="body" idx="1"/>
-          </p:nvPr>
-        </p:nvSpPr>
-        <p:spPr/>
-        <p:txBody>
-          <a:bodyPr/>
-          <a:lstStyle/>
-          <a:p>
-            <a:endParaRPr lang="en-US" dirty="0"/>
-          </a:p>
-        </p:txBody>
-      </p:sp>
-      <p:sp>
-        <p:nvSpPr>
-          <p:cNvPr id="4" name="Slide Number Placeholder 3"/>
-          <p:cNvSpPr>
-            <a:spLocks noGrp="1"/>
-          </p:cNvSpPr>
-          <p:nvPr>
-            <p:ph type="sldNum" sz="quarter" idx="5"/>
-          </p:nvPr>
-        </p:nvSpPr>
-        <p:spPr/>
-        <p:txBody>
-          <a:bodyPr/>
-          <a:lstStyle/>
-          <a:p>
-            <a:fld id="{5641018C-6CAF-B84E-B92C-ECB119457FBA}" type="slidenum">
-              <a:rPr lang="en-US" smtClean="0"/>
-              <a:t>33</a:t>
-            </a:fld>
-            <a:endParaRPr lang="en-US" dirty="0"/>
-          </a:p>
-        </p:txBody>
-      </p:sp>
-    </p:spTree>
-    <p:extLst>
-      <p:ext uri="{BB962C8B-B14F-4D97-AF65-F5344CB8AC3E}">
-        <p14:creationId xmlns:p14="http://schemas.microsoft.com/office/powerpoint/2010/main" val="4047125594"/>
-      </p:ext>
-    </p:extLst>
-  </p:cSld>
-  <p:clrMapOvr>
-    <a:masterClrMapping/>
-  </p:clrMapOvr>
-</p:notes>
-</file>
-
-<file path=ppt/notesSlides/notesSlide31.xml><?xml version="1.0" encoding="utf-8"?>
-<p:notes xmlns:a="http://schemas.openxmlformats.org/drawingml/2006/main" xmlns:r="http://schemas.openxmlformats.org/officeDocument/2006/relationships" xmlns:p="http://schemas.openxmlformats.org/presentationml/2006/main">
-  <p:cSld>
-    <p:spTree>
-      <p:nvGrpSpPr>
-        <p:cNvPr id="1" name=""/>
-        <p:cNvGrpSpPr/>
-        <p:nvPr/>
-      </p:nvGrpSpPr>
-      <p:grpSpPr>
-        <a:xfrm>
-          <a:off x="0" y="0"/>
-          <a:ext cx="0" cy="0"/>
-          <a:chOff x="0" y="0"/>
-          <a:chExt cx="0" cy="0"/>
-        </a:xfrm>
-      </p:grpSpPr>
-      <p:sp>
-        <p:nvSpPr>
-          <p:cNvPr id="2" name="Slide Image Placeholder 1"/>
-          <p:cNvSpPr>
-            <a:spLocks noGrp="1" noRot="1" noChangeAspect="1"/>
-          </p:cNvSpPr>
-          <p:nvPr>
-            <p:ph type="sldImg"/>
-          </p:nvPr>
-        </p:nvSpPr>
-        <p:spPr/>
-      </p:sp>
-      <p:sp>
-        <p:nvSpPr>
-          <p:cNvPr id="3" name="Notes Placeholder 2"/>
-          <p:cNvSpPr>
-            <a:spLocks noGrp="1"/>
-          </p:cNvSpPr>
-          <p:nvPr>
-            <p:ph type="body" idx="1"/>
-          </p:nvPr>
-        </p:nvSpPr>
-        <p:spPr/>
-        <p:txBody>
-          <a:bodyPr/>
-          <a:lstStyle/>
-          <a:p>
-            <a:endParaRPr lang="en-US" dirty="0"/>
-          </a:p>
-        </p:txBody>
-      </p:sp>
-      <p:sp>
-        <p:nvSpPr>
-          <p:cNvPr id="4" name="Slide Number Placeholder 3"/>
-          <p:cNvSpPr>
-            <a:spLocks noGrp="1"/>
-          </p:cNvSpPr>
-          <p:nvPr>
-            <p:ph type="sldNum" sz="quarter" idx="5"/>
-          </p:nvPr>
-        </p:nvSpPr>
-        <p:spPr/>
-        <p:txBody>
-          <a:bodyPr/>
-          <a:lstStyle/>
-          <a:p>
-            <a:fld id="{5641018C-6CAF-B84E-B92C-ECB119457FBA}" type="slidenum">
-              <a:rPr lang="en-US" smtClean="0"/>
-              <a:t>34</a:t>
-            </a:fld>
-            <a:endParaRPr lang="en-US" dirty="0"/>
-          </a:p>
-        </p:txBody>
-      </p:sp>
-    </p:spTree>
-    <p:extLst>
-      <p:ext uri="{BB962C8B-B14F-4D97-AF65-F5344CB8AC3E}">
-        <p14:creationId xmlns:p14="http://schemas.microsoft.com/office/powerpoint/2010/main" val="3686057752"/>
-      </p:ext>
-    </p:extLst>
-  </p:cSld>
-  <p:clrMapOvr>
-    <a:masterClrMapping/>
-  </p:clrMapOvr>
-</p:notes>
-</file>
-
-<file path=ppt/notesSlides/notesSlide32.xml><?xml version="1.0" encoding="utf-8"?>
-<p:notes xmlns:a="http://schemas.openxmlformats.org/drawingml/2006/main" xmlns:r="http://schemas.openxmlformats.org/officeDocument/2006/relationships" xmlns:p="http://schemas.openxmlformats.org/presentationml/2006/main">
-  <p:cSld>
-    <p:spTree>
-      <p:nvGrpSpPr>
-        <p:cNvPr id="1" name=""/>
-        <p:cNvGrpSpPr/>
-        <p:nvPr/>
-      </p:nvGrpSpPr>
-      <p:grpSpPr>
-        <a:xfrm>
-          <a:off x="0" y="0"/>
-          <a:ext cx="0" cy="0"/>
-          <a:chOff x="0" y="0"/>
-          <a:chExt cx="0" cy="0"/>
-        </a:xfrm>
-      </p:grpSpPr>
-      <p:sp>
-        <p:nvSpPr>
-          <p:cNvPr id="2" name="Slide Image Placeholder 1"/>
-          <p:cNvSpPr>
-            <a:spLocks noGrp="1" noRot="1" noChangeAspect="1"/>
-          </p:cNvSpPr>
-          <p:nvPr>
-            <p:ph type="sldImg"/>
-          </p:nvPr>
-        </p:nvSpPr>
-        <p:spPr/>
-      </p:sp>
-      <p:sp>
-        <p:nvSpPr>
-          <p:cNvPr id="3" name="Notes Placeholder 2"/>
-          <p:cNvSpPr>
-            <a:spLocks noGrp="1"/>
-          </p:cNvSpPr>
-          <p:nvPr>
-            <p:ph type="body" idx="1"/>
-          </p:nvPr>
-        </p:nvSpPr>
-        <p:spPr/>
-        <p:txBody>
-          <a:bodyPr/>
-          <a:lstStyle/>
-          <a:p>
-            <a:endParaRPr lang="en-US" dirty="0"/>
-          </a:p>
-        </p:txBody>
-      </p:sp>
-      <p:sp>
-        <p:nvSpPr>
-          <p:cNvPr id="4" name="Slide Number Placeholder 3"/>
-          <p:cNvSpPr>
-            <a:spLocks noGrp="1"/>
-          </p:cNvSpPr>
-          <p:nvPr>
-            <p:ph type="sldNum" sz="quarter" idx="5"/>
-          </p:nvPr>
-        </p:nvSpPr>
-        <p:spPr/>
-        <p:txBody>
-          <a:bodyPr/>
-          <a:lstStyle/>
-          <a:p>
-            <a:fld id="{5641018C-6CAF-B84E-B92C-ECB119457FBA}" type="slidenum">
-              <a:rPr lang="en-US" smtClean="0"/>
-              <a:t>35</a:t>
-            </a:fld>
-            <a:endParaRPr lang="en-US" dirty="0"/>
-          </a:p>
-        </p:txBody>
-      </p:sp>
-    </p:spTree>
-    <p:extLst>
-      <p:ext uri="{BB962C8B-B14F-4D97-AF65-F5344CB8AC3E}">
-        <p14:creationId xmlns:p14="http://schemas.microsoft.com/office/powerpoint/2010/main" val="1008097442"/>
-      </p:ext>
-    </p:extLst>
-  </p:cSld>
-  <p:clrMapOvr>
-    <a:masterClrMapping/>
-  </p:clrMapOvr>
-</p:notes>
-</file>
-
-<file path=ppt/notesSlides/notesSlide33.xml><?xml version="1.0" encoding="utf-8"?>
-<p:notes xmlns:a="http://schemas.openxmlformats.org/drawingml/2006/main" xmlns:r="http://schemas.openxmlformats.org/officeDocument/2006/relationships" xmlns:p="http://schemas.openxmlformats.org/presentationml/2006/main">
-  <p:cSld>
-    <p:spTree>
-      <p:nvGrpSpPr>
-        <p:cNvPr id="1" name=""/>
-        <p:cNvGrpSpPr/>
-        <p:nvPr/>
-      </p:nvGrpSpPr>
-      <p:grpSpPr>
-        <a:xfrm>
-          <a:off x="0" y="0"/>
-          <a:ext cx="0" cy="0"/>
-          <a:chOff x="0" y="0"/>
-          <a:chExt cx="0" cy="0"/>
-        </a:xfrm>
-      </p:grpSpPr>
-      <p:sp>
-        <p:nvSpPr>
-          <p:cNvPr id="2" name="Slide Image Placeholder 1"/>
-          <p:cNvSpPr>
-            <a:spLocks noGrp="1" noRot="1" noChangeAspect="1"/>
-          </p:cNvSpPr>
-          <p:nvPr>
-            <p:ph type="sldImg"/>
-          </p:nvPr>
-        </p:nvSpPr>
-        <p:spPr/>
-      </p:sp>
-      <p:sp>
-        <p:nvSpPr>
-          <p:cNvPr id="3" name="Notes Placeholder 2"/>
-          <p:cNvSpPr>
-            <a:spLocks noGrp="1"/>
-          </p:cNvSpPr>
-          <p:nvPr>
-            <p:ph type="body" idx="1"/>
-          </p:nvPr>
-        </p:nvSpPr>
-        <p:spPr/>
-        <p:txBody>
-          <a:bodyPr/>
-          <a:lstStyle/>
-          <a:p>
-            <a:endParaRPr lang="en-US" dirty="0"/>
-          </a:p>
-        </p:txBody>
-      </p:sp>
-      <p:sp>
-        <p:nvSpPr>
-          <p:cNvPr id="4" name="Slide Number Placeholder 3"/>
-          <p:cNvSpPr>
-            <a:spLocks noGrp="1"/>
-          </p:cNvSpPr>
-          <p:nvPr>
-            <p:ph type="sldNum" sz="quarter" idx="5"/>
-          </p:nvPr>
-        </p:nvSpPr>
-        <p:spPr/>
-        <p:txBody>
-          <a:bodyPr/>
-          <a:lstStyle/>
-          <a:p>
-            <a:fld id="{5641018C-6CAF-B84E-B92C-ECB119457FBA}" type="slidenum">
-              <a:rPr lang="en-US" smtClean="0"/>
-              <a:t>36</a:t>
-            </a:fld>
-            <a:endParaRPr lang="en-US" dirty="0"/>
-          </a:p>
-        </p:txBody>
-      </p:sp>
-    </p:spTree>
-    <p:extLst>
-      <p:ext uri="{BB962C8B-B14F-4D97-AF65-F5344CB8AC3E}">
-        <p14:creationId xmlns:p14="http://schemas.microsoft.com/office/powerpoint/2010/main" val="671229995"/>
       </p:ext>
     </p:extLst>
   </p:cSld>
@@ -3464,7 +2529,7 @@
           <a:p>
             <a:fld id="{5E75A0DC-66C6-4CEC-A5EB-F8C97CEC3796}" type="datetimeFigureOut">
               <a:rPr lang="es-MX" smtClean="0"/>
-              <a:t>29/04/2024</a:t>
+              <a:t>28/04/2025</a:t>
             </a:fld>
             <a:endParaRPr lang="es-MX" dirty="0"/>
           </a:p>
@@ -3634,7 +2699,7 @@
           <a:p>
             <a:fld id="{5E75A0DC-66C6-4CEC-A5EB-F8C97CEC3796}" type="datetimeFigureOut">
               <a:rPr lang="es-MX" smtClean="0"/>
-              <a:t>29/04/2024</a:t>
+              <a:t>28/04/2025</a:t>
             </a:fld>
             <a:endParaRPr lang="es-MX" dirty="0"/>
           </a:p>
@@ -3814,7 +2879,7 @@
           <a:p>
             <a:fld id="{5E75A0DC-66C6-4CEC-A5EB-F8C97CEC3796}" type="datetimeFigureOut">
               <a:rPr lang="es-MX" smtClean="0"/>
-              <a:t>29/04/2024</a:t>
+              <a:t>28/04/2025</a:t>
             </a:fld>
             <a:endParaRPr lang="es-MX" dirty="0"/>
           </a:p>
@@ -4146,7 +3211,7 @@
           <a:p>
             <a:fld id="{5E75A0DC-66C6-4CEC-A5EB-F8C97CEC3796}" type="datetimeFigureOut">
               <a:rPr lang="es-MX" smtClean="0"/>
-              <a:t>29/04/2024</a:t>
+              <a:t>28/04/2025</a:t>
             </a:fld>
             <a:endParaRPr lang="es-MX" dirty="0"/>
           </a:p>
@@ -4392,7 +3457,7 @@
           <a:p>
             <a:fld id="{5E75A0DC-66C6-4CEC-A5EB-F8C97CEC3796}" type="datetimeFigureOut">
               <a:rPr lang="es-MX" smtClean="0"/>
-              <a:t>29/04/2024</a:t>
+              <a:t>28/04/2025</a:t>
             </a:fld>
             <a:endParaRPr lang="es-MX" dirty="0"/>
           </a:p>
@@ -4680,7 +3745,7 @@
           <a:p>
             <a:fld id="{5E75A0DC-66C6-4CEC-A5EB-F8C97CEC3796}" type="datetimeFigureOut">
               <a:rPr lang="es-MX" smtClean="0"/>
-              <a:t>29/04/2024</a:t>
+              <a:t>28/04/2025</a:t>
             </a:fld>
             <a:endParaRPr lang="es-MX" dirty="0"/>
           </a:p>
@@ -5102,7 +4167,7 @@
           <a:p>
             <a:fld id="{5E75A0DC-66C6-4CEC-A5EB-F8C97CEC3796}" type="datetimeFigureOut">
               <a:rPr lang="es-MX" smtClean="0"/>
-              <a:t>29/04/2024</a:t>
+              <a:t>28/04/2025</a:t>
             </a:fld>
             <a:endParaRPr lang="es-MX" dirty="0"/>
           </a:p>
@@ -5220,7 +4285,7 @@
           <a:p>
             <a:fld id="{5E75A0DC-66C6-4CEC-A5EB-F8C97CEC3796}" type="datetimeFigureOut">
               <a:rPr lang="es-MX" smtClean="0"/>
-              <a:t>29/04/2024</a:t>
+              <a:t>28/04/2025</a:t>
             </a:fld>
             <a:endParaRPr lang="es-MX" dirty="0"/>
           </a:p>
@@ -5315,7 +4380,7 @@
           <a:p>
             <a:fld id="{5E75A0DC-66C6-4CEC-A5EB-F8C97CEC3796}" type="datetimeFigureOut">
               <a:rPr lang="es-MX" smtClean="0"/>
-              <a:t>29/04/2024</a:t>
+              <a:t>28/04/2025</a:t>
             </a:fld>
             <a:endParaRPr lang="es-MX" dirty="0"/>
           </a:p>
@@ -5592,7 +4657,7 @@
           <a:p>
             <a:fld id="{5E75A0DC-66C6-4CEC-A5EB-F8C97CEC3796}" type="datetimeFigureOut">
               <a:rPr lang="es-MX" smtClean="0"/>
-              <a:t>29/04/2024</a:t>
+              <a:t>28/04/2025</a:t>
             </a:fld>
             <a:endParaRPr lang="es-MX" dirty="0"/>
           </a:p>
@@ -5845,7 +4910,7 @@
           <a:p>
             <a:fld id="{5E75A0DC-66C6-4CEC-A5EB-F8C97CEC3796}" type="datetimeFigureOut">
               <a:rPr lang="es-MX" smtClean="0"/>
-              <a:t>29/04/2024</a:t>
+              <a:t>28/04/2025</a:t>
             </a:fld>
             <a:endParaRPr lang="es-MX" dirty="0"/>
           </a:p>
@@ -6058,7 +5123,7 @@
           <a:p>
             <a:fld id="{5E75A0DC-66C6-4CEC-A5EB-F8C97CEC3796}" type="datetimeFigureOut">
               <a:rPr lang="es-MX" smtClean="0"/>
-              <a:t>29/04/2024</a:t>
+              <a:t>28/04/2025</a:t>
             </a:fld>
             <a:endParaRPr lang="es-MX" dirty="0"/>
           </a:p>
@@ -7521,15 +6586,53 @@
           <a:bodyPr/>
           <a:lstStyle/>
           <a:p>
-            <a:pPr marL="628590" indent="-342900" algn="just">
+            <a:pPr indent="0" algn="just">
               <a:lnSpc>
                 <a:spcPct val="150000"/>
               </a:lnSpc>
               <a:spcBef>
                 <a:spcPts val="0"/>
               </a:spcBef>
-              <a:buAutoNum type="arabicParenR"/>
             </a:pPr>
+            <a:r>
+              <a:rPr lang="es-ES" sz="1800" b="1" dirty="0" err="1">
+                <a:solidFill>
+                  <a:schemeClr val="tx1">
+                    <a:lumMod val="95000"/>
+                    <a:lumOff val="5000"/>
+                  </a:schemeClr>
+                </a:solidFill>
+                <a:latin typeface="Arial" panose="020B0604020202020204" pitchFamily="34" charset="0"/>
+                <a:cs typeface="Arial" panose="020B0604020202020204" pitchFamily="34" charset="0"/>
+              </a:rPr>
+              <a:t>QoS</a:t>
+            </a:r>
+            <a:r>
+              <a:rPr lang="es-ES" sz="1800" b="1" dirty="0">
+                <a:solidFill>
+                  <a:schemeClr val="tx1">
+                    <a:lumMod val="95000"/>
+                    <a:lumOff val="5000"/>
+                  </a:schemeClr>
+                </a:solidFill>
+                <a:latin typeface="Arial" panose="020B0604020202020204" pitchFamily="34" charset="0"/>
+                <a:cs typeface="Arial" panose="020B0604020202020204" pitchFamily="34" charset="0"/>
+              </a:rPr>
+              <a:t> </a:t>
+            </a:r>
+            <a:r>
+              <a:rPr lang="es-ES" sz="1800" dirty="0">
+                <a:solidFill>
+                  <a:schemeClr val="tx1">
+                    <a:lumMod val="95000"/>
+                    <a:lumOff val="5000"/>
+                  </a:schemeClr>
+                </a:solidFill>
+                <a:latin typeface="Arial" panose="020B0604020202020204" pitchFamily="34" charset="0"/>
+                <a:cs typeface="Arial" panose="020B0604020202020204" pitchFamily="34" charset="0"/>
+              </a:rPr>
+              <a:t>puede gestionar el </a:t>
+            </a:r>
             <a:r>
               <a:rPr lang="es-ES" sz="1800" b="1" dirty="0">
                 <a:solidFill>
@@ -7540,20 +6643,59 @@
                 <a:latin typeface="Arial" panose="020B0604020202020204" pitchFamily="34" charset="0"/>
                 <a:cs typeface="Arial" panose="020B0604020202020204" pitchFamily="34" charset="0"/>
               </a:rPr>
-              <a:t>Ancho de banda</a:t>
-            </a:r>
-          </a:p>
-          <a:p>
-            <a:pPr marL="571440" indent="-285750" algn="just">
+              <a:t>ancho de banda </a:t>
+            </a:r>
+            <a:r>
+              <a:rPr lang="es-ES" sz="1800" dirty="0">
+                <a:solidFill>
+                  <a:schemeClr val="tx1">
+                    <a:lumMod val="95000"/>
+                    <a:lumOff val="5000"/>
+                  </a:schemeClr>
+                </a:solidFill>
+                <a:latin typeface="Arial" panose="020B0604020202020204" pitchFamily="34" charset="0"/>
+                <a:cs typeface="Arial" panose="020B0604020202020204" pitchFamily="34" charset="0"/>
+              </a:rPr>
+              <a:t>del tráfico de una red.</a:t>
+            </a:r>
+          </a:p>
+          <a:p>
+            <a:pPr indent="0" algn="just">
+              <a:spcBef>
+                <a:spcPts val="0"/>
+              </a:spcBef>
+            </a:pPr>
+            <a:endParaRPr lang="es-ES" sz="800" b="1" dirty="0">
+              <a:solidFill>
+                <a:schemeClr val="accent6">
+                  <a:lumMod val="75000"/>
+                </a:schemeClr>
+              </a:solidFill>
+              <a:latin typeface="Arial" panose="020B0604020202020204" pitchFamily="34" charset="0"/>
+              <a:cs typeface="Arial" panose="020B0604020202020204" pitchFamily="34" charset="0"/>
+            </a:endParaRPr>
+          </a:p>
+          <a:p>
+            <a:pPr indent="0" algn="just">
               <a:lnSpc>
                 <a:spcPct val="150000"/>
               </a:lnSpc>
               <a:spcBef>
                 <a:spcPts val="0"/>
               </a:spcBef>
-              <a:buFont typeface="Arial" panose="020B0604020202020204" pitchFamily="34" charset="0"/>
-              <a:buChar char="•"/>
             </a:pPr>
+            <a:r>
+              <a:rPr lang="es-ES" sz="1800" b="1" dirty="0">
+                <a:solidFill>
+                  <a:schemeClr val="accent6">
+                    <a:lumMod val="75000"/>
+                  </a:schemeClr>
+                </a:solidFill>
+                <a:latin typeface="Arial" panose="020B0604020202020204" pitchFamily="34" charset="0"/>
+                <a:cs typeface="Arial" panose="020B0604020202020204" pitchFamily="34" charset="0"/>
+              </a:rPr>
+              <a:t>Ancho de banda </a:t>
+            </a:r>
             <a:r>
               <a:rPr lang="es-ES" sz="1800" dirty="0">
                 <a:solidFill>
@@ -7565,7 +6707,7 @@
                 <a:latin typeface="Arial" panose="020B0604020202020204" pitchFamily="34" charset="0"/>
                 <a:cs typeface="Arial" panose="020B0604020202020204" pitchFamily="34" charset="0"/>
               </a:rPr>
-              <a:t>Se refiere a la capacidad total del enlace y se mide en bits por segundo (por ejemplo Kbps, Mbps, Gbps, </a:t>
+              <a:t>Se refiere a la capacidad total del enlace y se mide en bits por segundo (por ejemplo, Kbps, Mbps, Gbps, </a:t>
             </a:r>
             <a:r>
               <a:rPr lang="es-ES" sz="1800" dirty="0" err="1">
@@ -7595,15 +6737,30 @@
             </a:r>
           </a:p>
           <a:p>
-            <a:pPr marL="571440" indent="-285750" algn="just">
+            <a:pPr indent="0" algn="just">
+              <a:spcBef>
+                <a:spcPts val="0"/>
+              </a:spcBef>
+            </a:pPr>
+            <a:endParaRPr lang="es-ES" sz="800" dirty="0">
+              <a:solidFill>
+                <a:schemeClr val="tx1">
+                  <a:lumMod val="95000"/>
+                  <a:lumOff val="5000"/>
+                </a:schemeClr>
+              </a:solidFill>
+              <a:latin typeface="Arial" panose="020B0604020202020204" pitchFamily="34" charset="0"/>
+              <a:cs typeface="Arial" panose="020B0604020202020204" pitchFamily="34" charset="0"/>
+            </a:endParaRPr>
+          </a:p>
+          <a:p>
+            <a:pPr indent="0" algn="just">
               <a:lnSpc>
                 <a:spcPct val="150000"/>
               </a:lnSpc>
               <a:spcBef>
                 <a:spcPts val="0"/>
               </a:spcBef>
-              <a:buFont typeface="Arial" panose="020B0604020202020204" pitchFamily="34" charset="0"/>
-              <a:buChar char="•"/>
             </a:pPr>
             <a:r>
               <a:rPr lang="es-ES" sz="1800" dirty="0">
@@ -7647,12 +6804,22 @@
             <a:r>
               <a:rPr lang="es-ES" sz="1800" b="1" dirty="0">
                 <a:solidFill>
+                  <a:srgbClr val="0070C0"/>
+                </a:solidFill>
+                <a:latin typeface="Arial" panose="020B0604020202020204" pitchFamily="34" charset="0"/>
+                <a:cs typeface="Arial" panose="020B0604020202020204" pitchFamily="34" charset="0"/>
+              </a:rPr>
+              <a:t>reservar una cierta cantidad de ancho de banda de un enlace para tipos específicos de tráfico</a:t>
+            </a:r>
+            <a:r>
+              <a:rPr lang="es-ES" sz="1800" b="1" dirty="0">
+                <a:solidFill>
                   <a:srgbClr val="00B0F0"/>
                 </a:solidFill>
                 <a:latin typeface="Arial" panose="020B0604020202020204" pitchFamily="34" charset="0"/>
                 <a:cs typeface="Arial" panose="020B0604020202020204" pitchFamily="34" charset="0"/>
               </a:rPr>
-              <a:t>reservar una cierta cantidad de ancho de banda de un enlace para tipos específicos de tráfico. </a:t>
+              <a:t>. </a:t>
             </a:r>
           </a:p>
           <a:p>
@@ -7940,7 +7107,7 @@
         </p:blipFill>
         <p:spPr>
           <a:xfrm>
-            <a:off x="4658215" y="3539486"/>
+            <a:off x="4342985" y="3627881"/>
             <a:ext cx="4111579" cy="2876733"/>
           </a:xfrm>
           <a:prstGeom prst="rect">
@@ -7964,8 +7131,8 @@
         </p:nvSpPr>
         <p:spPr>
           <a:xfrm>
-            <a:off x="467543" y="3673692"/>
-            <a:ext cx="4018243" cy="2608319"/>
+            <a:off x="179513" y="3627881"/>
+            <a:ext cx="3816424" cy="2321400"/>
           </a:xfrm>
           <a:prstGeom prst="rect">
             <a:avLst/>
@@ -8293,5440 +7460,6 @@
 </file>
 
 <file path=ppt/slides/slide13.xml><?xml version="1.0" encoding="utf-8"?>
-<p:sld xmlns:a="http://schemas.openxmlformats.org/drawingml/2006/main" xmlns:r="http://schemas.openxmlformats.org/officeDocument/2006/relationships" xmlns:p="http://schemas.openxmlformats.org/presentationml/2006/main">
-  <p:cSld>
-    <p:spTree>
-      <p:nvGrpSpPr>
-        <p:cNvPr id="1" name=""/>
-        <p:cNvGrpSpPr/>
-        <p:nvPr/>
-      </p:nvGrpSpPr>
-      <p:grpSpPr>
-        <a:xfrm>
-          <a:off x="0" y="0"/>
-          <a:ext cx="0" cy="0"/>
-          <a:chOff x="0" y="0"/>
-          <a:chExt cx="0" cy="0"/>
-        </a:xfrm>
-      </p:grpSpPr>
-      <p:sp>
-        <p:nvSpPr>
-          <p:cNvPr id="2" name="Content Placeholder 1"/>
-          <p:cNvSpPr>
-            <a:spLocks noGrp="1"/>
-          </p:cNvSpPr>
-          <p:nvPr>
-            <p:ph idx="1"/>
-          </p:nvPr>
-        </p:nvSpPr>
-        <p:spPr>
-          <a:xfrm>
-            <a:off x="107504" y="1340768"/>
-            <a:ext cx="8590279" cy="2608319"/>
-          </a:xfrm>
-        </p:spPr>
-        <p:txBody>
-          <a:bodyPr/>
-          <a:lstStyle/>
-          <a:p>
-            <a:pPr indent="0" algn="just">
-              <a:lnSpc>
-                <a:spcPct val="150000"/>
-              </a:lnSpc>
-              <a:spcBef>
-                <a:spcPts val="0"/>
-              </a:spcBef>
-            </a:pPr>
-            <a:r>
-              <a:rPr lang="es-ES" sz="1800" b="1" dirty="0">
-                <a:solidFill>
-                  <a:schemeClr val="accent6">
-                    <a:lumMod val="75000"/>
-                  </a:schemeClr>
-                </a:solidFill>
-                <a:latin typeface="Arial" panose="020B0604020202020204" pitchFamily="34" charset="0"/>
-                <a:cs typeface="Arial" panose="020B0604020202020204" pitchFamily="34" charset="0"/>
-              </a:rPr>
-              <a:t>2) Demora (</a:t>
-            </a:r>
-            <a:r>
-              <a:rPr lang="es-ES" sz="1800" b="1" dirty="0" err="1">
-                <a:solidFill>
-                  <a:schemeClr val="accent6">
-                    <a:lumMod val="75000"/>
-                  </a:schemeClr>
-                </a:solidFill>
-                <a:latin typeface="Arial" panose="020B0604020202020204" pitchFamily="34" charset="0"/>
-                <a:cs typeface="Arial" panose="020B0604020202020204" pitchFamily="34" charset="0"/>
-              </a:rPr>
-              <a:t>Delay</a:t>
-            </a:r>
-            <a:r>
-              <a:rPr lang="es-ES" sz="1800" b="1" dirty="0">
-                <a:solidFill>
-                  <a:schemeClr val="accent6">
-                    <a:lumMod val="75000"/>
-                  </a:schemeClr>
-                </a:solidFill>
-                <a:latin typeface="Arial" panose="020B0604020202020204" pitchFamily="34" charset="0"/>
-                <a:cs typeface="Arial" panose="020B0604020202020204" pitchFamily="34" charset="0"/>
-              </a:rPr>
-              <a:t>)  </a:t>
-            </a:r>
-          </a:p>
-          <a:p>
-            <a:pPr indent="0" algn="just">
-              <a:lnSpc>
-                <a:spcPct val="150000"/>
-              </a:lnSpc>
-              <a:spcBef>
-                <a:spcPts val="0"/>
-              </a:spcBef>
-            </a:pPr>
-            <a:r>
-              <a:rPr lang="es-ES" sz="1800" dirty="0">
-                <a:solidFill>
-                  <a:schemeClr val="tx1">
-                    <a:lumMod val="95000"/>
-                    <a:lumOff val="5000"/>
-                  </a:schemeClr>
-                </a:solidFill>
-                <a:latin typeface="Arial" panose="020B0604020202020204" pitchFamily="34" charset="0"/>
-                <a:cs typeface="Arial" panose="020B0604020202020204" pitchFamily="34" charset="0"/>
-              </a:rPr>
-              <a:t>    Hay dos formas principales de medir el retraso.</a:t>
-            </a:r>
-          </a:p>
-          <a:p>
-            <a:pPr marL="896938" indent="-358775" algn="just">
-              <a:lnSpc>
-                <a:spcPct val="150000"/>
-              </a:lnSpc>
-              <a:spcBef>
-                <a:spcPts val="0"/>
-              </a:spcBef>
-              <a:buFont typeface="+mj-lt"/>
-              <a:buAutoNum type="alphaLcParenR"/>
-            </a:pPr>
-            <a:r>
-              <a:rPr lang="es-ES" sz="1800" dirty="0">
-                <a:solidFill>
-                  <a:schemeClr val="tx1">
-                    <a:lumMod val="95000"/>
-                    <a:lumOff val="5000"/>
-                  </a:schemeClr>
-                </a:solidFill>
-                <a:latin typeface="Arial" panose="020B0604020202020204" pitchFamily="34" charset="0"/>
-                <a:cs typeface="Arial" panose="020B0604020202020204" pitchFamily="34" charset="0"/>
-              </a:rPr>
-              <a:t>La cantidad de tiempo que tarda el tráfico en ir del origen al destino = </a:t>
-            </a:r>
-            <a:r>
-              <a:rPr lang="es-ES" sz="1800" b="1" dirty="0">
-                <a:solidFill>
-                  <a:srgbClr val="00B0F0"/>
-                </a:solidFill>
-                <a:latin typeface="Arial" panose="020B0604020202020204" pitchFamily="34" charset="0"/>
-                <a:cs typeface="Arial" panose="020B0604020202020204" pitchFamily="34" charset="0"/>
-              </a:rPr>
-              <a:t>Demora en un solo sentido (</a:t>
-            </a:r>
-            <a:r>
-              <a:rPr lang="es-ES" sz="1800" b="1" dirty="0" err="1">
-                <a:solidFill>
-                  <a:srgbClr val="00B0F0"/>
-                </a:solidFill>
-                <a:latin typeface="Arial" panose="020B0604020202020204" pitchFamily="34" charset="0"/>
-                <a:cs typeface="Arial" panose="020B0604020202020204" pitchFamily="34" charset="0"/>
-              </a:rPr>
-              <a:t>one-way</a:t>
-            </a:r>
-            <a:r>
-              <a:rPr lang="es-ES" sz="1800" b="1" dirty="0">
-                <a:solidFill>
-                  <a:srgbClr val="00B0F0"/>
-                </a:solidFill>
-                <a:latin typeface="Arial" panose="020B0604020202020204" pitchFamily="34" charset="0"/>
-                <a:cs typeface="Arial" panose="020B0604020202020204" pitchFamily="34" charset="0"/>
-              </a:rPr>
-              <a:t> </a:t>
-            </a:r>
-            <a:r>
-              <a:rPr lang="es-ES" sz="1800" b="1" dirty="0" err="1">
-                <a:solidFill>
-                  <a:srgbClr val="00B0F0"/>
-                </a:solidFill>
-                <a:latin typeface="Arial" panose="020B0604020202020204" pitchFamily="34" charset="0"/>
-                <a:cs typeface="Arial" panose="020B0604020202020204" pitchFamily="34" charset="0"/>
-              </a:rPr>
-              <a:t>delay</a:t>
-            </a:r>
-            <a:r>
-              <a:rPr lang="es-ES" sz="1800" b="1" dirty="0">
-                <a:solidFill>
-                  <a:srgbClr val="00B0F0"/>
-                </a:solidFill>
-                <a:latin typeface="Arial" panose="020B0604020202020204" pitchFamily="34" charset="0"/>
-                <a:cs typeface="Arial" panose="020B0604020202020204" pitchFamily="34" charset="0"/>
-              </a:rPr>
-              <a:t>) </a:t>
-            </a:r>
-          </a:p>
-          <a:p>
-            <a:pPr marL="1255713" lvl="1" indent="-358775" algn="just">
-              <a:lnSpc>
-                <a:spcPct val="150000"/>
-              </a:lnSpc>
-              <a:spcBef>
-                <a:spcPts val="0"/>
-              </a:spcBef>
-              <a:buFont typeface="Arial" panose="020B0604020202020204" pitchFamily="34" charset="0"/>
-              <a:buChar char="•"/>
-            </a:pPr>
-            <a:r>
-              <a:rPr lang="es-ES" sz="1800" dirty="0">
-                <a:solidFill>
-                  <a:schemeClr val="tx1"/>
-                </a:solidFill>
-                <a:latin typeface="Arial" panose="020B0604020202020204" pitchFamily="34" charset="0"/>
-                <a:cs typeface="Arial" panose="020B0604020202020204" pitchFamily="34" charset="0"/>
-              </a:rPr>
-              <a:t>La cantidad de tiempo que tarda un paquete desde el teléfono 1 en llegar al teléfono 2 se denomina demora unidireccional.</a:t>
-            </a:r>
-          </a:p>
-        </p:txBody>
-      </p:sp>
-      <p:sp>
-        <p:nvSpPr>
-          <p:cNvPr id="4" name="Rectangle 5">
-            <a:extLst>
-              <a:ext uri="{FF2B5EF4-FFF2-40B4-BE49-F238E27FC236}">
-                <a16:creationId xmlns:a16="http://schemas.microsoft.com/office/drawing/2014/main" id="{BD2FAA3E-64BB-4FFB-46CC-02579F1E62D9}"/>
-              </a:ext>
-            </a:extLst>
-          </p:cNvPr>
-          <p:cNvSpPr txBox="1">
-            <a:spLocks noChangeArrowheads="1"/>
-          </p:cNvSpPr>
-          <p:nvPr/>
-        </p:nvSpPr>
-        <p:spPr bwMode="auto">
-          <a:xfrm>
-            <a:off x="1028700" y="37721"/>
-            <a:ext cx="7086600" cy="1143000"/>
-          </a:xfrm>
-          <a:prstGeom prst="rect">
-            <a:avLst/>
-          </a:prstGeom>
-          <a:noFill/>
-          <a:ln>
-            <a:noFill/>
-          </a:ln>
-          <a:extLst>
-            <a:ext uri="{909E8E84-426E-40DD-AFC4-6F175D3DCCD1}">
-              <a14:hiddenFill xmlns:a14="http://schemas.microsoft.com/office/drawing/2010/main">
-                <a:solidFill>
-                  <a:srgbClr val="FFFFFF"/>
-                </a:solidFill>
-              </a14:hiddenFill>
-            </a:ext>
-            <a:ext uri="{91240B29-F687-4F45-9708-019B960494DF}">
-              <a14:hiddenLine xmlns:a14="http://schemas.microsoft.com/office/drawing/2010/main" w="9525">
-                <a:solidFill>
-                  <a:srgbClr val="000000"/>
-                </a:solidFill>
-                <a:miter lim="800000"/>
-                <a:headEnd/>
-                <a:tailEnd/>
-              </a14:hiddenLine>
-            </a:ext>
-          </a:extLst>
-        </p:spPr>
-        <p:txBody>
-          <a:bodyPr vert="horz" lIns="91440" tIns="45720" rIns="91440" bIns="45720" rtlCol="0" anchor="ctr">
-            <a:normAutofit/>
-          </a:bodyPr>
-          <a:lstStyle>
-            <a:lvl1pPr algn="ctr" defTabSz="914400" rtl="0" eaLnBrk="1" latinLnBrk="0" hangingPunct="1">
-              <a:spcBef>
-                <a:spcPct val="0"/>
-              </a:spcBef>
-              <a:buNone/>
-              <a:defRPr sz="4400" kern="1200">
-                <a:solidFill>
-                  <a:srgbClr val="004C69"/>
-                </a:solidFill>
-                <a:latin typeface="+mj-lt"/>
-                <a:ea typeface="+mj-ea"/>
-                <a:cs typeface="+mj-cs"/>
-              </a:defRPr>
-            </a:lvl1pPr>
-          </a:lstStyle>
-          <a:p>
-            <a:pPr>
-              <a:spcBef>
-                <a:spcPts val="0"/>
-              </a:spcBef>
-            </a:pPr>
-            <a:r>
-              <a:rPr lang="es-ES_tradnl" altLang="es-MX" sz="3200" b="1" dirty="0" err="1">
-                <a:solidFill>
-                  <a:schemeClr val="accent4">
-                    <a:lumMod val="50000"/>
-                  </a:schemeClr>
-                </a:solidFill>
-                <a:effectLst>
-                  <a:outerShdw blurRad="38100" dist="38100" dir="2700000" algn="tl">
-                    <a:srgbClr val="C0C0C0"/>
-                  </a:outerShdw>
-                </a:effectLst>
-                <a:latin typeface="Dom Casual" charset="0"/>
-              </a:rPr>
-              <a:t>Quality</a:t>
-            </a:r>
-            <a:r>
-              <a:rPr lang="es-ES_tradnl" altLang="es-MX" sz="3200" b="1" dirty="0">
-                <a:solidFill>
-                  <a:schemeClr val="accent4">
-                    <a:lumMod val="50000"/>
-                  </a:schemeClr>
-                </a:solidFill>
-                <a:effectLst>
-                  <a:outerShdw blurRad="38100" dist="38100" dir="2700000" algn="tl">
-                    <a:srgbClr val="C0C0C0"/>
-                  </a:outerShdw>
-                </a:effectLst>
-                <a:latin typeface="Dom Casual" charset="0"/>
-              </a:rPr>
-              <a:t> </a:t>
-            </a:r>
-            <a:r>
-              <a:rPr lang="es-ES_tradnl" altLang="es-MX" sz="3200" b="1" dirty="0" err="1">
-                <a:solidFill>
-                  <a:schemeClr val="accent4">
-                    <a:lumMod val="50000"/>
-                  </a:schemeClr>
-                </a:solidFill>
-                <a:effectLst>
-                  <a:outerShdw blurRad="38100" dist="38100" dir="2700000" algn="tl">
-                    <a:srgbClr val="C0C0C0"/>
-                  </a:outerShdw>
-                </a:effectLst>
-                <a:latin typeface="Dom Casual" charset="0"/>
-              </a:rPr>
-              <a:t>of</a:t>
-            </a:r>
-            <a:r>
-              <a:rPr lang="es-ES_tradnl" altLang="es-MX" sz="3200" b="1" dirty="0">
-                <a:solidFill>
-                  <a:schemeClr val="accent4">
-                    <a:lumMod val="50000"/>
-                  </a:schemeClr>
-                </a:solidFill>
-                <a:effectLst>
-                  <a:outerShdw blurRad="38100" dist="38100" dir="2700000" algn="tl">
-                    <a:srgbClr val="C0C0C0"/>
-                  </a:outerShdw>
-                </a:effectLst>
-                <a:latin typeface="Dom Casual" charset="0"/>
-              </a:rPr>
-              <a:t> </a:t>
-            </a:r>
-            <a:r>
-              <a:rPr lang="es-ES_tradnl" altLang="es-MX" sz="3200" b="1" dirty="0" err="1">
-                <a:solidFill>
-                  <a:schemeClr val="accent4">
-                    <a:lumMod val="50000"/>
-                  </a:schemeClr>
-                </a:solidFill>
-                <a:effectLst>
-                  <a:outerShdw blurRad="38100" dist="38100" dir="2700000" algn="tl">
-                    <a:srgbClr val="C0C0C0"/>
-                  </a:outerShdw>
-                </a:effectLst>
-                <a:latin typeface="Dom Casual" charset="0"/>
-              </a:rPr>
-              <a:t>service</a:t>
-            </a:r>
-            <a:r>
-              <a:rPr lang="es-ES_tradnl" altLang="es-MX" sz="3200" b="1" dirty="0">
-                <a:solidFill>
-                  <a:schemeClr val="accent4">
-                    <a:lumMod val="50000"/>
-                  </a:schemeClr>
-                </a:solidFill>
-                <a:effectLst>
-                  <a:outerShdw blurRad="38100" dist="38100" dir="2700000" algn="tl">
-                    <a:srgbClr val="C0C0C0"/>
-                  </a:outerShdw>
-                </a:effectLst>
-                <a:latin typeface="Dom Casual" charset="0"/>
-              </a:rPr>
-              <a:t> (</a:t>
-            </a:r>
-            <a:r>
-              <a:rPr lang="es-ES_tradnl" altLang="es-MX" sz="3200" b="1" dirty="0" err="1">
-                <a:solidFill>
-                  <a:schemeClr val="accent4">
-                    <a:lumMod val="50000"/>
-                  </a:schemeClr>
-                </a:solidFill>
-                <a:effectLst>
-                  <a:outerShdw blurRad="38100" dist="38100" dir="2700000" algn="tl">
-                    <a:srgbClr val="C0C0C0"/>
-                  </a:outerShdw>
-                </a:effectLst>
-                <a:latin typeface="Dom Casual" charset="0"/>
-              </a:rPr>
-              <a:t>QoS</a:t>
-            </a:r>
-            <a:r>
-              <a:rPr lang="es-ES_tradnl" altLang="es-MX" sz="3200" b="1" dirty="0">
-                <a:solidFill>
-                  <a:schemeClr val="accent4">
-                    <a:lumMod val="50000"/>
-                  </a:schemeClr>
-                </a:solidFill>
-                <a:effectLst>
-                  <a:outerShdw blurRad="38100" dist="38100" dir="2700000" algn="tl">
-                    <a:srgbClr val="C0C0C0"/>
-                  </a:outerShdw>
-                </a:effectLst>
-                <a:latin typeface="Dom Casual" charset="0"/>
-              </a:rPr>
-              <a:t>)</a:t>
-            </a:r>
-          </a:p>
-          <a:p>
-            <a:pPr>
-              <a:spcBef>
-                <a:spcPts val="0"/>
-              </a:spcBef>
-            </a:pPr>
-            <a:r>
-              <a:rPr lang="es-ES_tradnl" altLang="es-MX" sz="1800" b="1" dirty="0">
-                <a:solidFill>
-                  <a:schemeClr val="accent3">
-                    <a:lumMod val="75000"/>
-                  </a:schemeClr>
-                </a:solidFill>
-                <a:latin typeface="Dom Casual" charset="0"/>
-              </a:rPr>
-              <a:t>Demora - </a:t>
-            </a:r>
-            <a:r>
-              <a:rPr lang="es-ES_tradnl" altLang="es-MX" sz="1800" b="1" dirty="0" err="1">
-                <a:solidFill>
-                  <a:schemeClr val="accent3">
-                    <a:lumMod val="75000"/>
-                  </a:schemeClr>
-                </a:solidFill>
-                <a:latin typeface="Dom Casual" charset="0"/>
-              </a:rPr>
-              <a:t>Delay</a:t>
-            </a:r>
-            <a:endParaRPr lang="es-ES_tradnl" altLang="es-MX" sz="1800" b="1" dirty="0">
-              <a:solidFill>
-                <a:schemeClr val="accent3">
-                  <a:lumMod val="75000"/>
-                </a:schemeClr>
-              </a:solidFill>
-              <a:latin typeface="Dom Casual" charset="0"/>
-            </a:endParaRPr>
-          </a:p>
-        </p:txBody>
-      </p:sp>
-      <p:pic>
-        <p:nvPicPr>
-          <p:cNvPr id="13" name="Imagen 12">
-            <a:extLst>
-              <a:ext uri="{FF2B5EF4-FFF2-40B4-BE49-F238E27FC236}">
-                <a16:creationId xmlns:a16="http://schemas.microsoft.com/office/drawing/2014/main" id="{848DCE5A-B05B-A69C-C728-F2BF7E4DEB00}"/>
-              </a:ext>
-            </a:extLst>
-          </p:cNvPr>
-          <p:cNvPicPr>
-            <a:picLocks noChangeAspect="1"/>
-          </p:cNvPicPr>
-          <p:nvPr/>
-        </p:nvPicPr>
-        <p:blipFill>
-          <a:blip r:embed="rId3"/>
-          <a:stretch>
-            <a:fillRect/>
-          </a:stretch>
-        </p:blipFill>
-        <p:spPr>
-          <a:xfrm>
-            <a:off x="2836" y="4221088"/>
-            <a:ext cx="9141164" cy="1663087"/>
-          </a:xfrm>
-          <a:prstGeom prst="rect">
-            <a:avLst/>
-          </a:prstGeom>
-        </p:spPr>
-      </p:pic>
-    </p:spTree>
-    <p:extLst>
-      <p:ext uri="{BB962C8B-B14F-4D97-AF65-F5344CB8AC3E}">
-        <p14:creationId xmlns:p14="http://schemas.microsoft.com/office/powerpoint/2010/main" val="1064112853"/>
-      </p:ext>
-    </p:extLst>
-  </p:cSld>
-  <p:clrMapOvr>
-    <a:masterClrMapping/>
-  </p:clrMapOvr>
-  <mc:AlternateContent xmlns:mc="http://schemas.openxmlformats.org/markup-compatibility/2006" xmlns:p14="http://schemas.microsoft.com/office/powerpoint/2010/main">
-    <mc:Choice Requires="p14">
-      <p:transition spd="med" p14:dur="700">
-        <p:fade/>
-      </p:transition>
-    </mc:Choice>
-    <mc:Fallback xmlns="">
-      <p:transition xmlns:p14="http://schemas.microsoft.com/office/powerpoint/2010/main" spd="med">
-        <p:fade/>
-      </p:transition>
-    </mc:Fallback>
-  </mc:AlternateContent>
-</p:sld>
-</file>
-
-<file path=ppt/slides/slide14.xml><?xml version="1.0" encoding="utf-8"?>
-<p:sld xmlns:a="http://schemas.openxmlformats.org/drawingml/2006/main" xmlns:r="http://schemas.openxmlformats.org/officeDocument/2006/relationships" xmlns:p="http://schemas.openxmlformats.org/presentationml/2006/main">
-  <p:cSld>
-    <p:spTree>
-      <p:nvGrpSpPr>
-        <p:cNvPr id="1" name=""/>
-        <p:cNvGrpSpPr/>
-        <p:nvPr/>
-      </p:nvGrpSpPr>
-      <p:grpSpPr>
-        <a:xfrm>
-          <a:off x="0" y="0"/>
-          <a:ext cx="0" cy="0"/>
-          <a:chOff x="0" y="0"/>
-          <a:chExt cx="0" cy="0"/>
-        </a:xfrm>
-      </p:grpSpPr>
-      <p:sp>
-        <p:nvSpPr>
-          <p:cNvPr id="2" name="Content Placeholder 1"/>
-          <p:cNvSpPr>
-            <a:spLocks noGrp="1"/>
-          </p:cNvSpPr>
-          <p:nvPr>
-            <p:ph idx="1"/>
-          </p:nvPr>
-        </p:nvSpPr>
-        <p:spPr>
-          <a:xfrm>
-            <a:off x="8632" y="1556793"/>
-            <a:ext cx="8590279" cy="2088232"/>
-          </a:xfrm>
-        </p:spPr>
-        <p:txBody>
-          <a:bodyPr/>
-          <a:lstStyle/>
-          <a:p>
-            <a:pPr marL="628590" indent="-342900" algn="just">
-              <a:lnSpc>
-                <a:spcPct val="150000"/>
-              </a:lnSpc>
-              <a:spcBef>
-                <a:spcPts val="0"/>
-              </a:spcBef>
-              <a:buFont typeface="+mj-lt"/>
-              <a:buAutoNum type="alphaLcParenR" startAt="2"/>
-            </a:pPr>
-            <a:r>
-              <a:rPr lang="es-ES" sz="1800" dirty="0">
-                <a:solidFill>
-                  <a:schemeClr val="tx1">
-                    <a:lumMod val="95000"/>
-                    <a:lumOff val="5000"/>
-                  </a:schemeClr>
-                </a:solidFill>
-                <a:latin typeface="Arial" panose="020B0604020202020204" pitchFamily="34" charset="0"/>
-                <a:cs typeface="Arial" panose="020B0604020202020204" pitchFamily="34" charset="0"/>
-              </a:rPr>
-              <a:t>La cantidad de tiempo que tarda el tráfico en ir del origen al destino y regresar = </a:t>
-            </a:r>
-            <a:r>
-              <a:rPr lang="es-ES" sz="1800" b="1" dirty="0">
-                <a:solidFill>
-                  <a:srgbClr val="00B0F0"/>
-                </a:solidFill>
-                <a:latin typeface="Arial" panose="020B0604020202020204" pitchFamily="34" charset="0"/>
-                <a:cs typeface="Arial" panose="020B0604020202020204" pitchFamily="34" charset="0"/>
-              </a:rPr>
-              <a:t>Demora bidireccional (</a:t>
-            </a:r>
-            <a:r>
-              <a:rPr lang="es-ES" sz="1800" b="1" dirty="0" err="1">
-                <a:solidFill>
-                  <a:srgbClr val="00B0F0"/>
-                </a:solidFill>
-                <a:latin typeface="Arial" panose="020B0604020202020204" pitchFamily="34" charset="0"/>
-                <a:cs typeface="Arial" panose="020B0604020202020204" pitchFamily="34" charset="0"/>
-              </a:rPr>
-              <a:t>two-way</a:t>
-            </a:r>
-            <a:r>
-              <a:rPr lang="es-ES" sz="1800" b="1" dirty="0">
-                <a:solidFill>
-                  <a:srgbClr val="00B0F0"/>
-                </a:solidFill>
-                <a:latin typeface="Arial" panose="020B0604020202020204" pitchFamily="34" charset="0"/>
-                <a:cs typeface="Arial" panose="020B0604020202020204" pitchFamily="34" charset="0"/>
-              </a:rPr>
-              <a:t> </a:t>
-            </a:r>
-            <a:r>
-              <a:rPr lang="es-ES" sz="1800" b="1" dirty="0" err="1">
-                <a:solidFill>
-                  <a:srgbClr val="00B0F0"/>
-                </a:solidFill>
-                <a:latin typeface="Arial" panose="020B0604020202020204" pitchFamily="34" charset="0"/>
-                <a:cs typeface="Arial" panose="020B0604020202020204" pitchFamily="34" charset="0"/>
-              </a:rPr>
-              <a:t>delay</a:t>
-            </a:r>
-            <a:r>
-              <a:rPr lang="es-ES" sz="1800" b="1" dirty="0">
-                <a:solidFill>
-                  <a:srgbClr val="00B0F0"/>
-                </a:solidFill>
-                <a:latin typeface="Arial" panose="020B0604020202020204" pitchFamily="34" charset="0"/>
-                <a:cs typeface="Arial" panose="020B0604020202020204" pitchFamily="34" charset="0"/>
-              </a:rPr>
-              <a:t>) </a:t>
-            </a:r>
-          </a:p>
-          <a:p>
-            <a:pPr marL="912813" lvl="1" algn="just">
-              <a:lnSpc>
-                <a:spcPct val="150000"/>
-              </a:lnSpc>
-              <a:spcBef>
-                <a:spcPts val="0"/>
-              </a:spcBef>
-              <a:buFont typeface="Arial" panose="020B0604020202020204" pitchFamily="34" charset="0"/>
-              <a:buChar char="•"/>
-            </a:pPr>
-            <a:r>
-              <a:rPr lang="es-ES" sz="1800" dirty="0">
-                <a:solidFill>
-                  <a:schemeClr val="tx1">
-                    <a:lumMod val="95000"/>
-                    <a:lumOff val="5000"/>
-                  </a:schemeClr>
-                </a:solidFill>
-                <a:latin typeface="Arial" panose="020B0604020202020204" pitchFamily="34" charset="0"/>
-                <a:cs typeface="Arial" panose="020B0604020202020204" pitchFamily="34" charset="0"/>
-              </a:rPr>
-              <a:t>No solo mide cuánto tarda un paquete en ir del teléfono 1 al teléfono 2, sino también cuánto tiempo tarda la respuesta en volver al teléfono 1.</a:t>
-            </a:r>
-          </a:p>
-        </p:txBody>
-      </p:sp>
-      <p:sp>
-        <p:nvSpPr>
-          <p:cNvPr id="4" name="Rectangle 5">
-            <a:extLst>
-              <a:ext uri="{FF2B5EF4-FFF2-40B4-BE49-F238E27FC236}">
-                <a16:creationId xmlns:a16="http://schemas.microsoft.com/office/drawing/2014/main" id="{BD2FAA3E-64BB-4FFB-46CC-02579F1E62D9}"/>
-              </a:ext>
-            </a:extLst>
-          </p:cNvPr>
-          <p:cNvSpPr txBox="1">
-            <a:spLocks noChangeArrowheads="1"/>
-          </p:cNvSpPr>
-          <p:nvPr/>
-        </p:nvSpPr>
-        <p:spPr bwMode="auto">
-          <a:xfrm>
-            <a:off x="1028700" y="37721"/>
-            <a:ext cx="7086600" cy="1143000"/>
-          </a:xfrm>
-          <a:prstGeom prst="rect">
-            <a:avLst/>
-          </a:prstGeom>
-          <a:noFill/>
-          <a:ln>
-            <a:noFill/>
-          </a:ln>
-          <a:extLst>
-            <a:ext uri="{909E8E84-426E-40DD-AFC4-6F175D3DCCD1}">
-              <a14:hiddenFill xmlns:a14="http://schemas.microsoft.com/office/drawing/2010/main">
-                <a:solidFill>
-                  <a:srgbClr val="FFFFFF"/>
-                </a:solidFill>
-              </a14:hiddenFill>
-            </a:ext>
-            <a:ext uri="{91240B29-F687-4F45-9708-019B960494DF}">
-              <a14:hiddenLine xmlns:a14="http://schemas.microsoft.com/office/drawing/2010/main" w="9525">
-                <a:solidFill>
-                  <a:srgbClr val="000000"/>
-                </a:solidFill>
-                <a:miter lim="800000"/>
-                <a:headEnd/>
-                <a:tailEnd/>
-              </a14:hiddenLine>
-            </a:ext>
-          </a:extLst>
-        </p:spPr>
-        <p:txBody>
-          <a:bodyPr vert="horz" lIns="91440" tIns="45720" rIns="91440" bIns="45720" rtlCol="0" anchor="ctr">
-            <a:normAutofit/>
-          </a:bodyPr>
-          <a:lstStyle>
-            <a:lvl1pPr algn="ctr" defTabSz="914400" rtl="0" eaLnBrk="1" latinLnBrk="0" hangingPunct="1">
-              <a:spcBef>
-                <a:spcPct val="0"/>
-              </a:spcBef>
-              <a:buNone/>
-              <a:defRPr sz="4400" kern="1200">
-                <a:solidFill>
-                  <a:srgbClr val="004C69"/>
-                </a:solidFill>
-                <a:latin typeface="+mj-lt"/>
-                <a:ea typeface="+mj-ea"/>
-                <a:cs typeface="+mj-cs"/>
-              </a:defRPr>
-            </a:lvl1pPr>
-          </a:lstStyle>
-          <a:p>
-            <a:pPr>
-              <a:spcBef>
-                <a:spcPts val="0"/>
-              </a:spcBef>
-            </a:pPr>
-            <a:r>
-              <a:rPr lang="es-ES_tradnl" altLang="es-MX" sz="3200" b="1" dirty="0" err="1">
-                <a:solidFill>
-                  <a:schemeClr val="accent4">
-                    <a:lumMod val="50000"/>
-                  </a:schemeClr>
-                </a:solidFill>
-                <a:effectLst>
-                  <a:outerShdw blurRad="38100" dist="38100" dir="2700000" algn="tl">
-                    <a:srgbClr val="C0C0C0"/>
-                  </a:outerShdw>
-                </a:effectLst>
-                <a:latin typeface="Dom Casual" charset="0"/>
-              </a:rPr>
-              <a:t>Quality</a:t>
-            </a:r>
-            <a:r>
-              <a:rPr lang="es-ES_tradnl" altLang="es-MX" sz="3200" b="1" dirty="0">
-                <a:solidFill>
-                  <a:schemeClr val="accent4">
-                    <a:lumMod val="50000"/>
-                  </a:schemeClr>
-                </a:solidFill>
-                <a:effectLst>
-                  <a:outerShdw blurRad="38100" dist="38100" dir="2700000" algn="tl">
-                    <a:srgbClr val="C0C0C0"/>
-                  </a:outerShdw>
-                </a:effectLst>
-                <a:latin typeface="Dom Casual" charset="0"/>
-              </a:rPr>
-              <a:t> </a:t>
-            </a:r>
-            <a:r>
-              <a:rPr lang="es-ES_tradnl" altLang="es-MX" sz="3200" b="1" dirty="0" err="1">
-                <a:solidFill>
-                  <a:schemeClr val="accent4">
-                    <a:lumMod val="50000"/>
-                  </a:schemeClr>
-                </a:solidFill>
-                <a:effectLst>
-                  <a:outerShdw blurRad="38100" dist="38100" dir="2700000" algn="tl">
-                    <a:srgbClr val="C0C0C0"/>
-                  </a:outerShdw>
-                </a:effectLst>
-                <a:latin typeface="Dom Casual" charset="0"/>
-              </a:rPr>
-              <a:t>of</a:t>
-            </a:r>
-            <a:r>
-              <a:rPr lang="es-ES_tradnl" altLang="es-MX" sz="3200" b="1" dirty="0">
-                <a:solidFill>
-                  <a:schemeClr val="accent4">
-                    <a:lumMod val="50000"/>
-                  </a:schemeClr>
-                </a:solidFill>
-                <a:effectLst>
-                  <a:outerShdw blurRad="38100" dist="38100" dir="2700000" algn="tl">
-                    <a:srgbClr val="C0C0C0"/>
-                  </a:outerShdw>
-                </a:effectLst>
-                <a:latin typeface="Dom Casual" charset="0"/>
-              </a:rPr>
-              <a:t> </a:t>
-            </a:r>
-            <a:r>
-              <a:rPr lang="es-ES_tradnl" altLang="es-MX" sz="3200" b="1" dirty="0" err="1">
-                <a:solidFill>
-                  <a:schemeClr val="accent4">
-                    <a:lumMod val="50000"/>
-                  </a:schemeClr>
-                </a:solidFill>
-                <a:effectLst>
-                  <a:outerShdw blurRad="38100" dist="38100" dir="2700000" algn="tl">
-                    <a:srgbClr val="C0C0C0"/>
-                  </a:outerShdw>
-                </a:effectLst>
-                <a:latin typeface="Dom Casual" charset="0"/>
-              </a:rPr>
-              <a:t>service</a:t>
-            </a:r>
-            <a:r>
-              <a:rPr lang="es-ES_tradnl" altLang="es-MX" sz="3200" b="1" dirty="0">
-                <a:solidFill>
-                  <a:schemeClr val="accent4">
-                    <a:lumMod val="50000"/>
-                  </a:schemeClr>
-                </a:solidFill>
-                <a:effectLst>
-                  <a:outerShdw blurRad="38100" dist="38100" dir="2700000" algn="tl">
-                    <a:srgbClr val="C0C0C0"/>
-                  </a:outerShdw>
-                </a:effectLst>
-                <a:latin typeface="Dom Casual" charset="0"/>
-              </a:rPr>
-              <a:t> (</a:t>
-            </a:r>
-            <a:r>
-              <a:rPr lang="es-ES_tradnl" altLang="es-MX" sz="3200" b="1" dirty="0" err="1">
-                <a:solidFill>
-                  <a:schemeClr val="accent4">
-                    <a:lumMod val="50000"/>
-                  </a:schemeClr>
-                </a:solidFill>
-                <a:effectLst>
-                  <a:outerShdw blurRad="38100" dist="38100" dir="2700000" algn="tl">
-                    <a:srgbClr val="C0C0C0"/>
-                  </a:outerShdw>
-                </a:effectLst>
-                <a:latin typeface="Dom Casual" charset="0"/>
-              </a:rPr>
-              <a:t>QoS</a:t>
-            </a:r>
-            <a:r>
-              <a:rPr lang="es-ES_tradnl" altLang="es-MX" sz="3200" b="1" dirty="0">
-                <a:solidFill>
-                  <a:schemeClr val="accent4">
-                    <a:lumMod val="50000"/>
-                  </a:schemeClr>
-                </a:solidFill>
-                <a:effectLst>
-                  <a:outerShdw blurRad="38100" dist="38100" dir="2700000" algn="tl">
-                    <a:srgbClr val="C0C0C0"/>
-                  </a:outerShdw>
-                </a:effectLst>
-                <a:latin typeface="Dom Casual" charset="0"/>
-              </a:rPr>
-              <a:t>)</a:t>
-            </a:r>
-          </a:p>
-          <a:p>
-            <a:pPr>
-              <a:spcBef>
-                <a:spcPts val="0"/>
-              </a:spcBef>
-            </a:pPr>
-            <a:r>
-              <a:rPr lang="es-ES_tradnl" altLang="es-MX" sz="1800" b="1" dirty="0">
-                <a:solidFill>
-                  <a:schemeClr val="accent3">
-                    <a:lumMod val="75000"/>
-                  </a:schemeClr>
-                </a:solidFill>
-                <a:latin typeface="Dom Casual" charset="0"/>
-              </a:rPr>
-              <a:t>Demora - </a:t>
-            </a:r>
-            <a:r>
-              <a:rPr lang="es-ES_tradnl" altLang="es-MX" sz="1800" b="1" dirty="0" err="1">
-                <a:solidFill>
-                  <a:schemeClr val="accent3">
-                    <a:lumMod val="75000"/>
-                  </a:schemeClr>
-                </a:solidFill>
-                <a:latin typeface="Dom Casual" charset="0"/>
-              </a:rPr>
-              <a:t>Delay</a:t>
-            </a:r>
-            <a:endParaRPr lang="es-ES_tradnl" altLang="es-MX" sz="1800" b="1" dirty="0">
-              <a:solidFill>
-                <a:schemeClr val="accent3">
-                  <a:lumMod val="75000"/>
-                </a:schemeClr>
-              </a:solidFill>
-              <a:latin typeface="Dom Casual" charset="0"/>
-            </a:endParaRPr>
-          </a:p>
-        </p:txBody>
-      </p:sp>
-      <p:pic>
-        <p:nvPicPr>
-          <p:cNvPr id="15" name="Imagen 14">
-            <a:extLst>
-              <a:ext uri="{FF2B5EF4-FFF2-40B4-BE49-F238E27FC236}">
-                <a16:creationId xmlns:a16="http://schemas.microsoft.com/office/drawing/2014/main" id="{B66CE1CC-F06F-AF30-E86D-1C5D4CC5222B}"/>
-              </a:ext>
-            </a:extLst>
-          </p:cNvPr>
-          <p:cNvPicPr>
-            <a:picLocks noChangeAspect="1"/>
-          </p:cNvPicPr>
-          <p:nvPr/>
-        </p:nvPicPr>
-        <p:blipFill>
-          <a:blip r:embed="rId3"/>
-          <a:stretch>
-            <a:fillRect/>
-          </a:stretch>
-        </p:blipFill>
-        <p:spPr>
-          <a:xfrm>
-            <a:off x="0" y="3596281"/>
-            <a:ext cx="9144000" cy="1704926"/>
-          </a:xfrm>
-          <a:prstGeom prst="rect">
-            <a:avLst/>
-          </a:prstGeom>
-        </p:spPr>
-      </p:pic>
-    </p:spTree>
-    <p:extLst>
-      <p:ext uri="{BB962C8B-B14F-4D97-AF65-F5344CB8AC3E}">
-        <p14:creationId xmlns:p14="http://schemas.microsoft.com/office/powerpoint/2010/main" val="3038598994"/>
-      </p:ext>
-    </p:extLst>
-  </p:cSld>
-  <p:clrMapOvr>
-    <a:masterClrMapping/>
-  </p:clrMapOvr>
-  <mc:AlternateContent xmlns:mc="http://schemas.openxmlformats.org/markup-compatibility/2006" xmlns:p14="http://schemas.microsoft.com/office/powerpoint/2010/main">
-    <mc:Choice Requires="p14">
-      <p:transition spd="med" p14:dur="700">
-        <p:fade/>
-      </p:transition>
-    </mc:Choice>
-    <mc:Fallback xmlns="">
-      <p:transition xmlns:p14="http://schemas.microsoft.com/office/powerpoint/2010/main" spd="med">
-        <p:fade/>
-      </p:transition>
-    </mc:Fallback>
-  </mc:AlternateContent>
-</p:sld>
-</file>
-
-<file path=ppt/slides/slide15.xml><?xml version="1.0" encoding="utf-8"?>
-<p:sld xmlns:a="http://schemas.openxmlformats.org/drawingml/2006/main" xmlns:r="http://schemas.openxmlformats.org/officeDocument/2006/relationships" xmlns:p="http://schemas.openxmlformats.org/presentationml/2006/main">
-  <p:cSld>
-    <p:spTree>
-      <p:nvGrpSpPr>
-        <p:cNvPr id="1" name=""/>
-        <p:cNvGrpSpPr/>
-        <p:nvPr/>
-      </p:nvGrpSpPr>
-      <p:grpSpPr>
-        <a:xfrm>
-          <a:off x="0" y="0"/>
-          <a:ext cx="0" cy="0"/>
-          <a:chOff x="0" y="0"/>
-          <a:chExt cx="0" cy="0"/>
-        </a:xfrm>
-      </p:grpSpPr>
-      <p:sp>
-        <p:nvSpPr>
-          <p:cNvPr id="2" name="Content Placeholder 1"/>
-          <p:cNvSpPr>
-            <a:spLocks noGrp="1"/>
-          </p:cNvSpPr>
-          <p:nvPr>
-            <p:ph idx="1"/>
-          </p:nvPr>
-        </p:nvSpPr>
-        <p:spPr>
-          <a:xfrm>
-            <a:off x="179512" y="1180721"/>
-            <a:ext cx="8590279" cy="2608319"/>
-          </a:xfrm>
-        </p:spPr>
-        <p:txBody>
-          <a:bodyPr/>
-          <a:lstStyle/>
-          <a:p>
-            <a:pPr indent="0" algn="just">
-              <a:lnSpc>
-                <a:spcPct val="150000"/>
-              </a:lnSpc>
-              <a:spcBef>
-                <a:spcPts val="0"/>
-              </a:spcBef>
-            </a:pPr>
-            <a:r>
-              <a:rPr lang="es-ES" sz="1800" b="1" dirty="0">
-                <a:solidFill>
-                  <a:schemeClr val="accent6">
-                    <a:lumMod val="75000"/>
-                  </a:schemeClr>
-                </a:solidFill>
-                <a:latin typeface="Arial" panose="020B0604020202020204" pitchFamily="34" charset="0"/>
-                <a:cs typeface="Arial" panose="020B0604020202020204" pitchFamily="34" charset="0"/>
-              </a:rPr>
-              <a:t>3) </a:t>
-            </a:r>
-            <a:r>
-              <a:rPr lang="es-ES" sz="1800" b="1" dirty="0" err="1">
-                <a:solidFill>
-                  <a:schemeClr val="accent6">
-                    <a:lumMod val="75000"/>
-                  </a:schemeClr>
-                </a:solidFill>
-                <a:latin typeface="Arial" panose="020B0604020202020204" pitchFamily="34" charset="0"/>
-                <a:cs typeface="Arial" panose="020B0604020202020204" pitchFamily="34" charset="0"/>
-              </a:rPr>
-              <a:t>Jitter</a:t>
-            </a:r>
-            <a:endParaRPr lang="es-ES" sz="1800" dirty="0">
-              <a:solidFill>
-                <a:schemeClr val="tx1">
-                  <a:lumMod val="95000"/>
-                  <a:lumOff val="5000"/>
-                </a:schemeClr>
-              </a:solidFill>
-              <a:latin typeface="Arial" panose="020B0604020202020204" pitchFamily="34" charset="0"/>
-              <a:cs typeface="Arial" panose="020B0604020202020204" pitchFamily="34" charset="0"/>
-            </a:endParaRPr>
-          </a:p>
-          <a:p>
-            <a:pPr marL="627063" indent="0" algn="just">
-              <a:lnSpc>
-                <a:spcPct val="150000"/>
-              </a:lnSpc>
-              <a:spcBef>
-                <a:spcPts val="0"/>
-              </a:spcBef>
-            </a:pPr>
-            <a:r>
-              <a:rPr lang="es-ES" sz="1800" dirty="0">
-                <a:solidFill>
-                  <a:schemeClr val="tx1">
-                    <a:lumMod val="95000"/>
-                    <a:lumOff val="5000"/>
-                  </a:schemeClr>
-                </a:solidFill>
-                <a:latin typeface="Arial" panose="020B0604020202020204" pitchFamily="34" charset="0"/>
-                <a:cs typeface="Arial" panose="020B0604020202020204" pitchFamily="34" charset="0"/>
-              </a:rPr>
-              <a:t>Es la variación en el retardo unidireccional entre los paquetes enviados por la misma aplicación. </a:t>
-            </a:r>
-          </a:p>
-          <a:p>
-            <a:pPr marL="806450" indent="-179388" algn="just">
-              <a:lnSpc>
-                <a:spcPct val="150000"/>
-              </a:lnSpc>
-              <a:spcBef>
-                <a:spcPts val="0"/>
-              </a:spcBef>
-              <a:buFont typeface="Arial" panose="020B0604020202020204" pitchFamily="34" charset="0"/>
-              <a:buChar char="•"/>
-            </a:pPr>
-            <a:r>
-              <a:rPr lang="es-ES" sz="1800" dirty="0">
-                <a:solidFill>
-                  <a:schemeClr val="tx1">
-                    <a:lumMod val="95000"/>
-                    <a:lumOff val="5000"/>
-                  </a:schemeClr>
-                </a:solidFill>
-                <a:latin typeface="Arial" panose="020B0604020202020204" pitchFamily="34" charset="0"/>
-                <a:cs typeface="Arial" panose="020B0604020202020204" pitchFamily="34" charset="0"/>
-              </a:rPr>
-              <a:t>Por ejemplo, si algunos paquetes llegan en 10 milisegundos, pero algunos llegan en 100 milisegundos, eso es mucha fluctuación, una gran diferencia en el tiempo que tarda cada paquete en llegar a su destino. </a:t>
-            </a:r>
-            <a:endParaRPr lang="es-ES" sz="1800" b="1" dirty="0">
-              <a:solidFill>
-                <a:schemeClr val="accent6">
-                  <a:lumMod val="75000"/>
-                </a:schemeClr>
-              </a:solidFill>
-              <a:latin typeface="Arial" panose="020B0604020202020204" pitchFamily="34" charset="0"/>
-              <a:cs typeface="Arial" panose="020B0604020202020204" pitchFamily="34" charset="0"/>
-            </a:endParaRPr>
-          </a:p>
-        </p:txBody>
-      </p:sp>
-      <p:sp>
-        <p:nvSpPr>
-          <p:cNvPr id="4" name="Rectangle 5">
-            <a:extLst>
-              <a:ext uri="{FF2B5EF4-FFF2-40B4-BE49-F238E27FC236}">
-                <a16:creationId xmlns:a16="http://schemas.microsoft.com/office/drawing/2014/main" id="{BD2FAA3E-64BB-4FFB-46CC-02579F1E62D9}"/>
-              </a:ext>
-            </a:extLst>
-          </p:cNvPr>
-          <p:cNvSpPr txBox="1">
-            <a:spLocks noChangeArrowheads="1"/>
-          </p:cNvSpPr>
-          <p:nvPr/>
-        </p:nvSpPr>
-        <p:spPr bwMode="auto">
-          <a:xfrm>
-            <a:off x="1028700" y="37721"/>
-            <a:ext cx="7086600" cy="1143000"/>
-          </a:xfrm>
-          <a:prstGeom prst="rect">
-            <a:avLst/>
-          </a:prstGeom>
-          <a:noFill/>
-          <a:ln>
-            <a:noFill/>
-          </a:ln>
-          <a:extLst>
-            <a:ext uri="{909E8E84-426E-40DD-AFC4-6F175D3DCCD1}">
-              <a14:hiddenFill xmlns:a14="http://schemas.microsoft.com/office/drawing/2010/main">
-                <a:solidFill>
-                  <a:srgbClr val="FFFFFF"/>
-                </a:solidFill>
-              </a14:hiddenFill>
-            </a:ext>
-            <a:ext uri="{91240B29-F687-4F45-9708-019B960494DF}">
-              <a14:hiddenLine xmlns:a14="http://schemas.microsoft.com/office/drawing/2010/main" w="9525">
-                <a:solidFill>
-                  <a:srgbClr val="000000"/>
-                </a:solidFill>
-                <a:miter lim="800000"/>
-                <a:headEnd/>
-                <a:tailEnd/>
-              </a14:hiddenLine>
-            </a:ext>
-          </a:extLst>
-        </p:spPr>
-        <p:txBody>
-          <a:bodyPr vert="horz" lIns="91440" tIns="45720" rIns="91440" bIns="45720" rtlCol="0" anchor="ctr">
-            <a:normAutofit/>
-          </a:bodyPr>
-          <a:lstStyle>
-            <a:lvl1pPr algn="ctr" defTabSz="914400" rtl="0" eaLnBrk="1" latinLnBrk="0" hangingPunct="1">
-              <a:spcBef>
-                <a:spcPct val="0"/>
-              </a:spcBef>
-              <a:buNone/>
-              <a:defRPr sz="4400" kern="1200">
-                <a:solidFill>
-                  <a:srgbClr val="004C69"/>
-                </a:solidFill>
-                <a:latin typeface="+mj-lt"/>
-                <a:ea typeface="+mj-ea"/>
-                <a:cs typeface="+mj-cs"/>
-              </a:defRPr>
-            </a:lvl1pPr>
-          </a:lstStyle>
-          <a:p>
-            <a:pPr>
-              <a:spcBef>
-                <a:spcPts val="0"/>
-              </a:spcBef>
-            </a:pPr>
-            <a:r>
-              <a:rPr lang="es-ES_tradnl" altLang="es-MX" sz="3200" b="1" dirty="0" err="1">
-                <a:solidFill>
-                  <a:schemeClr val="accent4">
-                    <a:lumMod val="50000"/>
-                  </a:schemeClr>
-                </a:solidFill>
-                <a:effectLst>
-                  <a:outerShdw blurRad="38100" dist="38100" dir="2700000" algn="tl">
-                    <a:srgbClr val="C0C0C0"/>
-                  </a:outerShdw>
-                </a:effectLst>
-                <a:latin typeface="Dom Casual" charset="0"/>
-              </a:rPr>
-              <a:t>Quality</a:t>
-            </a:r>
-            <a:r>
-              <a:rPr lang="es-ES_tradnl" altLang="es-MX" sz="3200" b="1" dirty="0">
-                <a:solidFill>
-                  <a:schemeClr val="accent4">
-                    <a:lumMod val="50000"/>
-                  </a:schemeClr>
-                </a:solidFill>
-                <a:effectLst>
-                  <a:outerShdw blurRad="38100" dist="38100" dir="2700000" algn="tl">
-                    <a:srgbClr val="C0C0C0"/>
-                  </a:outerShdw>
-                </a:effectLst>
-                <a:latin typeface="Dom Casual" charset="0"/>
-              </a:rPr>
-              <a:t> </a:t>
-            </a:r>
-            <a:r>
-              <a:rPr lang="es-ES_tradnl" altLang="es-MX" sz="3200" b="1" dirty="0" err="1">
-                <a:solidFill>
-                  <a:schemeClr val="accent4">
-                    <a:lumMod val="50000"/>
-                  </a:schemeClr>
-                </a:solidFill>
-                <a:effectLst>
-                  <a:outerShdw blurRad="38100" dist="38100" dir="2700000" algn="tl">
-                    <a:srgbClr val="C0C0C0"/>
-                  </a:outerShdw>
-                </a:effectLst>
-                <a:latin typeface="Dom Casual" charset="0"/>
-              </a:rPr>
-              <a:t>of</a:t>
-            </a:r>
-            <a:r>
-              <a:rPr lang="es-ES_tradnl" altLang="es-MX" sz="3200" b="1" dirty="0">
-                <a:solidFill>
-                  <a:schemeClr val="accent4">
-                    <a:lumMod val="50000"/>
-                  </a:schemeClr>
-                </a:solidFill>
-                <a:effectLst>
-                  <a:outerShdw blurRad="38100" dist="38100" dir="2700000" algn="tl">
-                    <a:srgbClr val="C0C0C0"/>
-                  </a:outerShdw>
-                </a:effectLst>
-                <a:latin typeface="Dom Casual" charset="0"/>
-              </a:rPr>
-              <a:t> </a:t>
-            </a:r>
-            <a:r>
-              <a:rPr lang="es-ES_tradnl" altLang="es-MX" sz="3200" b="1" dirty="0" err="1">
-                <a:solidFill>
-                  <a:schemeClr val="accent4">
-                    <a:lumMod val="50000"/>
-                  </a:schemeClr>
-                </a:solidFill>
-                <a:effectLst>
-                  <a:outerShdw blurRad="38100" dist="38100" dir="2700000" algn="tl">
-                    <a:srgbClr val="C0C0C0"/>
-                  </a:outerShdw>
-                </a:effectLst>
-                <a:latin typeface="Dom Casual" charset="0"/>
-              </a:rPr>
-              <a:t>service</a:t>
-            </a:r>
-            <a:r>
-              <a:rPr lang="es-ES_tradnl" altLang="es-MX" sz="3200" b="1" dirty="0">
-                <a:solidFill>
-                  <a:schemeClr val="accent4">
-                    <a:lumMod val="50000"/>
-                  </a:schemeClr>
-                </a:solidFill>
-                <a:effectLst>
-                  <a:outerShdw blurRad="38100" dist="38100" dir="2700000" algn="tl">
-                    <a:srgbClr val="C0C0C0"/>
-                  </a:outerShdw>
-                </a:effectLst>
-                <a:latin typeface="Dom Casual" charset="0"/>
-              </a:rPr>
-              <a:t> (</a:t>
-            </a:r>
-            <a:r>
-              <a:rPr lang="es-ES_tradnl" altLang="es-MX" sz="3200" b="1" dirty="0" err="1">
-                <a:solidFill>
-                  <a:schemeClr val="accent4">
-                    <a:lumMod val="50000"/>
-                  </a:schemeClr>
-                </a:solidFill>
-                <a:effectLst>
-                  <a:outerShdw blurRad="38100" dist="38100" dir="2700000" algn="tl">
-                    <a:srgbClr val="C0C0C0"/>
-                  </a:outerShdw>
-                </a:effectLst>
-                <a:latin typeface="Dom Casual" charset="0"/>
-              </a:rPr>
-              <a:t>QoS</a:t>
-            </a:r>
-            <a:r>
-              <a:rPr lang="es-ES_tradnl" altLang="es-MX" sz="3200" b="1" dirty="0">
-                <a:solidFill>
-                  <a:schemeClr val="accent4">
-                    <a:lumMod val="50000"/>
-                  </a:schemeClr>
-                </a:solidFill>
-                <a:effectLst>
-                  <a:outerShdw blurRad="38100" dist="38100" dir="2700000" algn="tl">
-                    <a:srgbClr val="C0C0C0"/>
-                  </a:outerShdw>
-                </a:effectLst>
-                <a:latin typeface="Dom Casual" charset="0"/>
-              </a:rPr>
-              <a:t>)</a:t>
-            </a:r>
-          </a:p>
-          <a:p>
-            <a:pPr>
-              <a:spcBef>
-                <a:spcPts val="0"/>
-              </a:spcBef>
-            </a:pPr>
-            <a:r>
-              <a:rPr lang="es-ES_tradnl" altLang="es-MX" sz="1800" b="1" dirty="0" err="1">
-                <a:solidFill>
-                  <a:schemeClr val="accent3">
-                    <a:lumMod val="75000"/>
-                  </a:schemeClr>
-                </a:solidFill>
-                <a:latin typeface="Dom Casual" charset="0"/>
-              </a:rPr>
-              <a:t>Jitter</a:t>
-            </a:r>
-            <a:endParaRPr lang="es-ES_tradnl" altLang="es-MX" sz="1800" b="1" dirty="0">
-              <a:solidFill>
-                <a:schemeClr val="accent3">
-                  <a:lumMod val="75000"/>
-                </a:schemeClr>
-              </a:solidFill>
-              <a:latin typeface="Dom Casual" charset="0"/>
-            </a:endParaRPr>
-          </a:p>
-        </p:txBody>
-      </p:sp>
-      <p:pic>
-        <p:nvPicPr>
-          <p:cNvPr id="6" name="Imagen 5">
-            <a:extLst>
-              <a:ext uri="{FF2B5EF4-FFF2-40B4-BE49-F238E27FC236}">
-                <a16:creationId xmlns:a16="http://schemas.microsoft.com/office/drawing/2014/main" id="{DAB8B6F3-28F0-87A2-65F9-58DB04AAAB3E}"/>
-              </a:ext>
-            </a:extLst>
-          </p:cNvPr>
-          <p:cNvPicPr>
-            <a:picLocks noChangeAspect="1"/>
-          </p:cNvPicPr>
-          <p:nvPr/>
-        </p:nvPicPr>
-        <p:blipFill>
-          <a:blip r:embed="rId3"/>
-          <a:stretch>
-            <a:fillRect/>
-          </a:stretch>
-        </p:blipFill>
-        <p:spPr>
-          <a:xfrm>
-            <a:off x="1619672" y="4005064"/>
-            <a:ext cx="6200775" cy="1476375"/>
-          </a:xfrm>
-          <a:prstGeom prst="rect">
-            <a:avLst/>
-          </a:prstGeom>
-        </p:spPr>
-      </p:pic>
-    </p:spTree>
-    <p:extLst>
-      <p:ext uri="{BB962C8B-B14F-4D97-AF65-F5344CB8AC3E}">
-        <p14:creationId xmlns:p14="http://schemas.microsoft.com/office/powerpoint/2010/main" val="600043969"/>
-      </p:ext>
-    </p:extLst>
-  </p:cSld>
-  <p:clrMapOvr>
-    <a:masterClrMapping/>
-  </p:clrMapOvr>
-  <mc:AlternateContent xmlns:mc="http://schemas.openxmlformats.org/markup-compatibility/2006" xmlns:p14="http://schemas.microsoft.com/office/powerpoint/2010/main">
-    <mc:Choice Requires="p14">
-      <p:transition spd="med" p14:dur="700">
-        <p:fade/>
-      </p:transition>
-    </mc:Choice>
-    <mc:Fallback xmlns="">
-      <p:transition xmlns:p14="http://schemas.microsoft.com/office/powerpoint/2010/main" spd="med">
-        <p:fade/>
-      </p:transition>
-    </mc:Fallback>
-  </mc:AlternateContent>
-</p:sld>
-</file>
-
-<file path=ppt/slides/slide16.xml><?xml version="1.0" encoding="utf-8"?>
-<p:sld xmlns:a="http://schemas.openxmlformats.org/drawingml/2006/main" xmlns:r="http://schemas.openxmlformats.org/officeDocument/2006/relationships" xmlns:p="http://schemas.openxmlformats.org/presentationml/2006/main">
-  <p:cSld>
-    <p:spTree>
-      <p:nvGrpSpPr>
-        <p:cNvPr id="1" name=""/>
-        <p:cNvGrpSpPr/>
-        <p:nvPr/>
-      </p:nvGrpSpPr>
-      <p:grpSpPr>
-        <a:xfrm>
-          <a:off x="0" y="0"/>
-          <a:ext cx="0" cy="0"/>
-          <a:chOff x="0" y="0"/>
-          <a:chExt cx="0" cy="0"/>
-        </a:xfrm>
-      </p:grpSpPr>
-      <p:sp>
-        <p:nvSpPr>
-          <p:cNvPr id="2" name="Content Placeholder 1"/>
-          <p:cNvSpPr>
-            <a:spLocks noGrp="1"/>
-          </p:cNvSpPr>
-          <p:nvPr>
-            <p:ph idx="1"/>
-          </p:nvPr>
-        </p:nvSpPr>
-        <p:spPr>
-          <a:xfrm>
-            <a:off x="179512" y="1180721"/>
-            <a:ext cx="8590279" cy="2608319"/>
-          </a:xfrm>
-        </p:spPr>
-        <p:txBody>
-          <a:bodyPr/>
-          <a:lstStyle/>
-          <a:p>
-            <a:pPr indent="0" algn="just">
-              <a:lnSpc>
-                <a:spcPct val="150000"/>
-              </a:lnSpc>
-              <a:spcBef>
-                <a:spcPts val="0"/>
-              </a:spcBef>
-            </a:pPr>
-            <a:r>
-              <a:rPr lang="es-ES" sz="1800" b="1" dirty="0">
-                <a:solidFill>
-                  <a:schemeClr val="accent6">
-                    <a:lumMod val="75000"/>
-                  </a:schemeClr>
-                </a:solidFill>
-                <a:latin typeface="Arial" panose="020B0604020202020204" pitchFamily="34" charset="0"/>
-                <a:cs typeface="Arial" panose="020B0604020202020204" pitchFamily="34" charset="0"/>
-              </a:rPr>
-              <a:t>3) </a:t>
-            </a:r>
-            <a:r>
-              <a:rPr lang="es-ES" sz="1800" b="1" dirty="0" err="1">
-                <a:solidFill>
-                  <a:schemeClr val="accent6">
-                    <a:lumMod val="75000"/>
-                  </a:schemeClr>
-                </a:solidFill>
-                <a:latin typeface="Arial" panose="020B0604020202020204" pitchFamily="34" charset="0"/>
-                <a:cs typeface="Arial" panose="020B0604020202020204" pitchFamily="34" charset="0"/>
-              </a:rPr>
-              <a:t>Jitter</a:t>
-            </a:r>
-            <a:endParaRPr lang="es-ES" sz="1800" dirty="0">
-              <a:solidFill>
-                <a:schemeClr val="tx1">
-                  <a:lumMod val="95000"/>
-                  <a:lumOff val="5000"/>
-                </a:schemeClr>
-              </a:solidFill>
-              <a:latin typeface="Arial" panose="020B0604020202020204" pitchFamily="34" charset="0"/>
-              <a:cs typeface="Arial" panose="020B0604020202020204" pitchFamily="34" charset="0"/>
-            </a:endParaRPr>
-          </a:p>
-          <a:p>
-            <a:pPr marL="571440" indent="-285750" algn="just">
-              <a:lnSpc>
-                <a:spcPct val="150000"/>
-              </a:lnSpc>
-              <a:spcBef>
-                <a:spcPts val="0"/>
-              </a:spcBef>
-              <a:buFont typeface="Arial" panose="020B0604020202020204" pitchFamily="34" charset="0"/>
-              <a:buChar char="•"/>
-            </a:pPr>
-            <a:r>
-              <a:rPr lang="es-ES" sz="1800" dirty="0">
-                <a:solidFill>
-                  <a:schemeClr val="tx1">
-                    <a:lumMod val="95000"/>
-                    <a:lumOff val="5000"/>
-                  </a:schemeClr>
-                </a:solidFill>
-                <a:latin typeface="Arial" panose="020B0604020202020204" pitchFamily="34" charset="0"/>
-                <a:cs typeface="Arial" panose="020B0604020202020204" pitchFamily="34" charset="0"/>
-              </a:rPr>
-              <a:t>El </a:t>
-            </a:r>
-            <a:r>
-              <a:rPr lang="es-ES" sz="1800" dirty="0" err="1">
-                <a:solidFill>
-                  <a:schemeClr val="tx1">
-                    <a:lumMod val="95000"/>
-                    <a:lumOff val="5000"/>
-                  </a:schemeClr>
-                </a:solidFill>
-                <a:latin typeface="Arial" panose="020B0604020202020204" pitchFamily="34" charset="0"/>
-                <a:cs typeface="Arial" panose="020B0604020202020204" pitchFamily="34" charset="0"/>
-              </a:rPr>
-              <a:t>jitter</a:t>
-            </a:r>
-            <a:r>
-              <a:rPr lang="es-ES" sz="1800" dirty="0">
-                <a:solidFill>
-                  <a:schemeClr val="tx1">
-                    <a:lumMod val="95000"/>
-                    <a:lumOff val="5000"/>
-                  </a:schemeClr>
-                </a:solidFill>
-                <a:latin typeface="Arial" panose="020B0604020202020204" pitchFamily="34" charset="0"/>
-                <a:cs typeface="Arial" panose="020B0604020202020204" pitchFamily="34" charset="0"/>
-              </a:rPr>
-              <a:t> afectará negativamente la </a:t>
-            </a:r>
-            <a:r>
-              <a:rPr lang="es-ES" sz="1800" b="1" dirty="0">
-                <a:solidFill>
-                  <a:schemeClr val="tx1">
-                    <a:lumMod val="95000"/>
-                    <a:lumOff val="5000"/>
-                  </a:schemeClr>
-                </a:solidFill>
-                <a:latin typeface="Arial" panose="020B0604020202020204" pitchFamily="34" charset="0"/>
-                <a:cs typeface="Arial" panose="020B0604020202020204" pitchFamily="34" charset="0"/>
-              </a:rPr>
-              <a:t>calidad de audio de las llamadas telefónicas</a:t>
-            </a:r>
-            <a:r>
-              <a:rPr lang="es-ES" sz="1800" dirty="0">
-                <a:solidFill>
-                  <a:schemeClr val="tx1">
-                    <a:lumMod val="95000"/>
-                    <a:lumOff val="5000"/>
-                  </a:schemeClr>
-                </a:solidFill>
-                <a:latin typeface="Arial" panose="020B0604020202020204" pitchFamily="34" charset="0"/>
-                <a:cs typeface="Arial" panose="020B0604020202020204" pitchFamily="34" charset="0"/>
-              </a:rPr>
-              <a:t>, por lo que los teléfonos IP tienen un búfer de </a:t>
-            </a:r>
-            <a:r>
-              <a:rPr lang="es-ES" sz="1800" dirty="0" err="1">
-                <a:solidFill>
-                  <a:schemeClr val="tx1">
-                    <a:lumMod val="95000"/>
-                    <a:lumOff val="5000"/>
-                  </a:schemeClr>
-                </a:solidFill>
-                <a:latin typeface="Arial" panose="020B0604020202020204" pitchFamily="34" charset="0"/>
-                <a:cs typeface="Arial" panose="020B0604020202020204" pitchFamily="34" charset="0"/>
-              </a:rPr>
-              <a:t>jitter</a:t>
-            </a:r>
-            <a:r>
-              <a:rPr lang="es-ES" sz="1800" dirty="0">
-                <a:solidFill>
-                  <a:schemeClr val="tx1">
-                    <a:lumMod val="95000"/>
-                    <a:lumOff val="5000"/>
-                  </a:schemeClr>
-                </a:solidFill>
-                <a:latin typeface="Arial" panose="020B0604020202020204" pitchFamily="34" charset="0"/>
-                <a:cs typeface="Arial" panose="020B0604020202020204" pitchFamily="34" charset="0"/>
-              </a:rPr>
-              <a:t> (</a:t>
-            </a:r>
-            <a:r>
-              <a:rPr lang="es-ES" sz="1800" dirty="0" err="1">
-                <a:solidFill>
-                  <a:schemeClr val="tx1">
-                    <a:lumMod val="95000"/>
-                    <a:lumOff val="5000"/>
-                  </a:schemeClr>
-                </a:solidFill>
-                <a:latin typeface="Arial" panose="020B0604020202020204" pitchFamily="34" charset="0"/>
-                <a:cs typeface="Arial" panose="020B0604020202020204" pitchFamily="34" charset="0"/>
-              </a:rPr>
-              <a:t>jitter</a:t>
-            </a:r>
-            <a:r>
-              <a:rPr lang="es-ES" sz="1800" dirty="0">
-                <a:solidFill>
-                  <a:schemeClr val="tx1">
-                    <a:lumMod val="95000"/>
-                    <a:lumOff val="5000"/>
-                  </a:schemeClr>
-                </a:solidFill>
-                <a:latin typeface="Arial" panose="020B0604020202020204" pitchFamily="34" charset="0"/>
-                <a:cs typeface="Arial" panose="020B0604020202020204" pitchFamily="34" charset="0"/>
-              </a:rPr>
-              <a:t> buffer) para proporcionar un retraso fijo a los paquetes de audio. Sin embargo, si el </a:t>
-            </a:r>
-            <a:r>
-              <a:rPr lang="es-ES" sz="1800" dirty="0" err="1">
-                <a:solidFill>
-                  <a:schemeClr val="tx1">
-                    <a:lumMod val="95000"/>
-                    <a:lumOff val="5000"/>
-                  </a:schemeClr>
-                </a:solidFill>
-                <a:latin typeface="Arial" panose="020B0604020202020204" pitchFamily="34" charset="0"/>
-                <a:cs typeface="Arial" panose="020B0604020202020204" pitchFamily="34" charset="0"/>
-              </a:rPr>
-              <a:t>jitter</a:t>
-            </a:r>
-            <a:r>
-              <a:rPr lang="es-ES" sz="1800" dirty="0">
-                <a:solidFill>
-                  <a:schemeClr val="tx1">
-                    <a:lumMod val="95000"/>
-                    <a:lumOff val="5000"/>
-                  </a:schemeClr>
-                </a:solidFill>
-                <a:latin typeface="Arial" panose="020B0604020202020204" pitchFamily="34" charset="0"/>
-                <a:cs typeface="Arial" panose="020B0604020202020204" pitchFamily="34" charset="0"/>
-              </a:rPr>
-              <a:t> es demasiado alto, sobrepasará el búfer y la calidad del audio se verá afectada. Finalmente, la pérdida de paquetes se dará.</a:t>
-            </a:r>
-            <a:endParaRPr lang="es-ES" sz="1800" b="1" dirty="0">
-              <a:solidFill>
-                <a:schemeClr val="tx1">
-                  <a:lumMod val="95000"/>
-                  <a:lumOff val="5000"/>
-                </a:schemeClr>
-              </a:solidFill>
-              <a:latin typeface="Arial" panose="020B0604020202020204" pitchFamily="34" charset="0"/>
-              <a:cs typeface="Arial" panose="020B0604020202020204" pitchFamily="34" charset="0"/>
-            </a:endParaRPr>
-          </a:p>
-        </p:txBody>
-      </p:sp>
-      <p:sp>
-        <p:nvSpPr>
-          <p:cNvPr id="4" name="Rectangle 5">
-            <a:extLst>
-              <a:ext uri="{FF2B5EF4-FFF2-40B4-BE49-F238E27FC236}">
-                <a16:creationId xmlns:a16="http://schemas.microsoft.com/office/drawing/2014/main" id="{BD2FAA3E-64BB-4FFB-46CC-02579F1E62D9}"/>
-              </a:ext>
-            </a:extLst>
-          </p:cNvPr>
-          <p:cNvSpPr txBox="1">
-            <a:spLocks noChangeArrowheads="1"/>
-          </p:cNvSpPr>
-          <p:nvPr/>
-        </p:nvSpPr>
-        <p:spPr bwMode="auto">
-          <a:xfrm>
-            <a:off x="1028700" y="37721"/>
-            <a:ext cx="7086600" cy="1143000"/>
-          </a:xfrm>
-          <a:prstGeom prst="rect">
-            <a:avLst/>
-          </a:prstGeom>
-          <a:noFill/>
-          <a:ln>
-            <a:noFill/>
-          </a:ln>
-          <a:extLst>
-            <a:ext uri="{909E8E84-426E-40DD-AFC4-6F175D3DCCD1}">
-              <a14:hiddenFill xmlns:a14="http://schemas.microsoft.com/office/drawing/2010/main">
-                <a:solidFill>
-                  <a:srgbClr val="FFFFFF"/>
-                </a:solidFill>
-              </a14:hiddenFill>
-            </a:ext>
-            <a:ext uri="{91240B29-F687-4F45-9708-019B960494DF}">
-              <a14:hiddenLine xmlns:a14="http://schemas.microsoft.com/office/drawing/2010/main" w="9525">
-                <a:solidFill>
-                  <a:srgbClr val="000000"/>
-                </a:solidFill>
-                <a:miter lim="800000"/>
-                <a:headEnd/>
-                <a:tailEnd/>
-              </a14:hiddenLine>
-            </a:ext>
-          </a:extLst>
-        </p:spPr>
-        <p:txBody>
-          <a:bodyPr vert="horz" lIns="91440" tIns="45720" rIns="91440" bIns="45720" rtlCol="0" anchor="ctr">
-            <a:normAutofit/>
-          </a:bodyPr>
-          <a:lstStyle>
-            <a:lvl1pPr algn="ctr" defTabSz="914400" rtl="0" eaLnBrk="1" latinLnBrk="0" hangingPunct="1">
-              <a:spcBef>
-                <a:spcPct val="0"/>
-              </a:spcBef>
-              <a:buNone/>
-              <a:defRPr sz="4400" kern="1200">
-                <a:solidFill>
-                  <a:srgbClr val="004C69"/>
-                </a:solidFill>
-                <a:latin typeface="+mj-lt"/>
-                <a:ea typeface="+mj-ea"/>
-                <a:cs typeface="+mj-cs"/>
-              </a:defRPr>
-            </a:lvl1pPr>
-          </a:lstStyle>
-          <a:p>
-            <a:pPr>
-              <a:spcBef>
-                <a:spcPts val="0"/>
-              </a:spcBef>
-            </a:pPr>
-            <a:r>
-              <a:rPr lang="es-ES_tradnl" altLang="es-MX" sz="3200" b="1" dirty="0" err="1">
-                <a:solidFill>
-                  <a:schemeClr val="accent4">
-                    <a:lumMod val="50000"/>
-                  </a:schemeClr>
-                </a:solidFill>
-                <a:effectLst>
-                  <a:outerShdw blurRad="38100" dist="38100" dir="2700000" algn="tl">
-                    <a:srgbClr val="C0C0C0"/>
-                  </a:outerShdw>
-                </a:effectLst>
-                <a:latin typeface="Dom Casual" charset="0"/>
-              </a:rPr>
-              <a:t>Quality</a:t>
-            </a:r>
-            <a:r>
-              <a:rPr lang="es-ES_tradnl" altLang="es-MX" sz="3200" b="1" dirty="0">
-                <a:solidFill>
-                  <a:schemeClr val="accent4">
-                    <a:lumMod val="50000"/>
-                  </a:schemeClr>
-                </a:solidFill>
-                <a:effectLst>
-                  <a:outerShdw blurRad="38100" dist="38100" dir="2700000" algn="tl">
-                    <a:srgbClr val="C0C0C0"/>
-                  </a:outerShdw>
-                </a:effectLst>
-                <a:latin typeface="Dom Casual" charset="0"/>
-              </a:rPr>
-              <a:t> </a:t>
-            </a:r>
-            <a:r>
-              <a:rPr lang="es-ES_tradnl" altLang="es-MX" sz="3200" b="1" dirty="0" err="1">
-                <a:solidFill>
-                  <a:schemeClr val="accent4">
-                    <a:lumMod val="50000"/>
-                  </a:schemeClr>
-                </a:solidFill>
-                <a:effectLst>
-                  <a:outerShdw blurRad="38100" dist="38100" dir="2700000" algn="tl">
-                    <a:srgbClr val="C0C0C0"/>
-                  </a:outerShdw>
-                </a:effectLst>
-                <a:latin typeface="Dom Casual" charset="0"/>
-              </a:rPr>
-              <a:t>of</a:t>
-            </a:r>
-            <a:r>
-              <a:rPr lang="es-ES_tradnl" altLang="es-MX" sz="3200" b="1" dirty="0">
-                <a:solidFill>
-                  <a:schemeClr val="accent4">
-                    <a:lumMod val="50000"/>
-                  </a:schemeClr>
-                </a:solidFill>
-                <a:effectLst>
-                  <a:outerShdw blurRad="38100" dist="38100" dir="2700000" algn="tl">
-                    <a:srgbClr val="C0C0C0"/>
-                  </a:outerShdw>
-                </a:effectLst>
-                <a:latin typeface="Dom Casual" charset="0"/>
-              </a:rPr>
-              <a:t> </a:t>
-            </a:r>
-            <a:r>
-              <a:rPr lang="es-ES_tradnl" altLang="es-MX" sz="3200" b="1" dirty="0" err="1">
-                <a:solidFill>
-                  <a:schemeClr val="accent4">
-                    <a:lumMod val="50000"/>
-                  </a:schemeClr>
-                </a:solidFill>
-                <a:effectLst>
-                  <a:outerShdw blurRad="38100" dist="38100" dir="2700000" algn="tl">
-                    <a:srgbClr val="C0C0C0"/>
-                  </a:outerShdw>
-                </a:effectLst>
-                <a:latin typeface="Dom Casual" charset="0"/>
-              </a:rPr>
-              <a:t>service</a:t>
-            </a:r>
-            <a:r>
-              <a:rPr lang="es-ES_tradnl" altLang="es-MX" sz="3200" b="1" dirty="0">
-                <a:solidFill>
-                  <a:schemeClr val="accent4">
-                    <a:lumMod val="50000"/>
-                  </a:schemeClr>
-                </a:solidFill>
-                <a:effectLst>
-                  <a:outerShdw blurRad="38100" dist="38100" dir="2700000" algn="tl">
-                    <a:srgbClr val="C0C0C0"/>
-                  </a:outerShdw>
-                </a:effectLst>
-                <a:latin typeface="Dom Casual" charset="0"/>
-              </a:rPr>
-              <a:t> (</a:t>
-            </a:r>
-            <a:r>
-              <a:rPr lang="es-ES_tradnl" altLang="es-MX" sz="3200" b="1" dirty="0" err="1">
-                <a:solidFill>
-                  <a:schemeClr val="accent4">
-                    <a:lumMod val="50000"/>
-                  </a:schemeClr>
-                </a:solidFill>
-                <a:effectLst>
-                  <a:outerShdw blurRad="38100" dist="38100" dir="2700000" algn="tl">
-                    <a:srgbClr val="C0C0C0"/>
-                  </a:outerShdw>
-                </a:effectLst>
-                <a:latin typeface="Dom Casual" charset="0"/>
-              </a:rPr>
-              <a:t>QoS</a:t>
-            </a:r>
-            <a:r>
-              <a:rPr lang="es-ES_tradnl" altLang="es-MX" sz="3200" b="1" dirty="0">
-                <a:solidFill>
-                  <a:schemeClr val="accent4">
-                    <a:lumMod val="50000"/>
-                  </a:schemeClr>
-                </a:solidFill>
-                <a:effectLst>
-                  <a:outerShdw blurRad="38100" dist="38100" dir="2700000" algn="tl">
-                    <a:srgbClr val="C0C0C0"/>
-                  </a:outerShdw>
-                </a:effectLst>
-                <a:latin typeface="Dom Casual" charset="0"/>
-              </a:rPr>
-              <a:t>)</a:t>
-            </a:r>
-          </a:p>
-          <a:p>
-            <a:pPr>
-              <a:spcBef>
-                <a:spcPts val="0"/>
-              </a:spcBef>
-            </a:pPr>
-            <a:r>
-              <a:rPr lang="es-ES_tradnl" altLang="es-MX" sz="1800" b="1" dirty="0" err="1">
-                <a:solidFill>
-                  <a:schemeClr val="accent3">
-                    <a:lumMod val="75000"/>
-                  </a:schemeClr>
-                </a:solidFill>
-                <a:latin typeface="Dom Casual" charset="0"/>
-              </a:rPr>
-              <a:t>Jitter</a:t>
-            </a:r>
-            <a:endParaRPr lang="es-ES_tradnl" altLang="es-MX" sz="1800" b="1" dirty="0">
-              <a:solidFill>
-                <a:schemeClr val="accent3">
-                  <a:lumMod val="75000"/>
-                </a:schemeClr>
-              </a:solidFill>
-              <a:latin typeface="Dom Casual" charset="0"/>
-            </a:endParaRPr>
-          </a:p>
-        </p:txBody>
-      </p:sp>
-      <p:pic>
-        <p:nvPicPr>
-          <p:cNvPr id="6" name="Imagen 5">
-            <a:extLst>
-              <a:ext uri="{FF2B5EF4-FFF2-40B4-BE49-F238E27FC236}">
-                <a16:creationId xmlns:a16="http://schemas.microsoft.com/office/drawing/2014/main" id="{DAB8B6F3-28F0-87A2-65F9-58DB04AAAB3E}"/>
-              </a:ext>
-            </a:extLst>
-          </p:cNvPr>
-          <p:cNvPicPr>
-            <a:picLocks noChangeAspect="1"/>
-          </p:cNvPicPr>
-          <p:nvPr/>
-        </p:nvPicPr>
-        <p:blipFill>
-          <a:blip r:embed="rId3"/>
-          <a:stretch>
-            <a:fillRect/>
-          </a:stretch>
-        </p:blipFill>
-        <p:spPr>
-          <a:xfrm>
-            <a:off x="1471612" y="3933056"/>
-            <a:ext cx="6200775" cy="1476375"/>
-          </a:xfrm>
-          <a:prstGeom prst="rect">
-            <a:avLst/>
-          </a:prstGeom>
-        </p:spPr>
-      </p:pic>
-    </p:spTree>
-    <p:extLst>
-      <p:ext uri="{BB962C8B-B14F-4D97-AF65-F5344CB8AC3E}">
-        <p14:creationId xmlns:p14="http://schemas.microsoft.com/office/powerpoint/2010/main" val="2382378987"/>
-      </p:ext>
-    </p:extLst>
-  </p:cSld>
-  <p:clrMapOvr>
-    <a:masterClrMapping/>
-  </p:clrMapOvr>
-  <mc:AlternateContent xmlns:mc="http://schemas.openxmlformats.org/markup-compatibility/2006" xmlns:p14="http://schemas.microsoft.com/office/powerpoint/2010/main">
-    <mc:Choice Requires="p14">
-      <p:transition spd="med" p14:dur="700">
-        <p:fade/>
-      </p:transition>
-    </mc:Choice>
-    <mc:Fallback xmlns="">
-      <p:transition xmlns:p14="http://schemas.microsoft.com/office/powerpoint/2010/main" spd="med">
-        <p:fade/>
-      </p:transition>
-    </mc:Fallback>
-  </mc:AlternateContent>
-</p:sld>
-</file>
-
-<file path=ppt/slides/slide17.xml><?xml version="1.0" encoding="utf-8"?>
-<p:sld xmlns:a="http://schemas.openxmlformats.org/drawingml/2006/main" xmlns:r="http://schemas.openxmlformats.org/officeDocument/2006/relationships" xmlns:p="http://schemas.openxmlformats.org/presentationml/2006/main">
-  <p:cSld>
-    <p:spTree>
-      <p:nvGrpSpPr>
-        <p:cNvPr id="1" name=""/>
-        <p:cNvGrpSpPr/>
-        <p:nvPr/>
-      </p:nvGrpSpPr>
-      <p:grpSpPr>
-        <a:xfrm>
-          <a:off x="0" y="0"/>
-          <a:ext cx="0" cy="0"/>
-          <a:chOff x="0" y="0"/>
-          <a:chExt cx="0" cy="0"/>
-        </a:xfrm>
-      </p:grpSpPr>
-      <p:sp>
-        <p:nvSpPr>
-          <p:cNvPr id="2" name="Content Placeholder 1"/>
-          <p:cNvSpPr>
-            <a:spLocks noGrp="1"/>
-          </p:cNvSpPr>
-          <p:nvPr>
-            <p:ph idx="1"/>
-          </p:nvPr>
-        </p:nvSpPr>
-        <p:spPr>
-          <a:xfrm>
-            <a:off x="179513" y="1180721"/>
-            <a:ext cx="8391202" cy="2824343"/>
-          </a:xfrm>
-        </p:spPr>
-        <p:txBody>
-          <a:bodyPr/>
-          <a:lstStyle/>
-          <a:p>
-            <a:pPr indent="0" algn="just">
-              <a:lnSpc>
-                <a:spcPct val="150000"/>
-              </a:lnSpc>
-              <a:spcBef>
-                <a:spcPts val="0"/>
-              </a:spcBef>
-            </a:pPr>
-            <a:r>
-              <a:rPr lang="es-ES" sz="1800" b="1" dirty="0">
-                <a:solidFill>
-                  <a:schemeClr val="accent6">
-                    <a:lumMod val="75000"/>
-                  </a:schemeClr>
-                </a:solidFill>
-                <a:latin typeface="Arial" panose="020B0604020202020204" pitchFamily="34" charset="0"/>
-                <a:cs typeface="Arial" panose="020B0604020202020204" pitchFamily="34" charset="0"/>
-              </a:rPr>
-              <a:t>4) </a:t>
-            </a:r>
-            <a:r>
-              <a:rPr lang="es-ES" sz="1800" b="1" dirty="0" err="1">
-                <a:solidFill>
-                  <a:schemeClr val="accent6">
-                    <a:lumMod val="75000"/>
-                  </a:schemeClr>
-                </a:solidFill>
-                <a:latin typeface="Arial" panose="020B0604020202020204" pitchFamily="34" charset="0"/>
-                <a:cs typeface="Arial" panose="020B0604020202020204" pitchFamily="34" charset="0"/>
-              </a:rPr>
-              <a:t>Loss</a:t>
-            </a:r>
-            <a:endParaRPr lang="es-ES" sz="1800" dirty="0">
-              <a:solidFill>
-                <a:schemeClr val="tx1">
-                  <a:lumMod val="95000"/>
-                  <a:lumOff val="5000"/>
-                </a:schemeClr>
-              </a:solidFill>
-              <a:latin typeface="Arial" panose="020B0604020202020204" pitchFamily="34" charset="0"/>
-              <a:cs typeface="Arial" panose="020B0604020202020204" pitchFamily="34" charset="0"/>
-            </a:endParaRPr>
-          </a:p>
-          <a:p>
-            <a:pPr marL="538163" indent="-17463" algn="just">
-              <a:lnSpc>
-                <a:spcPct val="150000"/>
-              </a:lnSpc>
-              <a:spcBef>
-                <a:spcPts val="0"/>
-              </a:spcBef>
-            </a:pPr>
-            <a:r>
-              <a:rPr lang="es-ES" sz="1600" dirty="0">
-                <a:solidFill>
-                  <a:schemeClr val="tx1">
-                    <a:lumMod val="95000"/>
-                    <a:lumOff val="5000"/>
-                  </a:schemeClr>
-                </a:solidFill>
-                <a:latin typeface="Arial" panose="020B0604020202020204" pitchFamily="34" charset="0"/>
-                <a:cs typeface="Arial" panose="020B0604020202020204" pitchFamily="34" charset="0"/>
-              </a:rPr>
-              <a:t>Se refiere al </a:t>
-            </a:r>
-            <a:r>
-              <a:rPr lang="es-ES" sz="1600" b="1" dirty="0">
-                <a:solidFill>
-                  <a:schemeClr val="tx1">
-                    <a:lumMod val="95000"/>
-                    <a:lumOff val="5000"/>
-                  </a:schemeClr>
-                </a:solidFill>
-                <a:latin typeface="Arial" panose="020B0604020202020204" pitchFamily="34" charset="0"/>
-                <a:cs typeface="Arial" panose="020B0604020202020204" pitchFamily="34" charset="0"/>
-              </a:rPr>
-              <a:t>porcentaje de paquetes enviados que no llegan a su destino</a:t>
-            </a:r>
-            <a:r>
-              <a:rPr lang="es-ES" sz="1600" dirty="0">
-                <a:solidFill>
-                  <a:schemeClr val="tx1">
-                    <a:lumMod val="95000"/>
-                    <a:lumOff val="5000"/>
-                  </a:schemeClr>
-                </a:solidFill>
-                <a:latin typeface="Arial" panose="020B0604020202020204" pitchFamily="34" charset="0"/>
-                <a:cs typeface="Arial" panose="020B0604020202020204" pitchFamily="34" charset="0"/>
-              </a:rPr>
-              <a:t>.</a:t>
-            </a:r>
-          </a:p>
-          <a:p>
-            <a:pPr marL="806450" indent="-285750" algn="just">
-              <a:lnSpc>
-                <a:spcPct val="150000"/>
-              </a:lnSpc>
-              <a:spcBef>
-                <a:spcPts val="0"/>
-              </a:spcBef>
-              <a:buFont typeface="Arial" panose="020B0604020202020204" pitchFamily="34" charset="0"/>
-              <a:buChar char="•"/>
-            </a:pPr>
-            <a:r>
-              <a:rPr lang="es-ES" sz="1600" dirty="0">
-                <a:solidFill>
-                  <a:schemeClr val="tx1">
-                    <a:lumMod val="95000"/>
-                    <a:lumOff val="5000"/>
-                  </a:schemeClr>
-                </a:solidFill>
-                <a:latin typeface="Arial" panose="020B0604020202020204" pitchFamily="34" charset="0"/>
-                <a:cs typeface="Arial" panose="020B0604020202020204" pitchFamily="34" charset="0"/>
-              </a:rPr>
-              <a:t>Esto puede deberse a cables defectuosos.</a:t>
-            </a:r>
-          </a:p>
-          <a:p>
-            <a:pPr marL="806450" indent="-285750" algn="just">
-              <a:lnSpc>
-                <a:spcPct val="150000"/>
-              </a:lnSpc>
-              <a:spcBef>
-                <a:spcPts val="0"/>
-              </a:spcBef>
-              <a:buFont typeface="Arial" panose="020B0604020202020204" pitchFamily="34" charset="0"/>
-              <a:buChar char="•"/>
-            </a:pPr>
-            <a:r>
-              <a:rPr lang="es-ES" sz="1600" dirty="0">
-                <a:solidFill>
-                  <a:schemeClr val="tx1">
-                    <a:lumMod val="95000"/>
-                    <a:lumOff val="5000"/>
-                  </a:schemeClr>
-                </a:solidFill>
-                <a:latin typeface="Arial" panose="020B0604020202020204" pitchFamily="34" charset="0"/>
-                <a:cs typeface="Arial" panose="020B0604020202020204" pitchFamily="34" charset="0"/>
-              </a:rPr>
-              <a:t>También puede ocurrir cuando la red está congestionada y las colas de paquetes de un dispositivo se llenan y el dispositivo comienza a descartar paquetes. Si algunos paquetes de audio no llegan a su destino, esto tendrá un efecto negativo en la calidad de la llamada.</a:t>
-            </a:r>
-          </a:p>
-        </p:txBody>
-      </p:sp>
-      <p:sp>
-        <p:nvSpPr>
-          <p:cNvPr id="4" name="Rectangle 5">
-            <a:extLst>
-              <a:ext uri="{FF2B5EF4-FFF2-40B4-BE49-F238E27FC236}">
-                <a16:creationId xmlns:a16="http://schemas.microsoft.com/office/drawing/2014/main" id="{BD2FAA3E-64BB-4FFB-46CC-02579F1E62D9}"/>
-              </a:ext>
-            </a:extLst>
-          </p:cNvPr>
-          <p:cNvSpPr txBox="1">
-            <a:spLocks noChangeArrowheads="1"/>
-          </p:cNvSpPr>
-          <p:nvPr/>
-        </p:nvSpPr>
-        <p:spPr bwMode="auto">
-          <a:xfrm>
-            <a:off x="1028700" y="37721"/>
-            <a:ext cx="7086600" cy="1143000"/>
-          </a:xfrm>
-          <a:prstGeom prst="rect">
-            <a:avLst/>
-          </a:prstGeom>
-          <a:noFill/>
-          <a:ln>
-            <a:noFill/>
-          </a:ln>
-          <a:extLst>
-            <a:ext uri="{909E8E84-426E-40DD-AFC4-6F175D3DCCD1}">
-              <a14:hiddenFill xmlns:a14="http://schemas.microsoft.com/office/drawing/2010/main">
-                <a:solidFill>
-                  <a:srgbClr val="FFFFFF"/>
-                </a:solidFill>
-              </a14:hiddenFill>
-            </a:ext>
-            <a:ext uri="{91240B29-F687-4F45-9708-019B960494DF}">
-              <a14:hiddenLine xmlns:a14="http://schemas.microsoft.com/office/drawing/2010/main" w="9525">
-                <a:solidFill>
-                  <a:srgbClr val="000000"/>
-                </a:solidFill>
-                <a:miter lim="800000"/>
-                <a:headEnd/>
-                <a:tailEnd/>
-              </a14:hiddenLine>
-            </a:ext>
-          </a:extLst>
-        </p:spPr>
-        <p:txBody>
-          <a:bodyPr vert="horz" lIns="91440" tIns="45720" rIns="91440" bIns="45720" rtlCol="0" anchor="ctr">
-            <a:normAutofit/>
-          </a:bodyPr>
-          <a:lstStyle>
-            <a:lvl1pPr algn="ctr" defTabSz="914400" rtl="0" eaLnBrk="1" latinLnBrk="0" hangingPunct="1">
-              <a:spcBef>
-                <a:spcPct val="0"/>
-              </a:spcBef>
-              <a:buNone/>
-              <a:defRPr sz="4400" kern="1200">
-                <a:solidFill>
-                  <a:srgbClr val="004C69"/>
-                </a:solidFill>
-                <a:latin typeface="+mj-lt"/>
-                <a:ea typeface="+mj-ea"/>
-                <a:cs typeface="+mj-cs"/>
-              </a:defRPr>
-            </a:lvl1pPr>
-          </a:lstStyle>
-          <a:p>
-            <a:pPr>
-              <a:spcBef>
-                <a:spcPts val="0"/>
-              </a:spcBef>
-            </a:pPr>
-            <a:r>
-              <a:rPr lang="es-ES_tradnl" altLang="es-MX" sz="3200" b="1" dirty="0" err="1">
-                <a:solidFill>
-                  <a:schemeClr val="accent4">
-                    <a:lumMod val="50000"/>
-                  </a:schemeClr>
-                </a:solidFill>
-                <a:effectLst>
-                  <a:outerShdw blurRad="38100" dist="38100" dir="2700000" algn="tl">
-                    <a:srgbClr val="C0C0C0"/>
-                  </a:outerShdw>
-                </a:effectLst>
-                <a:latin typeface="Dom Casual" charset="0"/>
-              </a:rPr>
-              <a:t>Quality</a:t>
-            </a:r>
-            <a:r>
-              <a:rPr lang="es-ES_tradnl" altLang="es-MX" sz="3200" b="1" dirty="0">
-                <a:solidFill>
-                  <a:schemeClr val="accent4">
-                    <a:lumMod val="50000"/>
-                  </a:schemeClr>
-                </a:solidFill>
-                <a:effectLst>
-                  <a:outerShdw blurRad="38100" dist="38100" dir="2700000" algn="tl">
-                    <a:srgbClr val="C0C0C0"/>
-                  </a:outerShdw>
-                </a:effectLst>
-                <a:latin typeface="Dom Casual" charset="0"/>
-              </a:rPr>
-              <a:t> </a:t>
-            </a:r>
-            <a:r>
-              <a:rPr lang="es-ES_tradnl" altLang="es-MX" sz="3200" b="1" dirty="0" err="1">
-                <a:solidFill>
-                  <a:schemeClr val="accent4">
-                    <a:lumMod val="50000"/>
-                  </a:schemeClr>
-                </a:solidFill>
-                <a:effectLst>
-                  <a:outerShdw blurRad="38100" dist="38100" dir="2700000" algn="tl">
-                    <a:srgbClr val="C0C0C0"/>
-                  </a:outerShdw>
-                </a:effectLst>
-                <a:latin typeface="Dom Casual" charset="0"/>
-              </a:rPr>
-              <a:t>of</a:t>
-            </a:r>
-            <a:r>
-              <a:rPr lang="es-ES_tradnl" altLang="es-MX" sz="3200" b="1" dirty="0">
-                <a:solidFill>
-                  <a:schemeClr val="accent4">
-                    <a:lumMod val="50000"/>
-                  </a:schemeClr>
-                </a:solidFill>
-                <a:effectLst>
-                  <a:outerShdw blurRad="38100" dist="38100" dir="2700000" algn="tl">
-                    <a:srgbClr val="C0C0C0"/>
-                  </a:outerShdw>
-                </a:effectLst>
-                <a:latin typeface="Dom Casual" charset="0"/>
-              </a:rPr>
-              <a:t> </a:t>
-            </a:r>
-            <a:r>
-              <a:rPr lang="es-ES_tradnl" altLang="es-MX" sz="3200" b="1" dirty="0" err="1">
-                <a:solidFill>
-                  <a:schemeClr val="accent4">
-                    <a:lumMod val="50000"/>
-                  </a:schemeClr>
-                </a:solidFill>
-                <a:effectLst>
-                  <a:outerShdw blurRad="38100" dist="38100" dir="2700000" algn="tl">
-                    <a:srgbClr val="C0C0C0"/>
-                  </a:outerShdw>
-                </a:effectLst>
-                <a:latin typeface="Dom Casual" charset="0"/>
-              </a:rPr>
-              <a:t>service</a:t>
-            </a:r>
-            <a:r>
-              <a:rPr lang="es-ES_tradnl" altLang="es-MX" sz="3200" b="1" dirty="0">
-                <a:solidFill>
-                  <a:schemeClr val="accent4">
-                    <a:lumMod val="50000"/>
-                  </a:schemeClr>
-                </a:solidFill>
-                <a:effectLst>
-                  <a:outerShdw blurRad="38100" dist="38100" dir="2700000" algn="tl">
-                    <a:srgbClr val="C0C0C0"/>
-                  </a:outerShdw>
-                </a:effectLst>
-                <a:latin typeface="Dom Casual" charset="0"/>
-              </a:rPr>
-              <a:t> (</a:t>
-            </a:r>
-            <a:r>
-              <a:rPr lang="es-ES_tradnl" altLang="es-MX" sz="3200" b="1" dirty="0" err="1">
-                <a:solidFill>
-                  <a:schemeClr val="accent4">
-                    <a:lumMod val="50000"/>
-                  </a:schemeClr>
-                </a:solidFill>
-                <a:effectLst>
-                  <a:outerShdw blurRad="38100" dist="38100" dir="2700000" algn="tl">
-                    <a:srgbClr val="C0C0C0"/>
-                  </a:outerShdw>
-                </a:effectLst>
-                <a:latin typeface="Dom Casual" charset="0"/>
-              </a:rPr>
-              <a:t>QoS</a:t>
-            </a:r>
-            <a:r>
-              <a:rPr lang="es-ES_tradnl" altLang="es-MX" sz="3200" b="1" dirty="0">
-                <a:solidFill>
-                  <a:schemeClr val="accent4">
-                    <a:lumMod val="50000"/>
-                  </a:schemeClr>
-                </a:solidFill>
-                <a:effectLst>
-                  <a:outerShdw blurRad="38100" dist="38100" dir="2700000" algn="tl">
-                    <a:srgbClr val="C0C0C0"/>
-                  </a:outerShdw>
-                </a:effectLst>
-                <a:latin typeface="Dom Casual" charset="0"/>
-              </a:rPr>
-              <a:t>)</a:t>
-            </a:r>
-          </a:p>
-          <a:p>
-            <a:pPr>
-              <a:spcBef>
-                <a:spcPts val="0"/>
-              </a:spcBef>
-            </a:pPr>
-            <a:r>
-              <a:rPr lang="es-ES_tradnl" altLang="es-MX" sz="1800" b="1" dirty="0">
-                <a:solidFill>
-                  <a:schemeClr val="accent3">
-                    <a:lumMod val="75000"/>
-                  </a:schemeClr>
-                </a:solidFill>
-                <a:latin typeface="Dom Casual" charset="0"/>
-              </a:rPr>
-              <a:t>Pérdida - </a:t>
-            </a:r>
-            <a:r>
-              <a:rPr lang="es-ES_tradnl" altLang="es-MX" sz="1800" b="1" dirty="0" err="1">
-                <a:solidFill>
-                  <a:schemeClr val="accent3">
-                    <a:lumMod val="75000"/>
-                  </a:schemeClr>
-                </a:solidFill>
-                <a:latin typeface="Dom Casual" charset="0"/>
-              </a:rPr>
-              <a:t>Loss</a:t>
-            </a:r>
-            <a:endParaRPr lang="es-ES_tradnl" altLang="es-MX" sz="1800" b="1" dirty="0">
-              <a:solidFill>
-                <a:schemeClr val="accent3">
-                  <a:lumMod val="75000"/>
-                </a:schemeClr>
-              </a:solidFill>
-              <a:latin typeface="Dom Casual" charset="0"/>
-            </a:endParaRPr>
-          </a:p>
-        </p:txBody>
-      </p:sp>
-      <p:pic>
-        <p:nvPicPr>
-          <p:cNvPr id="5" name="Imagen 4">
-            <a:extLst>
-              <a:ext uri="{FF2B5EF4-FFF2-40B4-BE49-F238E27FC236}">
-                <a16:creationId xmlns:a16="http://schemas.microsoft.com/office/drawing/2014/main" id="{6D177446-F96E-3313-2C85-477B085C2FCA}"/>
-              </a:ext>
-            </a:extLst>
-          </p:cNvPr>
-          <p:cNvPicPr>
-            <a:picLocks noChangeAspect="1"/>
-          </p:cNvPicPr>
-          <p:nvPr/>
-        </p:nvPicPr>
-        <p:blipFill>
-          <a:blip r:embed="rId3"/>
-          <a:stretch>
-            <a:fillRect/>
-          </a:stretch>
-        </p:blipFill>
-        <p:spPr>
-          <a:xfrm>
-            <a:off x="3059832" y="4077072"/>
-            <a:ext cx="5366866" cy="2262832"/>
-          </a:xfrm>
-          <a:prstGeom prst="rect">
-            <a:avLst/>
-          </a:prstGeom>
-        </p:spPr>
-      </p:pic>
-    </p:spTree>
-    <p:extLst>
-      <p:ext uri="{BB962C8B-B14F-4D97-AF65-F5344CB8AC3E}">
-        <p14:creationId xmlns:p14="http://schemas.microsoft.com/office/powerpoint/2010/main" val="3079820067"/>
-      </p:ext>
-    </p:extLst>
-  </p:cSld>
-  <p:clrMapOvr>
-    <a:masterClrMapping/>
-  </p:clrMapOvr>
-  <mc:AlternateContent xmlns:mc="http://schemas.openxmlformats.org/markup-compatibility/2006" xmlns:p14="http://schemas.microsoft.com/office/powerpoint/2010/main">
-    <mc:Choice Requires="p14">
-      <p:transition spd="med" p14:dur="700">
-        <p:fade/>
-      </p:transition>
-    </mc:Choice>
-    <mc:Fallback xmlns="">
-      <p:transition xmlns:p14="http://schemas.microsoft.com/office/powerpoint/2010/main" spd="med">
-        <p:fade/>
-      </p:transition>
-    </mc:Fallback>
-  </mc:AlternateContent>
-</p:sld>
-</file>
-
-<file path=ppt/slides/slide18.xml><?xml version="1.0" encoding="utf-8"?>
-<p:sld xmlns:a="http://schemas.openxmlformats.org/drawingml/2006/main" xmlns:r="http://schemas.openxmlformats.org/officeDocument/2006/relationships" xmlns:p="http://schemas.openxmlformats.org/presentationml/2006/main">
-  <p:cSld>
-    <p:spTree>
-      <p:nvGrpSpPr>
-        <p:cNvPr id="1" name=""/>
-        <p:cNvGrpSpPr/>
-        <p:nvPr/>
-      </p:nvGrpSpPr>
-      <p:grpSpPr>
-        <a:xfrm>
-          <a:off x="0" y="0"/>
-          <a:ext cx="0" cy="0"/>
-          <a:chOff x="0" y="0"/>
-          <a:chExt cx="0" cy="0"/>
-        </a:xfrm>
-      </p:grpSpPr>
-      <p:sp>
-        <p:nvSpPr>
-          <p:cNvPr id="2" name="Content Placeholder 1"/>
-          <p:cNvSpPr>
-            <a:spLocks noGrp="1"/>
-          </p:cNvSpPr>
-          <p:nvPr>
-            <p:ph idx="1"/>
-          </p:nvPr>
-        </p:nvSpPr>
-        <p:spPr>
-          <a:xfrm>
-            <a:off x="179512" y="1268760"/>
-            <a:ext cx="8590279" cy="3112375"/>
-          </a:xfrm>
-        </p:spPr>
-        <p:txBody>
-          <a:bodyPr/>
-          <a:lstStyle/>
-          <a:p>
-            <a:pPr indent="0" algn="just">
-              <a:lnSpc>
-                <a:spcPct val="150000"/>
-              </a:lnSpc>
-              <a:spcBef>
-                <a:spcPts val="0"/>
-              </a:spcBef>
-            </a:pPr>
-            <a:r>
-              <a:rPr lang="es-ES" sz="1800" dirty="0">
-                <a:solidFill>
-                  <a:schemeClr val="tx1">
-                    <a:lumMod val="95000"/>
-                    <a:lumOff val="5000"/>
-                  </a:schemeClr>
-                </a:solidFill>
-                <a:latin typeface="Arial" panose="020B0604020202020204" pitchFamily="34" charset="0"/>
-                <a:cs typeface="Arial" panose="020B0604020202020204" pitchFamily="34" charset="0"/>
-              </a:rPr>
-              <a:t>Se recomiendan los siguientes estándares para una calidad aceptable de audio para llamadas telefónicas:</a:t>
-            </a:r>
-          </a:p>
-          <a:p>
-            <a:pPr marL="571440" indent="-285750" algn="just">
-              <a:lnSpc>
-                <a:spcPct val="150000"/>
-              </a:lnSpc>
-              <a:spcBef>
-                <a:spcPts val="0"/>
-              </a:spcBef>
-              <a:buFont typeface="Arial" panose="020B0604020202020204" pitchFamily="34" charset="0"/>
-              <a:buChar char="•"/>
-            </a:pPr>
-            <a:r>
-              <a:rPr lang="es-ES" sz="1800" b="1" dirty="0">
-                <a:solidFill>
-                  <a:schemeClr val="accent6">
-                    <a:lumMod val="75000"/>
-                  </a:schemeClr>
-                </a:solidFill>
-                <a:latin typeface="Arial" panose="020B0604020202020204" pitchFamily="34" charset="0"/>
-                <a:cs typeface="Arial" panose="020B0604020202020204" pitchFamily="34" charset="0"/>
-              </a:rPr>
-              <a:t>Retraso unidireccional (</a:t>
-            </a:r>
-            <a:r>
-              <a:rPr lang="es-ES" sz="1800" b="1" dirty="0" err="1">
-                <a:solidFill>
-                  <a:schemeClr val="accent6">
-                    <a:lumMod val="75000"/>
-                  </a:schemeClr>
-                </a:solidFill>
-                <a:latin typeface="Arial" panose="020B0604020202020204" pitchFamily="34" charset="0"/>
-                <a:cs typeface="Arial" panose="020B0604020202020204" pitchFamily="34" charset="0"/>
-              </a:rPr>
-              <a:t>One-way</a:t>
-            </a:r>
-            <a:r>
-              <a:rPr lang="es-ES" sz="1800" b="1" dirty="0">
-                <a:solidFill>
-                  <a:schemeClr val="accent6">
-                    <a:lumMod val="75000"/>
-                  </a:schemeClr>
-                </a:solidFill>
-                <a:latin typeface="Arial" panose="020B0604020202020204" pitchFamily="34" charset="0"/>
-                <a:cs typeface="Arial" panose="020B0604020202020204" pitchFamily="34" charset="0"/>
-              </a:rPr>
-              <a:t> </a:t>
-            </a:r>
-            <a:r>
-              <a:rPr lang="es-ES" sz="1800" b="1" dirty="0" err="1">
-                <a:solidFill>
-                  <a:schemeClr val="accent6">
-                    <a:lumMod val="75000"/>
-                  </a:schemeClr>
-                </a:solidFill>
-                <a:latin typeface="Arial" panose="020B0604020202020204" pitchFamily="34" charset="0"/>
-                <a:cs typeface="Arial" panose="020B0604020202020204" pitchFamily="34" charset="0"/>
-              </a:rPr>
-              <a:t>delay</a:t>
-            </a:r>
-            <a:r>
-              <a:rPr lang="es-ES" sz="1800" b="1" dirty="0">
-                <a:solidFill>
-                  <a:schemeClr val="accent6">
-                    <a:lumMod val="75000"/>
-                  </a:schemeClr>
-                </a:solidFill>
-                <a:latin typeface="Arial" panose="020B0604020202020204" pitchFamily="34" charset="0"/>
-                <a:cs typeface="Arial" panose="020B0604020202020204" pitchFamily="34" charset="0"/>
-              </a:rPr>
-              <a:t>): </a:t>
-            </a:r>
-            <a:r>
-              <a:rPr lang="es-ES" sz="1800" dirty="0">
-                <a:solidFill>
-                  <a:schemeClr val="tx1">
-                    <a:lumMod val="95000"/>
-                    <a:lumOff val="5000"/>
-                  </a:schemeClr>
-                </a:solidFill>
-                <a:latin typeface="Arial" panose="020B0604020202020204" pitchFamily="34" charset="0"/>
-                <a:cs typeface="Arial" panose="020B0604020202020204" pitchFamily="34" charset="0"/>
-              </a:rPr>
-              <a:t>150 ms o menos. </a:t>
-            </a:r>
-          </a:p>
-          <a:p>
-            <a:pPr marL="571440" indent="-285750" algn="just">
-              <a:lnSpc>
-                <a:spcPct val="150000"/>
-              </a:lnSpc>
-              <a:spcBef>
-                <a:spcPts val="0"/>
-              </a:spcBef>
-              <a:buFont typeface="Arial" panose="020B0604020202020204" pitchFamily="34" charset="0"/>
-              <a:buChar char="•"/>
-            </a:pPr>
-            <a:r>
-              <a:rPr lang="es-ES" sz="1800" b="1" dirty="0" err="1">
-                <a:solidFill>
-                  <a:schemeClr val="accent6">
-                    <a:lumMod val="75000"/>
-                  </a:schemeClr>
-                </a:solidFill>
-                <a:latin typeface="Arial" panose="020B0604020202020204" pitchFamily="34" charset="0"/>
-                <a:cs typeface="Arial" panose="020B0604020202020204" pitchFamily="34" charset="0"/>
-              </a:rPr>
-              <a:t>Jitter</a:t>
-            </a:r>
-            <a:r>
-              <a:rPr lang="es-ES" sz="1800" b="1" dirty="0">
-                <a:solidFill>
-                  <a:schemeClr val="accent6">
-                    <a:lumMod val="75000"/>
-                  </a:schemeClr>
-                </a:solidFill>
-                <a:latin typeface="Arial" panose="020B0604020202020204" pitchFamily="34" charset="0"/>
-                <a:cs typeface="Arial" panose="020B0604020202020204" pitchFamily="34" charset="0"/>
-              </a:rPr>
-              <a:t>: </a:t>
-            </a:r>
-            <a:r>
-              <a:rPr lang="es-ES" sz="1800" dirty="0">
-                <a:solidFill>
-                  <a:schemeClr val="tx1">
-                    <a:lumMod val="95000"/>
-                    <a:lumOff val="5000"/>
-                  </a:schemeClr>
-                </a:solidFill>
-                <a:latin typeface="Arial" panose="020B0604020202020204" pitchFamily="34" charset="0"/>
-                <a:cs typeface="Arial" panose="020B0604020202020204" pitchFamily="34" charset="0"/>
-              </a:rPr>
-              <a:t>30 ms o menos</a:t>
-            </a:r>
-          </a:p>
-          <a:p>
-            <a:pPr marL="571440" indent="-285750" algn="just">
-              <a:lnSpc>
-                <a:spcPct val="150000"/>
-              </a:lnSpc>
-              <a:spcBef>
-                <a:spcPts val="0"/>
-              </a:spcBef>
-              <a:buFont typeface="Arial" panose="020B0604020202020204" pitchFamily="34" charset="0"/>
-              <a:buChar char="•"/>
-            </a:pPr>
-            <a:r>
-              <a:rPr lang="es-ES" sz="1800" b="1" dirty="0" err="1">
-                <a:solidFill>
-                  <a:schemeClr val="accent6">
-                    <a:lumMod val="75000"/>
-                  </a:schemeClr>
-                </a:solidFill>
-                <a:latin typeface="Arial" panose="020B0604020202020204" pitchFamily="34" charset="0"/>
-                <a:cs typeface="Arial" panose="020B0604020202020204" pitchFamily="34" charset="0"/>
-              </a:rPr>
-              <a:t>Loss</a:t>
-            </a:r>
-            <a:r>
-              <a:rPr lang="es-ES" sz="1800" b="1" dirty="0">
-                <a:solidFill>
-                  <a:schemeClr val="accent6">
-                    <a:lumMod val="75000"/>
-                  </a:schemeClr>
-                </a:solidFill>
-                <a:latin typeface="Arial" panose="020B0604020202020204" pitchFamily="34" charset="0"/>
-                <a:cs typeface="Arial" panose="020B0604020202020204" pitchFamily="34" charset="0"/>
-              </a:rPr>
-              <a:t>: </a:t>
-            </a:r>
-            <a:r>
-              <a:rPr lang="es-ES" sz="1800" dirty="0">
-                <a:solidFill>
-                  <a:schemeClr val="tx1">
-                    <a:lumMod val="95000"/>
-                    <a:lumOff val="5000"/>
-                  </a:schemeClr>
-                </a:solidFill>
-                <a:latin typeface="Arial" panose="020B0604020202020204" pitchFamily="34" charset="0"/>
-                <a:cs typeface="Arial" panose="020B0604020202020204" pitchFamily="34" charset="0"/>
-              </a:rPr>
-              <a:t>1% o menos</a:t>
-            </a:r>
-          </a:p>
-          <a:p>
-            <a:pPr indent="0" algn="just">
-              <a:lnSpc>
-                <a:spcPct val="150000"/>
-              </a:lnSpc>
-              <a:spcBef>
-                <a:spcPts val="0"/>
-              </a:spcBef>
-            </a:pPr>
-            <a:r>
-              <a:rPr lang="es-ES" sz="1800" dirty="0">
-                <a:solidFill>
-                  <a:schemeClr val="tx1">
-                    <a:lumMod val="95000"/>
-                    <a:lumOff val="5000"/>
-                  </a:schemeClr>
-                </a:solidFill>
-                <a:latin typeface="Arial" panose="020B0604020202020204" pitchFamily="34" charset="0"/>
-                <a:cs typeface="Arial" panose="020B0604020202020204" pitchFamily="34" charset="0"/>
-              </a:rPr>
-              <a:t>Si no se cumplen estos estándares, podría haber una reducción notable en la calidad de la llamada telefónica</a:t>
-            </a:r>
-            <a:r>
-              <a:rPr lang="es-ES" sz="1800" dirty="0">
-                <a:solidFill>
-                  <a:schemeClr val="accent6">
-                    <a:lumMod val="75000"/>
-                  </a:schemeClr>
-                </a:solidFill>
-                <a:latin typeface="Arial" panose="020B0604020202020204" pitchFamily="34" charset="0"/>
-                <a:cs typeface="Arial" panose="020B0604020202020204" pitchFamily="34" charset="0"/>
-              </a:rPr>
-              <a:t>. </a:t>
-            </a:r>
-            <a:r>
-              <a:rPr lang="es-ES" sz="1800" dirty="0">
-                <a:solidFill>
-                  <a:schemeClr val="tx1">
-                    <a:lumMod val="95000"/>
-                    <a:lumOff val="5000"/>
-                  </a:schemeClr>
-                </a:solidFill>
-                <a:latin typeface="Arial" panose="020B0604020202020204" pitchFamily="34" charset="0"/>
-                <a:cs typeface="Arial" panose="020B0604020202020204" pitchFamily="34" charset="0"/>
-              </a:rPr>
-              <a:t>La experiencia de usuario no será tan buena.</a:t>
-            </a:r>
-          </a:p>
-        </p:txBody>
-      </p:sp>
-      <p:sp>
-        <p:nvSpPr>
-          <p:cNvPr id="4" name="Rectangle 5">
-            <a:extLst>
-              <a:ext uri="{FF2B5EF4-FFF2-40B4-BE49-F238E27FC236}">
-                <a16:creationId xmlns:a16="http://schemas.microsoft.com/office/drawing/2014/main" id="{BD2FAA3E-64BB-4FFB-46CC-02579F1E62D9}"/>
-              </a:ext>
-            </a:extLst>
-          </p:cNvPr>
-          <p:cNvSpPr txBox="1">
-            <a:spLocks noChangeArrowheads="1"/>
-          </p:cNvSpPr>
-          <p:nvPr/>
-        </p:nvSpPr>
-        <p:spPr bwMode="auto">
-          <a:xfrm>
-            <a:off x="1028700" y="37721"/>
-            <a:ext cx="7086600" cy="1143000"/>
-          </a:xfrm>
-          <a:prstGeom prst="rect">
-            <a:avLst/>
-          </a:prstGeom>
-          <a:noFill/>
-          <a:ln>
-            <a:noFill/>
-          </a:ln>
-          <a:extLst>
-            <a:ext uri="{909E8E84-426E-40DD-AFC4-6F175D3DCCD1}">
-              <a14:hiddenFill xmlns:a14="http://schemas.microsoft.com/office/drawing/2010/main">
-                <a:solidFill>
-                  <a:srgbClr val="FFFFFF"/>
-                </a:solidFill>
-              </a14:hiddenFill>
-            </a:ext>
-            <a:ext uri="{91240B29-F687-4F45-9708-019B960494DF}">
-              <a14:hiddenLine xmlns:a14="http://schemas.microsoft.com/office/drawing/2010/main" w="9525">
-                <a:solidFill>
-                  <a:srgbClr val="000000"/>
-                </a:solidFill>
-                <a:miter lim="800000"/>
-                <a:headEnd/>
-                <a:tailEnd/>
-              </a14:hiddenLine>
-            </a:ext>
-          </a:extLst>
-        </p:spPr>
-        <p:txBody>
-          <a:bodyPr vert="horz" lIns="91440" tIns="45720" rIns="91440" bIns="45720" rtlCol="0" anchor="ctr">
-            <a:normAutofit/>
-          </a:bodyPr>
-          <a:lstStyle>
-            <a:lvl1pPr algn="ctr" defTabSz="914400" rtl="0" eaLnBrk="1" latinLnBrk="0" hangingPunct="1">
-              <a:spcBef>
-                <a:spcPct val="0"/>
-              </a:spcBef>
-              <a:buNone/>
-              <a:defRPr sz="4400" kern="1200">
-                <a:solidFill>
-                  <a:srgbClr val="004C69"/>
-                </a:solidFill>
-                <a:latin typeface="+mj-lt"/>
-                <a:ea typeface="+mj-ea"/>
-                <a:cs typeface="+mj-cs"/>
-              </a:defRPr>
-            </a:lvl1pPr>
-          </a:lstStyle>
-          <a:p>
-            <a:pPr>
-              <a:spcBef>
-                <a:spcPts val="0"/>
-              </a:spcBef>
-            </a:pPr>
-            <a:r>
-              <a:rPr lang="es-ES_tradnl" altLang="es-MX" sz="3200" b="1" dirty="0" err="1">
-                <a:solidFill>
-                  <a:schemeClr val="accent4">
-                    <a:lumMod val="50000"/>
-                  </a:schemeClr>
-                </a:solidFill>
-                <a:effectLst>
-                  <a:outerShdw blurRad="38100" dist="38100" dir="2700000" algn="tl">
-                    <a:srgbClr val="C0C0C0"/>
-                  </a:outerShdw>
-                </a:effectLst>
-                <a:latin typeface="Dom Casual" charset="0"/>
-              </a:rPr>
-              <a:t>Quality</a:t>
-            </a:r>
-            <a:r>
-              <a:rPr lang="es-ES_tradnl" altLang="es-MX" sz="3200" b="1" dirty="0">
-                <a:solidFill>
-                  <a:schemeClr val="accent4">
-                    <a:lumMod val="50000"/>
-                  </a:schemeClr>
-                </a:solidFill>
-                <a:effectLst>
-                  <a:outerShdw blurRad="38100" dist="38100" dir="2700000" algn="tl">
-                    <a:srgbClr val="C0C0C0"/>
-                  </a:outerShdw>
-                </a:effectLst>
-                <a:latin typeface="Dom Casual" charset="0"/>
-              </a:rPr>
-              <a:t> </a:t>
-            </a:r>
-            <a:r>
-              <a:rPr lang="es-ES_tradnl" altLang="es-MX" sz="3200" b="1" dirty="0" err="1">
-                <a:solidFill>
-                  <a:schemeClr val="accent4">
-                    <a:lumMod val="50000"/>
-                  </a:schemeClr>
-                </a:solidFill>
-                <a:effectLst>
-                  <a:outerShdw blurRad="38100" dist="38100" dir="2700000" algn="tl">
-                    <a:srgbClr val="C0C0C0"/>
-                  </a:outerShdw>
-                </a:effectLst>
-                <a:latin typeface="Dom Casual" charset="0"/>
-              </a:rPr>
-              <a:t>of</a:t>
-            </a:r>
-            <a:r>
-              <a:rPr lang="es-ES_tradnl" altLang="es-MX" sz="3200" b="1" dirty="0">
-                <a:solidFill>
-                  <a:schemeClr val="accent4">
-                    <a:lumMod val="50000"/>
-                  </a:schemeClr>
-                </a:solidFill>
-                <a:effectLst>
-                  <a:outerShdw blurRad="38100" dist="38100" dir="2700000" algn="tl">
-                    <a:srgbClr val="C0C0C0"/>
-                  </a:outerShdw>
-                </a:effectLst>
-                <a:latin typeface="Dom Casual" charset="0"/>
-              </a:rPr>
-              <a:t> </a:t>
-            </a:r>
-            <a:r>
-              <a:rPr lang="es-ES_tradnl" altLang="es-MX" sz="3200" b="1" dirty="0" err="1">
-                <a:solidFill>
-                  <a:schemeClr val="accent4">
-                    <a:lumMod val="50000"/>
-                  </a:schemeClr>
-                </a:solidFill>
-                <a:effectLst>
-                  <a:outerShdw blurRad="38100" dist="38100" dir="2700000" algn="tl">
-                    <a:srgbClr val="C0C0C0"/>
-                  </a:outerShdw>
-                </a:effectLst>
-                <a:latin typeface="Dom Casual" charset="0"/>
-              </a:rPr>
-              <a:t>service</a:t>
-            </a:r>
-            <a:r>
-              <a:rPr lang="es-ES_tradnl" altLang="es-MX" sz="3200" b="1" dirty="0">
-                <a:solidFill>
-                  <a:schemeClr val="accent4">
-                    <a:lumMod val="50000"/>
-                  </a:schemeClr>
-                </a:solidFill>
-                <a:effectLst>
-                  <a:outerShdw blurRad="38100" dist="38100" dir="2700000" algn="tl">
-                    <a:srgbClr val="C0C0C0"/>
-                  </a:outerShdw>
-                </a:effectLst>
-                <a:latin typeface="Dom Casual" charset="0"/>
-              </a:rPr>
-              <a:t> (</a:t>
-            </a:r>
-            <a:r>
-              <a:rPr lang="es-ES_tradnl" altLang="es-MX" sz="3200" b="1" dirty="0" err="1">
-                <a:solidFill>
-                  <a:schemeClr val="accent4">
-                    <a:lumMod val="50000"/>
-                  </a:schemeClr>
-                </a:solidFill>
-                <a:effectLst>
-                  <a:outerShdw blurRad="38100" dist="38100" dir="2700000" algn="tl">
-                    <a:srgbClr val="C0C0C0"/>
-                  </a:outerShdw>
-                </a:effectLst>
-                <a:latin typeface="Dom Casual" charset="0"/>
-              </a:rPr>
-              <a:t>QoS</a:t>
-            </a:r>
-            <a:r>
-              <a:rPr lang="es-ES_tradnl" altLang="es-MX" sz="3200" b="1" dirty="0">
-                <a:solidFill>
-                  <a:schemeClr val="accent4">
-                    <a:lumMod val="50000"/>
-                  </a:schemeClr>
-                </a:solidFill>
-                <a:effectLst>
-                  <a:outerShdw blurRad="38100" dist="38100" dir="2700000" algn="tl">
-                    <a:srgbClr val="C0C0C0"/>
-                  </a:outerShdw>
-                </a:effectLst>
-                <a:latin typeface="Dom Casual" charset="0"/>
-              </a:rPr>
-              <a:t>)</a:t>
-            </a:r>
-          </a:p>
-          <a:p>
-            <a:pPr>
-              <a:spcBef>
-                <a:spcPts val="0"/>
-              </a:spcBef>
-            </a:pPr>
-            <a:r>
-              <a:rPr lang="es-ES_tradnl" altLang="es-MX" sz="1800" b="1" dirty="0">
-                <a:solidFill>
-                  <a:schemeClr val="accent3">
-                    <a:lumMod val="75000"/>
-                  </a:schemeClr>
-                </a:solidFill>
-                <a:latin typeface="Dom Casual" charset="0"/>
-              </a:rPr>
-              <a:t>Estándares para una calidad del servicio aceptable</a:t>
-            </a:r>
-          </a:p>
-        </p:txBody>
-      </p:sp>
-      <p:pic>
-        <p:nvPicPr>
-          <p:cNvPr id="3" name="Imagen 2">
-            <a:extLst>
-              <a:ext uri="{FF2B5EF4-FFF2-40B4-BE49-F238E27FC236}">
-                <a16:creationId xmlns:a16="http://schemas.microsoft.com/office/drawing/2014/main" id="{73C9A04A-731B-0521-165E-1AC6C572D3DA}"/>
-              </a:ext>
-            </a:extLst>
-          </p:cNvPr>
-          <p:cNvPicPr>
-            <a:picLocks noChangeAspect="1"/>
-          </p:cNvPicPr>
-          <p:nvPr/>
-        </p:nvPicPr>
-        <p:blipFill>
-          <a:blip r:embed="rId3"/>
-          <a:stretch>
-            <a:fillRect/>
-          </a:stretch>
-        </p:blipFill>
-        <p:spPr>
-          <a:xfrm>
-            <a:off x="1374263" y="4563020"/>
-            <a:ext cx="6200775" cy="1476375"/>
-          </a:xfrm>
-          <a:prstGeom prst="rect">
-            <a:avLst/>
-          </a:prstGeom>
-        </p:spPr>
-      </p:pic>
-    </p:spTree>
-    <p:extLst>
-      <p:ext uri="{BB962C8B-B14F-4D97-AF65-F5344CB8AC3E}">
-        <p14:creationId xmlns:p14="http://schemas.microsoft.com/office/powerpoint/2010/main" val="298812370"/>
-      </p:ext>
-    </p:extLst>
-  </p:cSld>
-  <p:clrMapOvr>
-    <a:masterClrMapping/>
-  </p:clrMapOvr>
-  <mc:AlternateContent xmlns:mc="http://schemas.openxmlformats.org/markup-compatibility/2006" xmlns:p14="http://schemas.microsoft.com/office/powerpoint/2010/main">
-    <mc:Choice Requires="p14">
-      <p:transition spd="med" p14:dur="700">
-        <p:fade/>
-      </p:transition>
-    </mc:Choice>
-    <mc:Fallback xmlns="">
-      <p:transition xmlns:p14="http://schemas.microsoft.com/office/powerpoint/2010/main" spd="med">
-        <p:fade/>
-      </p:transition>
-    </mc:Fallback>
-  </mc:AlternateContent>
-</p:sld>
-</file>
-
-<file path=ppt/slides/slide19.xml><?xml version="1.0" encoding="utf-8"?>
-<p:sld xmlns:a="http://schemas.openxmlformats.org/drawingml/2006/main" xmlns:r="http://schemas.openxmlformats.org/officeDocument/2006/relationships" xmlns:p="http://schemas.openxmlformats.org/presentationml/2006/main">
-  <p:cSld>
-    <p:spTree>
-      <p:nvGrpSpPr>
-        <p:cNvPr id="1" name=""/>
-        <p:cNvGrpSpPr/>
-        <p:nvPr/>
-      </p:nvGrpSpPr>
-      <p:grpSpPr>
-        <a:xfrm>
-          <a:off x="0" y="0"/>
-          <a:ext cx="0" cy="0"/>
-          <a:chOff x="0" y="0"/>
-          <a:chExt cx="0" cy="0"/>
-        </a:xfrm>
-      </p:grpSpPr>
-      <p:sp>
-        <p:nvSpPr>
-          <p:cNvPr id="2" name="Content Placeholder 1"/>
-          <p:cNvSpPr>
-            <a:spLocks noGrp="1"/>
-          </p:cNvSpPr>
-          <p:nvPr>
-            <p:ph idx="1"/>
-          </p:nvPr>
-        </p:nvSpPr>
-        <p:spPr>
-          <a:xfrm>
-            <a:off x="107504" y="1412776"/>
-            <a:ext cx="8352930" cy="2016224"/>
-          </a:xfrm>
-        </p:spPr>
-        <p:txBody>
-          <a:bodyPr/>
-          <a:lstStyle/>
-          <a:p>
-            <a:pPr marL="571440" indent="-285750" algn="just">
-              <a:lnSpc>
-                <a:spcPct val="150000"/>
-              </a:lnSpc>
-              <a:spcBef>
-                <a:spcPts val="0"/>
-              </a:spcBef>
-              <a:buFont typeface="Arial" panose="020B0604020202020204" pitchFamily="34" charset="0"/>
-              <a:buChar char="•"/>
-            </a:pPr>
-            <a:r>
-              <a:rPr lang="es-ES" sz="1800" dirty="0">
-                <a:solidFill>
-                  <a:schemeClr val="tx1">
-                    <a:lumMod val="95000"/>
-                    <a:lumOff val="5000"/>
-                  </a:schemeClr>
-                </a:solidFill>
-                <a:latin typeface="Arial" panose="020B0604020202020204" pitchFamily="34" charset="0"/>
-                <a:cs typeface="Arial" panose="020B0604020202020204" pitchFamily="34" charset="0"/>
-              </a:rPr>
-              <a:t>Si un dispositivo de red recibe mensajes más rápido de lo que puede reenviarlos a través de la interfaz adecuada, los mensajes se colocan en una cola o fila. </a:t>
-            </a:r>
-            <a:r>
-              <a:rPr lang="es-ES" sz="1800" dirty="0">
-                <a:solidFill>
-                  <a:schemeClr val="accent6">
-                    <a:lumMod val="75000"/>
-                  </a:schemeClr>
-                </a:solidFill>
-                <a:latin typeface="Arial" panose="020B0604020202020204" pitchFamily="34" charset="0"/>
-                <a:cs typeface="Arial" panose="020B0604020202020204" pitchFamily="34" charset="0"/>
-              </a:rPr>
-              <a:t>Por ejemplo, este enrutador recibe paquetes en sus interfaces </a:t>
-            </a:r>
-            <a:r>
-              <a:rPr lang="es-ES" sz="1800" b="1" dirty="0">
-                <a:solidFill>
-                  <a:schemeClr val="accent6">
-                    <a:lumMod val="75000"/>
-                  </a:schemeClr>
-                </a:solidFill>
-                <a:latin typeface="Arial" panose="020B0604020202020204" pitchFamily="34" charset="0"/>
-                <a:cs typeface="Arial" panose="020B0604020202020204" pitchFamily="34" charset="0"/>
-              </a:rPr>
-              <a:t>G0/0</a:t>
-            </a:r>
-            <a:r>
-              <a:rPr lang="es-ES" sz="1800" dirty="0">
-                <a:solidFill>
-                  <a:schemeClr val="accent6">
-                    <a:lumMod val="75000"/>
-                  </a:schemeClr>
-                </a:solidFill>
-                <a:latin typeface="Arial" panose="020B0604020202020204" pitchFamily="34" charset="0"/>
-                <a:cs typeface="Arial" panose="020B0604020202020204" pitchFamily="34" charset="0"/>
-              </a:rPr>
-              <a:t> y </a:t>
-            </a:r>
-            <a:r>
-              <a:rPr lang="es-ES" sz="1800" b="1" dirty="0">
-                <a:solidFill>
-                  <a:schemeClr val="accent6">
-                    <a:lumMod val="75000"/>
-                  </a:schemeClr>
-                </a:solidFill>
-                <a:latin typeface="Arial" panose="020B0604020202020204" pitchFamily="34" charset="0"/>
-                <a:cs typeface="Arial" panose="020B0604020202020204" pitchFamily="34" charset="0"/>
-              </a:rPr>
-              <a:t>G0/1 </a:t>
-            </a:r>
-            <a:r>
-              <a:rPr lang="es-ES" sz="1800" dirty="0">
-                <a:solidFill>
-                  <a:schemeClr val="accent6">
-                    <a:lumMod val="75000"/>
-                  </a:schemeClr>
-                </a:solidFill>
-                <a:latin typeface="Arial" panose="020B0604020202020204" pitchFamily="34" charset="0"/>
-                <a:cs typeface="Arial" panose="020B0604020202020204" pitchFamily="34" charset="0"/>
-              </a:rPr>
-              <a:t>más rápido de lo que puede reenviarlos desde su interfaz </a:t>
-            </a:r>
-            <a:r>
-              <a:rPr lang="es-ES" sz="1800" b="1" dirty="0">
-                <a:solidFill>
-                  <a:schemeClr val="accent6">
-                    <a:lumMod val="75000"/>
-                  </a:schemeClr>
-                </a:solidFill>
-                <a:latin typeface="Arial" panose="020B0604020202020204" pitchFamily="34" charset="0"/>
-                <a:cs typeface="Arial" panose="020B0604020202020204" pitchFamily="34" charset="0"/>
-              </a:rPr>
-              <a:t>G0/2</a:t>
-            </a:r>
-            <a:r>
-              <a:rPr lang="es-ES" sz="1800" dirty="0">
-                <a:solidFill>
-                  <a:schemeClr val="accent6">
-                    <a:lumMod val="75000"/>
-                  </a:schemeClr>
-                </a:solidFill>
-                <a:latin typeface="Arial" panose="020B0604020202020204" pitchFamily="34" charset="0"/>
-                <a:cs typeface="Arial" panose="020B0604020202020204" pitchFamily="34" charset="0"/>
-              </a:rPr>
-              <a:t>. </a:t>
-            </a:r>
-          </a:p>
-        </p:txBody>
-      </p:sp>
-      <p:sp>
-        <p:nvSpPr>
-          <p:cNvPr id="4" name="Rectangle 5">
-            <a:extLst>
-              <a:ext uri="{FF2B5EF4-FFF2-40B4-BE49-F238E27FC236}">
-                <a16:creationId xmlns:a16="http://schemas.microsoft.com/office/drawing/2014/main" id="{BD2FAA3E-64BB-4FFB-46CC-02579F1E62D9}"/>
-              </a:ext>
-            </a:extLst>
-          </p:cNvPr>
-          <p:cNvSpPr txBox="1">
-            <a:spLocks noChangeArrowheads="1"/>
-          </p:cNvSpPr>
-          <p:nvPr/>
-        </p:nvSpPr>
-        <p:spPr bwMode="auto">
-          <a:xfrm>
-            <a:off x="1028700" y="37721"/>
-            <a:ext cx="7086600" cy="1143000"/>
-          </a:xfrm>
-          <a:prstGeom prst="rect">
-            <a:avLst/>
-          </a:prstGeom>
-          <a:noFill/>
-          <a:ln>
-            <a:noFill/>
-          </a:ln>
-          <a:extLst>
-            <a:ext uri="{909E8E84-426E-40DD-AFC4-6F175D3DCCD1}">
-              <a14:hiddenFill xmlns:a14="http://schemas.microsoft.com/office/drawing/2010/main">
-                <a:solidFill>
-                  <a:srgbClr val="FFFFFF"/>
-                </a:solidFill>
-              </a14:hiddenFill>
-            </a:ext>
-            <a:ext uri="{91240B29-F687-4F45-9708-019B960494DF}">
-              <a14:hiddenLine xmlns:a14="http://schemas.microsoft.com/office/drawing/2010/main" w="9525">
-                <a:solidFill>
-                  <a:srgbClr val="000000"/>
-                </a:solidFill>
-                <a:miter lim="800000"/>
-                <a:headEnd/>
-                <a:tailEnd/>
-              </a14:hiddenLine>
-            </a:ext>
-          </a:extLst>
-        </p:spPr>
-        <p:txBody>
-          <a:bodyPr vert="horz" lIns="91440" tIns="45720" rIns="91440" bIns="45720" rtlCol="0" anchor="ctr">
-            <a:normAutofit/>
-          </a:bodyPr>
-          <a:lstStyle>
-            <a:lvl1pPr algn="ctr" defTabSz="914400" rtl="0" eaLnBrk="1" latinLnBrk="0" hangingPunct="1">
-              <a:spcBef>
-                <a:spcPct val="0"/>
-              </a:spcBef>
-              <a:buNone/>
-              <a:defRPr sz="4400" kern="1200">
-                <a:solidFill>
-                  <a:srgbClr val="004C69"/>
-                </a:solidFill>
-                <a:latin typeface="+mj-lt"/>
-                <a:ea typeface="+mj-ea"/>
-                <a:cs typeface="+mj-cs"/>
-              </a:defRPr>
-            </a:lvl1pPr>
-          </a:lstStyle>
-          <a:p>
-            <a:pPr>
-              <a:spcBef>
-                <a:spcPts val="0"/>
-              </a:spcBef>
-            </a:pPr>
-            <a:r>
-              <a:rPr lang="es-ES_tradnl" altLang="es-MX" sz="3200" b="1" dirty="0" err="1">
-                <a:solidFill>
-                  <a:schemeClr val="accent4">
-                    <a:lumMod val="50000"/>
-                  </a:schemeClr>
-                </a:solidFill>
-                <a:effectLst>
-                  <a:outerShdw blurRad="38100" dist="38100" dir="2700000" algn="tl">
-                    <a:srgbClr val="C0C0C0"/>
-                  </a:outerShdw>
-                </a:effectLst>
-                <a:latin typeface="Dom Casual" charset="0"/>
-              </a:rPr>
-              <a:t>Quality</a:t>
-            </a:r>
-            <a:r>
-              <a:rPr lang="es-ES_tradnl" altLang="es-MX" sz="3200" b="1" dirty="0">
-                <a:solidFill>
-                  <a:schemeClr val="accent4">
-                    <a:lumMod val="50000"/>
-                  </a:schemeClr>
-                </a:solidFill>
-                <a:effectLst>
-                  <a:outerShdw blurRad="38100" dist="38100" dir="2700000" algn="tl">
-                    <a:srgbClr val="C0C0C0"/>
-                  </a:outerShdw>
-                </a:effectLst>
-                <a:latin typeface="Dom Casual" charset="0"/>
-              </a:rPr>
-              <a:t> </a:t>
-            </a:r>
-            <a:r>
-              <a:rPr lang="es-ES_tradnl" altLang="es-MX" sz="3200" b="1" dirty="0" err="1">
-                <a:solidFill>
-                  <a:schemeClr val="accent4">
-                    <a:lumMod val="50000"/>
-                  </a:schemeClr>
-                </a:solidFill>
-                <a:effectLst>
-                  <a:outerShdw blurRad="38100" dist="38100" dir="2700000" algn="tl">
-                    <a:srgbClr val="C0C0C0"/>
-                  </a:outerShdw>
-                </a:effectLst>
-                <a:latin typeface="Dom Casual" charset="0"/>
-              </a:rPr>
-              <a:t>of</a:t>
-            </a:r>
-            <a:r>
-              <a:rPr lang="es-ES_tradnl" altLang="es-MX" sz="3200" b="1" dirty="0">
-                <a:solidFill>
-                  <a:schemeClr val="accent4">
-                    <a:lumMod val="50000"/>
-                  </a:schemeClr>
-                </a:solidFill>
-                <a:effectLst>
-                  <a:outerShdw blurRad="38100" dist="38100" dir="2700000" algn="tl">
-                    <a:srgbClr val="C0C0C0"/>
-                  </a:outerShdw>
-                </a:effectLst>
-                <a:latin typeface="Dom Casual" charset="0"/>
-              </a:rPr>
-              <a:t> </a:t>
-            </a:r>
-            <a:r>
-              <a:rPr lang="es-ES_tradnl" altLang="es-MX" sz="3200" b="1" dirty="0" err="1">
-                <a:solidFill>
-                  <a:schemeClr val="accent4">
-                    <a:lumMod val="50000"/>
-                  </a:schemeClr>
-                </a:solidFill>
-                <a:effectLst>
-                  <a:outerShdw blurRad="38100" dist="38100" dir="2700000" algn="tl">
-                    <a:srgbClr val="C0C0C0"/>
-                  </a:outerShdw>
-                </a:effectLst>
-                <a:latin typeface="Dom Casual" charset="0"/>
-              </a:rPr>
-              <a:t>service</a:t>
-            </a:r>
-            <a:r>
-              <a:rPr lang="es-ES_tradnl" altLang="es-MX" sz="3200" b="1" dirty="0">
-                <a:solidFill>
-                  <a:schemeClr val="accent4">
-                    <a:lumMod val="50000"/>
-                  </a:schemeClr>
-                </a:solidFill>
-                <a:effectLst>
-                  <a:outerShdw blurRad="38100" dist="38100" dir="2700000" algn="tl">
-                    <a:srgbClr val="C0C0C0"/>
-                  </a:outerShdw>
-                </a:effectLst>
-                <a:latin typeface="Dom Casual" charset="0"/>
-              </a:rPr>
-              <a:t> (</a:t>
-            </a:r>
-            <a:r>
-              <a:rPr lang="es-ES_tradnl" altLang="es-MX" sz="3200" b="1" dirty="0" err="1">
-                <a:solidFill>
-                  <a:schemeClr val="accent4">
-                    <a:lumMod val="50000"/>
-                  </a:schemeClr>
-                </a:solidFill>
-                <a:effectLst>
-                  <a:outerShdw blurRad="38100" dist="38100" dir="2700000" algn="tl">
-                    <a:srgbClr val="C0C0C0"/>
-                  </a:outerShdw>
-                </a:effectLst>
-                <a:latin typeface="Dom Casual" charset="0"/>
-              </a:rPr>
-              <a:t>QoS</a:t>
-            </a:r>
-            <a:r>
-              <a:rPr lang="es-ES_tradnl" altLang="es-MX" sz="3200" b="1" dirty="0">
-                <a:solidFill>
-                  <a:schemeClr val="accent4">
-                    <a:lumMod val="50000"/>
-                  </a:schemeClr>
-                </a:solidFill>
-                <a:effectLst>
-                  <a:outerShdw blurRad="38100" dist="38100" dir="2700000" algn="tl">
-                    <a:srgbClr val="C0C0C0"/>
-                  </a:outerShdw>
-                </a:effectLst>
-                <a:latin typeface="Dom Casual" charset="0"/>
-              </a:rPr>
-              <a:t>)</a:t>
-            </a:r>
-          </a:p>
-          <a:p>
-            <a:pPr>
-              <a:spcBef>
-                <a:spcPts val="0"/>
-              </a:spcBef>
-            </a:pPr>
-            <a:r>
-              <a:rPr lang="es-ES_tradnl" altLang="es-MX" sz="1800" b="1" dirty="0" err="1">
-                <a:solidFill>
-                  <a:schemeClr val="accent3">
-                    <a:lumMod val="75000"/>
-                  </a:schemeClr>
-                </a:solidFill>
-                <a:latin typeface="Dom Casual" charset="0"/>
-              </a:rPr>
-              <a:t>Queuing</a:t>
-            </a:r>
-            <a:r>
-              <a:rPr lang="es-ES_tradnl" altLang="es-MX" sz="1800" b="1" dirty="0">
-                <a:solidFill>
-                  <a:schemeClr val="accent3">
-                    <a:lumMod val="75000"/>
-                  </a:schemeClr>
-                </a:solidFill>
-                <a:latin typeface="Dom Casual" charset="0"/>
-              </a:rPr>
-              <a:t> – Haciendo fila - Encolamiento</a:t>
-            </a:r>
-          </a:p>
-        </p:txBody>
-      </p:sp>
-      <p:pic>
-        <p:nvPicPr>
-          <p:cNvPr id="6" name="Imagen 5">
-            <a:extLst>
-              <a:ext uri="{FF2B5EF4-FFF2-40B4-BE49-F238E27FC236}">
-                <a16:creationId xmlns:a16="http://schemas.microsoft.com/office/drawing/2014/main" id="{3A7BCCF0-C9BC-5487-D6ED-370DC91D5EDA}"/>
-              </a:ext>
-            </a:extLst>
-          </p:cNvPr>
-          <p:cNvPicPr>
-            <a:picLocks noChangeAspect="1"/>
-          </p:cNvPicPr>
-          <p:nvPr/>
-        </p:nvPicPr>
-        <p:blipFill>
-          <a:blip r:embed="rId3"/>
-          <a:stretch>
-            <a:fillRect/>
-          </a:stretch>
-        </p:blipFill>
-        <p:spPr>
-          <a:xfrm>
-            <a:off x="28636" y="3677986"/>
-            <a:ext cx="9144000" cy="2387978"/>
-          </a:xfrm>
-          <a:prstGeom prst="rect">
-            <a:avLst/>
-          </a:prstGeom>
-        </p:spPr>
-      </p:pic>
-    </p:spTree>
-    <p:extLst>
-      <p:ext uri="{BB962C8B-B14F-4D97-AF65-F5344CB8AC3E}">
-        <p14:creationId xmlns:p14="http://schemas.microsoft.com/office/powerpoint/2010/main" val="608542121"/>
-      </p:ext>
-    </p:extLst>
-  </p:cSld>
-  <p:clrMapOvr>
-    <a:masterClrMapping/>
-  </p:clrMapOvr>
-  <mc:AlternateContent xmlns:mc="http://schemas.openxmlformats.org/markup-compatibility/2006" xmlns:p14="http://schemas.microsoft.com/office/powerpoint/2010/main">
-    <mc:Choice Requires="p14">
-      <p:transition spd="med" p14:dur="700">
-        <p:fade/>
-      </p:transition>
-    </mc:Choice>
-    <mc:Fallback xmlns="">
-      <p:transition xmlns:p14="http://schemas.microsoft.com/office/powerpoint/2010/main" spd="med">
-        <p:fade/>
-      </p:transition>
-    </mc:Fallback>
-  </mc:AlternateContent>
-</p:sld>
-</file>
-
-<file path=ppt/slides/slide2.xml><?xml version="1.0" encoding="utf-8"?>
-<p:sld xmlns:a="http://schemas.openxmlformats.org/drawingml/2006/main" xmlns:r="http://schemas.openxmlformats.org/officeDocument/2006/relationships" xmlns:p="http://schemas.openxmlformats.org/presentationml/2006/main">
-  <p:cSld>
-    <p:spTree>
-      <p:nvGrpSpPr>
-        <p:cNvPr id="1" name=""/>
-        <p:cNvGrpSpPr/>
-        <p:nvPr/>
-      </p:nvGrpSpPr>
-      <p:grpSpPr>
-        <a:xfrm>
-          <a:off x="0" y="0"/>
-          <a:ext cx="0" cy="0"/>
-          <a:chOff x="0" y="0"/>
-          <a:chExt cx="0" cy="0"/>
-        </a:xfrm>
-      </p:grpSpPr>
-      <p:pic>
-        <p:nvPicPr>
-          <p:cNvPr id="7" name="Imagen 6" descr="Una pantalla de una computadora&#10;&#10;Descripción generada automáticamente con confianza media">
-            <a:extLst>
-              <a:ext uri="{FF2B5EF4-FFF2-40B4-BE49-F238E27FC236}">
-                <a16:creationId xmlns:a16="http://schemas.microsoft.com/office/drawing/2014/main" id="{069253FC-52A6-4B7E-B893-87B9E83FEFC8}"/>
-              </a:ext>
-            </a:extLst>
-          </p:cNvPr>
-          <p:cNvPicPr>
-            <a:picLocks noChangeAspect="1"/>
-          </p:cNvPicPr>
-          <p:nvPr/>
-        </p:nvPicPr>
-        <p:blipFill>
-          <a:blip r:embed="rId2">
-            <a:extLst>
-              <a:ext uri="{28A0092B-C50C-407E-A947-70E740481C1C}">
-                <a14:useLocalDpi xmlns:a14="http://schemas.microsoft.com/office/drawing/2010/main" val="0"/>
-              </a:ext>
-            </a:extLst>
-          </a:blip>
-          <a:stretch>
-            <a:fillRect/>
-          </a:stretch>
-        </p:blipFill>
-        <p:spPr>
-          <a:xfrm>
-            <a:off x="4343297" y="2021171"/>
-            <a:ext cx="4104456" cy="2815657"/>
-          </a:xfrm>
-          <a:prstGeom prst="rect">
-            <a:avLst/>
-          </a:prstGeom>
-        </p:spPr>
-      </p:pic>
-      <p:sp>
-        <p:nvSpPr>
-          <p:cNvPr id="26629" name="Text Box 5"/>
-          <p:cNvSpPr txBox="1">
-            <a:spLocks noChangeArrowheads="1"/>
-          </p:cNvSpPr>
-          <p:nvPr/>
-        </p:nvSpPr>
-        <p:spPr bwMode="auto">
-          <a:xfrm>
-            <a:off x="814905" y="2348880"/>
-            <a:ext cx="3528392" cy="1154675"/>
-          </a:xfrm>
-          <a:prstGeom prst="rect">
-            <a:avLst/>
-          </a:prstGeom>
-          <a:noFill/>
-          <a:ln>
-            <a:noFill/>
-          </a:ln>
-          <a:extLst>
-            <a:ext uri="{909E8E84-426E-40DD-AFC4-6F175D3DCCD1}">
-              <a14:hiddenFill xmlns:a14="http://schemas.microsoft.com/office/drawing/2010/main">
-                <a:solidFill>
-                  <a:srgbClr val="FFFFFF"/>
-                </a:solidFill>
-              </a14:hiddenFill>
-            </a:ext>
-            <a:ext uri="{91240B29-F687-4F45-9708-019B960494DF}">
-              <a14:hiddenLine xmlns:a14="http://schemas.microsoft.com/office/drawing/2010/main" w="9525">
-                <a:solidFill>
-                  <a:srgbClr val="000000"/>
-                </a:solidFill>
-                <a:miter lim="800000"/>
-                <a:headEnd/>
-                <a:tailEnd/>
-              </a14:hiddenLine>
-            </a:ext>
-          </a:extLst>
-        </p:spPr>
-        <p:txBody>
-          <a:bodyPr wrap="square">
-            <a:spAutoFit/>
-          </a:bodyPr>
-          <a:lstStyle>
-            <a:lvl1pPr>
-              <a:defRPr sz="1600">
-                <a:solidFill>
-                  <a:schemeClr val="tx1"/>
-                </a:solidFill>
-                <a:latin typeface="Times New Roman" pitchFamily="18" charset="0"/>
-              </a:defRPr>
-            </a:lvl1pPr>
-            <a:lvl2pPr marL="742950" indent="-285750">
-              <a:defRPr sz="1600">
-                <a:solidFill>
-                  <a:schemeClr val="tx1"/>
-                </a:solidFill>
-                <a:latin typeface="Times New Roman" pitchFamily="18" charset="0"/>
-              </a:defRPr>
-            </a:lvl2pPr>
-            <a:lvl3pPr marL="1143000" indent="-228600">
-              <a:defRPr sz="1600">
-                <a:solidFill>
-                  <a:schemeClr val="tx1"/>
-                </a:solidFill>
-                <a:latin typeface="Times New Roman" pitchFamily="18" charset="0"/>
-              </a:defRPr>
-            </a:lvl3pPr>
-            <a:lvl4pPr marL="1600200" indent="-228600">
-              <a:defRPr sz="1600">
-                <a:solidFill>
-                  <a:schemeClr val="tx1"/>
-                </a:solidFill>
-                <a:latin typeface="Times New Roman" pitchFamily="18" charset="0"/>
-              </a:defRPr>
-            </a:lvl4pPr>
-            <a:lvl5pPr marL="2057400" indent="-228600">
-              <a:defRPr sz="1600">
-                <a:solidFill>
-                  <a:schemeClr val="tx1"/>
-                </a:solidFill>
-                <a:latin typeface="Times New Roman" pitchFamily="18" charset="0"/>
-              </a:defRPr>
-            </a:lvl5pPr>
-            <a:lvl6pPr marL="2514600" indent="-228600" eaLnBrk="0" fontAlgn="base" hangingPunct="0">
-              <a:spcBef>
-                <a:spcPct val="0"/>
-              </a:spcBef>
-              <a:spcAft>
-                <a:spcPct val="0"/>
-              </a:spcAft>
-              <a:defRPr sz="1600">
-                <a:solidFill>
-                  <a:schemeClr val="tx1"/>
-                </a:solidFill>
-                <a:latin typeface="Times New Roman" pitchFamily="18" charset="0"/>
-              </a:defRPr>
-            </a:lvl6pPr>
-            <a:lvl7pPr marL="2971800" indent="-228600" eaLnBrk="0" fontAlgn="base" hangingPunct="0">
-              <a:spcBef>
-                <a:spcPct val="0"/>
-              </a:spcBef>
-              <a:spcAft>
-                <a:spcPct val="0"/>
-              </a:spcAft>
-              <a:defRPr sz="1600">
-                <a:solidFill>
-                  <a:schemeClr val="tx1"/>
-                </a:solidFill>
-                <a:latin typeface="Times New Roman" pitchFamily="18" charset="0"/>
-              </a:defRPr>
-            </a:lvl7pPr>
-            <a:lvl8pPr marL="3429000" indent="-228600" eaLnBrk="0" fontAlgn="base" hangingPunct="0">
-              <a:spcBef>
-                <a:spcPct val="0"/>
-              </a:spcBef>
-              <a:spcAft>
-                <a:spcPct val="0"/>
-              </a:spcAft>
-              <a:defRPr sz="1600">
-                <a:solidFill>
-                  <a:schemeClr val="tx1"/>
-                </a:solidFill>
-                <a:latin typeface="Times New Roman" pitchFamily="18" charset="0"/>
-              </a:defRPr>
-            </a:lvl8pPr>
-            <a:lvl9pPr marL="3886200" indent="-228600" eaLnBrk="0" fontAlgn="base" hangingPunct="0">
-              <a:spcBef>
-                <a:spcPct val="0"/>
-              </a:spcBef>
-              <a:spcAft>
-                <a:spcPct val="0"/>
-              </a:spcAft>
-              <a:defRPr sz="1600">
-                <a:solidFill>
-                  <a:schemeClr val="tx1"/>
-                </a:solidFill>
-                <a:latin typeface="Times New Roman" pitchFamily="18" charset="0"/>
-              </a:defRPr>
-            </a:lvl9pPr>
-          </a:lstStyle>
-          <a:p>
-            <a:pPr marL="285750" indent="-285750">
-              <a:lnSpc>
-                <a:spcPct val="150000"/>
-              </a:lnSpc>
-              <a:buFont typeface="Arial" panose="020B0604020202020204" pitchFamily="34" charset="0"/>
-              <a:buChar char="•"/>
-            </a:pPr>
-            <a:r>
-              <a:rPr lang="es-MX" dirty="0">
-                <a:latin typeface="Arial" panose="020B0604020202020204" pitchFamily="34" charset="0"/>
-                <a:cs typeface="Arial" panose="020B0604020202020204" pitchFamily="34" charset="0"/>
-              </a:rPr>
-              <a:t>Introducción a la calidad del servicio (</a:t>
-            </a:r>
-            <a:r>
-              <a:rPr lang="es-MX" dirty="0" err="1">
-                <a:latin typeface="Arial" panose="020B0604020202020204" pitchFamily="34" charset="0"/>
-                <a:cs typeface="Arial" panose="020B0604020202020204" pitchFamily="34" charset="0"/>
-              </a:rPr>
-              <a:t>QoS</a:t>
-            </a:r>
-            <a:r>
-              <a:rPr lang="es-MX" dirty="0">
-                <a:latin typeface="Arial" panose="020B0604020202020204" pitchFamily="34" charset="0"/>
-                <a:cs typeface="Arial" panose="020B0604020202020204" pitchFamily="34" charset="0"/>
-              </a:rPr>
-              <a:t>)</a:t>
-            </a:r>
-          </a:p>
-          <a:p>
-            <a:pPr marL="285750" indent="-285750">
-              <a:lnSpc>
-                <a:spcPct val="150000"/>
-              </a:lnSpc>
-              <a:buFont typeface="Arial" panose="020B0604020202020204" pitchFamily="34" charset="0"/>
-              <a:buChar char="•"/>
-            </a:pPr>
-            <a:r>
-              <a:rPr lang="es-MX" dirty="0">
-                <a:latin typeface="Arial" panose="020B0604020202020204" pitchFamily="34" charset="0"/>
-                <a:cs typeface="Arial" panose="020B0604020202020204" pitchFamily="34" charset="0"/>
-              </a:rPr>
-              <a:t>Configuración de </a:t>
-            </a:r>
-            <a:r>
-              <a:rPr lang="es-MX" dirty="0" err="1">
-                <a:latin typeface="Arial" panose="020B0604020202020204" pitchFamily="34" charset="0"/>
-                <a:cs typeface="Arial" panose="020B0604020202020204" pitchFamily="34" charset="0"/>
-              </a:rPr>
-              <a:t>QoS</a:t>
-            </a:r>
-            <a:endParaRPr lang="es-MX" dirty="0">
-              <a:latin typeface="Arial" panose="020B0604020202020204" pitchFamily="34" charset="0"/>
-              <a:cs typeface="Arial" panose="020B0604020202020204" pitchFamily="34" charset="0"/>
-            </a:endParaRPr>
-          </a:p>
-        </p:txBody>
-      </p:sp>
-      <p:sp>
-        <p:nvSpPr>
-          <p:cNvPr id="3078" name="Text Box 6"/>
-          <p:cNvSpPr txBox="1">
-            <a:spLocks noChangeArrowheads="1"/>
-          </p:cNvSpPr>
-          <p:nvPr/>
-        </p:nvSpPr>
-        <p:spPr bwMode="auto">
-          <a:xfrm>
-            <a:off x="792025" y="692696"/>
-            <a:ext cx="7539037" cy="584775"/>
-          </a:xfrm>
-          <a:prstGeom prst="rect">
-            <a:avLst/>
-          </a:prstGeom>
-          <a:noFill/>
-          <a:ln>
-            <a:noFill/>
-          </a:ln>
-          <a:extLst>
-            <a:ext uri="{909E8E84-426E-40DD-AFC4-6F175D3DCCD1}">
-              <a14:hiddenFill xmlns:a14="http://schemas.microsoft.com/office/drawing/2010/main">
-                <a:solidFill>
-                  <a:srgbClr val="FFFFFF"/>
-                </a:solidFill>
-              </a14:hiddenFill>
-            </a:ext>
-            <a:ext uri="{91240B29-F687-4F45-9708-019B960494DF}">
-              <a14:hiddenLine xmlns:a14="http://schemas.microsoft.com/office/drawing/2010/main" w="9525">
-                <a:solidFill>
-                  <a:srgbClr val="000000"/>
-                </a:solidFill>
-                <a:miter lim="800000"/>
-                <a:headEnd/>
-                <a:tailEnd/>
-              </a14:hiddenLine>
-            </a:ext>
-          </a:extLst>
-        </p:spPr>
-        <p:txBody>
-          <a:bodyPr wrap="square">
-            <a:spAutoFit/>
-          </a:bodyPr>
-          <a:lstStyle>
-            <a:lvl1pPr>
-              <a:defRPr sz="1600">
-                <a:solidFill>
-                  <a:schemeClr val="tx1"/>
-                </a:solidFill>
-                <a:latin typeface="Times New Roman" pitchFamily="18" charset="0"/>
-              </a:defRPr>
-            </a:lvl1pPr>
-            <a:lvl2pPr marL="742950" indent="-285750">
-              <a:defRPr sz="1600">
-                <a:solidFill>
-                  <a:schemeClr val="tx1"/>
-                </a:solidFill>
-                <a:latin typeface="Times New Roman" pitchFamily="18" charset="0"/>
-              </a:defRPr>
-            </a:lvl2pPr>
-            <a:lvl3pPr marL="1143000" indent="-228600">
-              <a:defRPr sz="1600">
-                <a:solidFill>
-                  <a:schemeClr val="tx1"/>
-                </a:solidFill>
-                <a:latin typeface="Times New Roman" pitchFamily="18" charset="0"/>
-              </a:defRPr>
-            </a:lvl3pPr>
-            <a:lvl4pPr marL="1600200" indent="-228600">
-              <a:defRPr sz="1600">
-                <a:solidFill>
-                  <a:schemeClr val="tx1"/>
-                </a:solidFill>
-                <a:latin typeface="Times New Roman" pitchFamily="18" charset="0"/>
-              </a:defRPr>
-            </a:lvl4pPr>
-            <a:lvl5pPr marL="2057400" indent="-228600">
-              <a:defRPr sz="1600">
-                <a:solidFill>
-                  <a:schemeClr val="tx1"/>
-                </a:solidFill>
-                <a:latin typeface="Times New Roman" pitchFamily="18" charset="0"/>
-              </a:defRPr>
-            </a:lvl5pPr>
-            <a:lvl6pPr marL="2514600" indent="-228600" eaLnBrk="0" fontAlgn="base" hangingPunct="0">
-              <a:spcBef>
-                <a:spcPct val="0"/>
-              </a:spcBef>
-              <a:spcAft>
-                <a:spcPct val="0"/>
-              </a:spcAft>
-              <a:defRPr sz="1600">
-                <a:solidFill>
-                  <a:schemeClr val="tx1"/>
-                </a:solidFill>
-                <a:latin typeface="Times New Roman" pitchFamily="18" charset="0"/>
-              </a:defRPr>
-            </a:lvl6pPr>
-            <a:lvl7pPr marL="2971800" indent="-228600" eaLnBrk="0" fontAlgn="base" hangingPunct="0">
-              <a:spcBef>
-                <a:spcPct val="0"/>
-              </a:spcBef>
-              <a:spcAft>
-                <a:spcPct val="0"/>
-              </a:spcAft>
-              <a:defRPr sz="1600">
-                <a:solidFill>
-                  <a:schemeClr val="tx1"/>
-                </a:solidFill>
-                <a:latin typeface="Times New Roman" pitchFamily="18" charset="0"/>
-              </a:defRPr>
-            </a:lvl7pPr>
-            <a:lvl8pPr marL="3429000" indent="-228600" eaLnBrk="0" fontAlgn="base" hangingPunct="0">
-              <a:spcBef>
-                <a:spcPct val="0"/>
-              </a:spcBef>
-              <a:spcAft>
-                <a:spcPct val="0"/>
-              </a:spcAft>
-              <a:defRPr sz="1600">
-                <a:solidFill>
-                  <a:schemeClr val="tx1"/>
-                </a:solidFill>
-                <a:latin typeface="Times New Roman" pitchFamily="18" charset="0"/>
-              </a:defRPr>
-            </a:lvl8pPr>
-            <a:lvl9pPr marL="3886200" indent="-228600" eaLnBrk="0" fontAlgn="base" hangingPunct="0">
-              <a:spcBef>
-                <a:spcPct val="0"/>
-              </a:spcBef>
-              <a:spcAft>
-                <a:spcPct val="0"/>
-              </a:spcAft>
-              <a:defRPr sz="1600">
-                <a:solidFill>
-                  <a:schemeClr val="tx1"/>
-                </a:solidFill>
-                <a:latin typeface="Times New Roman" pitchFamily="18" charset="0"/>
-              </a:defRPr>
-            </a:lvl9pPr>
-          </a:lstStyle>
-          <a:p>
-            <a:pPr algn="ctr">
-              <a:spcBef>
-                <a:spcPct val="50000"/>
-              </a:spcBef>
-            </a:pPr>
-            <a:r>
-              <a:rPr lang="es-MX" sz="3200" b="1" dirty="0">
-                <a:solidFill>
-                  <a:schemeClr val="accent4">
-                    <a:lumMod val="50000"/>
-                  </a:schemeClr>
-                </a:solidFill>
-                <a:effectLst>
-                  <a:outerShdw blurRad="38100" dist="38100" dir="2700000" algn="tl">
-                    <a:srgbClr val="C0C0C0"/>
-                  </a:outerShdw>
-                </a:effectLst>
-                <a:latin typeface="Dom Casual" charset="0"/>
-                <a:ea typeface="+mj-ea"/>
-                <a:cs typeface="+mj-cs"/>
-              </a:rPr>
-              <a:t>Agenda de esta sesión</a:t>
-            </a:r>
-          </a:p>
-        </p:txBody>
-      </p:sp>
-    </p:spTree>
-    <p:extLst>
-      <p:ext uri="{BB962C8B-B14F-4D97-AF65-F5344CB8AC3E}">
-        <p14:creationId xmlns:p14="http://schemas.microsoft.com/office/powerpoint/2010/main" val="1009664677"/>
-      </p:ext>
-    </p:extLst>
-  </p:cSld>
-  <p:clrMapOvr>
-    <a:masterClrMapping/>
-  </p:clrMapOvr>
-  <p:transition/>
-  <p:timing>
-    <p:tnLst>
-      <p:par>
-        <p:cTn id="1" dur="indefinite" restart="never" nodeType="tmRoot">
-          <p:childTnLst>
-            <p:seq concurrent="1" nextAc="seek">
-              <p:cTn id="2" dur="indefinite" nodeType="mainSeq">
-                <p:childTnLst>
-                  <p:par>
-                    <p:cTn id="3" fill="hold" nodeType="clickPar">
-                      <p:stCondLst>
-                        <p:cond delay="indefinite"/>
-                      </p:stCondLst>
-                      <p:childTnLst>
-                        <p:par>
-                          <p:cTn id="4" fill="hold" nodeType="withGroup">
-                            <p:stCondLst>
-                              <p:cond delay="0"/>
-                            </p:stCondLst>
-                            <p:childTnLst>
-                              <p:par>
-                                <p:cTn id="5" presetID="4" presetClass="entr" presetSubtype="16" fill="hold" grpId="0" nodeType="clickEffect">
-                                  <p:stCondLst>
-                                    <p:cond delay="0"/>
-                                  </p:stCondLst>
-                                  <p:childTnLst>
-                                    <p:set>
-                                      <p:cBhvr>
-                                        <p:cTn id="6" dur="1" fill="hold">
-                                          <p:stCondLst>
-                                            <p:cond delay="0"/>
-                                          </p:stCondLst>
-                                        </p:cTn>
-                                        <p:tgtEl>
-                                          <p:spTgt spid="26629"/>
-                                        </p:tgtEl>
-                                        <p:attrNameLst>
-                                          <p:attrName>style.visibility</p:attrName>
-                                        </p:attrNameLst>
-                                      </p:cBhvr>
-                                      <p:to>
-                                        <p:strVal val="visible"/>
-                                      </p:to>
-                                    </p:set>
-                                    <p:animEffect transition="in" filter="box(in)">
-                                      <p:cBhvr>
-                                        <p:cTn id="7" dur="500"/>
-                                        <p:tgtEl>
-                                          <p:spTgt spid="26629"/>
-                                        </p:tgtEl>
-                                      </p:cBhvr>
-                                    </p:animEffect>
-                                  </p:childTnLst>
-                                </p:cTn>
-                              </p:par>
-                            </p:childTnLst>
-                          </p:cTn>
-                        </p:par>
-                      </p:childTnLst>
-                    </p:cTn>
-                  </p:par>
-                </p:childTnLst>
-              </p:cTn>
-              <p:prevCondLst>
-                <p:cond evt="onPrev" delay="0">
-                  <p:tgtEl>
-                    <p:sldTgt/>
-                  </p:tgtEl>
-                </p:cond>
-              </p:prevCondLst>
-              <p:nextCondLst>
-                <p:cond evt="onNext" delay="0">
-                  <p:tgtEl>
-                    <p:sldTgt/>
-                  </p:tgtEl>
-                </p:cond>
-              </p:nextCondLst>
-            </p:seq>
-          </p:childTnLst>
-        </p:cTn>
-      </p:par>
-    </p:tnLst>
-    <p:bldLst>
-      <p:bldP spid="26629" grpId="0"/>
-    </p:bldLst>
-  </p:timing>
-</p:sld>
-</file>
-
-<file path=ppt/slides/slide20.xml><?xml version="1.0" encoding="utf-8"?>
-<p:sld xmlns:a="http://schemas.openxmlformats.org/drawingml/2006/main" xmlns:r="http://schemas.openxmlformats.org/officeDocument/2006/relationships" xmlns:p="http://schemas.openxmlformats.org/presentationml/2006/main">
-  <p:cSld>
-    <p:spTree>
-      <p:nvGrpSpPr>
-        <p:cNvPr id="1" name=""/>
-        <p:cNvGrpSpPr/>
-        <p:nvPr/>
-      </p:nvGrpSpPr>
-      <p:grpSpPr>
-        <a:xfrm>
-          <a:off x="0" y="0"/>
-          <a:ext cx="0" cy="0"/>
-          <a:chOff x="0" y="0"/>
-          <a:chExt cx="0" cy="0"/>
-        </a:xfrm>
-      </p:grpSpPr>
-      <p:sp>
-        <p:nvSpPr>
-          <p:cNvPr id="2" name="Content Placeholder 1"/>
-          <p:cNvSpPr>
-            <a:spLocks noGrp="1"/>
-          </p:cNvSpPr>
-          <p:nvPr>
-            <p:ph idx="1"/>
-          </p:nvPr>
-        </p:nvSpPr>
-        <p:spPr>
-          <a:xfrm>
-            <a:off x="107503" y="1268760"/>
-            <a:ext cx="8533061" cy="1512167"/>
-          </a:xfrm>
-        </p:spPr>
-        <p:txBody>
-          <a:bodyPr/>
-          <a:lstStyle/>
-          <a:p>
-            <a:pPr indent="0" algn="just">
-              <a:lnSpc>
-                <a:spcPct val="150000"/>
-              </a:lnSpc>
-              <a:spcBef>
-                <a:spcPts val="0"/>
-              </a:spcBef>
-            </a:pPr>
-            <a:r>
-              <a:rPr lang="es-ES" sz="1800" dirty="0">
-                <a:solidFill>
-                  <a:schemeClr val="tx1">
-                    <a:lumMod val="95000"/>
-                    <a:lumOff val="5000"/>
-                  </a:schemeClr>
-                </a:solidFill>
-                <a:latin typeface="Arial" panose="020B0604020202020204" pitchFamily="34" charset="0"/>
-                <a:cs typeface="Arial" panose="020B0604020202020204" pitchFamily="34" charset="0"/>
-              </a:rPr>
-              <a:t>Entonces, como podemos observar, la cola para su interfaz </a:t>
-            </a:r>
-            <a:r>
-              <a:rPr lang="es-ES" sz="1800" b="1" dirty="0">
-                <a:solidFill>
-                  <a:schemeClr val="tx1">
-                    <a:lumMod val="95000"/>
-                    <a:lumOff val="5000"/>
-                  </a:schemeClr>
-                </a:solidFill>
-                <a:latin typeface="Arial" panose="020B0604020202020204" pitchFamily="34" charset="0"/>
-                <a:cs typeface="Arial" panose="020B0604020202020204" pitchFamily="34" charset="0"/>
-              </a:rPr>
-              <a:t>G0/2</a:t>
-            </a:r>
-            <a:r>
-              <a:rPr lang="es-ES" sz="1800" dirty="0">
-                <a:solidFill>
-                  <a:schemeClr val="tx1">
-                    <a:lumMod val="95000"/>
-                    <a:lumOff val="5000"/>
-                  </a:schemeClr>
-                </a:solidFill>
-                <a:latin typeface="Arial" panose="020B0604020202020204" pitchFamily="34" charset="0"/>
-                <a:cs typeface="Arial" panose="020B0604020202020204" pitchFamily="34" charset="0"/>
-              </a:rPr>
-              <a:t> comienza a llenarse. </a:t>
-            </a:r>
-          </a:p>
-        </p:txBody>
-      </p:sp>
-      <p:sp>
-        <p:nvSpPr>
-          <p:cNvPr id="4" name="Rectangle 5">
-            <a:extLst>
-              <a:ext uri="{FF2B5EF4-FFF2-40B4-BE49-F238E27FC236}">
-                <a16:creationId xmlns:a16="http://schemas.microsoft.com/office/drawing/2014/main" id="{BD2FAA3E-64BB-4FFB-46CC-02579F1E62D9}"/>
-              </a:ext>
-            </a:extLst>
-          </p:cNvPr>
-          <p:cNvSpPr txBox="1">
-            <a:spLocks noChangeArrowheads="1"/>
-          </p:cNvSpPr>
-          <p:nvPr/>
-        </p:nvSpPr>
-        <p:spPr bwMode="auto">
-          <a:xfrm>
-            <a:off x="1028700" y="37721"/>
-            <a:ext cx="7086600" cy="1143000"/>
-          </a:xfrm>
-          <a:prstGeom prst="rect">
-            <a:avLst/>
-          </a:prstGeom>
-          <a:noFill/>
-          <a:ln>
-            <a:noFill/>
-          </a:ln>
-          <a:extLst>
-            <a:ext uri="{909E8E84-426E-40DD-AFC4-6F175D3DCCD1}">
-              <a14:hiddenFill xmlns:a14="http://schemas.microsoft.com/office/drawing/2010/main">
-                <a:solidFill>
-                  <a:srgbClr val="FFFFFF"/>
-                </a:solidFill>
-              </a14:hiddenFill>
-            </a:ext>
-            <a:ext uri="{91240B29-F687-4F45-9708-019B960494DF}">
-              <a14:hiddenLine xmlns:a14="http://schemas.microsoft.com/office/drawing/2010/main" w="9525">
-                <a:solidFill>
-                  <a:srgbClr val="000000"/>
-                </a:solidFill>
-                <a:miter lim="800000"/>
-                <a:headEnd/>
-                <a:tailEnd/>
-              </a14:hiddenLine>
-            </a:ext>
-          </a:extLst>
-        </p:spPr>
-        <p:txBody>
-          <a:bodyPr vert="horz" lIns="91440" tIns="45720" rIns="91440" bIns="45720" rtlCol="0" anchor="ctr">
-            <a:normAutofit/>
-          </a:bodyPr>
-          <a:lstStyle>
-            <a:lvl1pPr algn="ctr" defTabSz="914400" rtl="0" eaLnBrk="1" latinLnBrk="0" hangingPunct="1">
-              <a:spcBef>
-                <a:spcPct val="0"/>
-              </a:spcBef>
-              <a:buNone/>
-              <a:defRPr sz="4400" kern="1200">
-                <a:solidFill>
-                  <a:srgbClr val="004C69"/>
-                </a:solidFill>
-                <a:latin typeface="+mj-lt"/>
-                <a:ea typeface="+mj-ea"/>
-                <a:cs typeface="+mj-cs"/>
-              </a:defRPr>
-            </a:lvl1pPr>
-          </a:lstStyle>
-          <a:p>
-            <a:pPr>
-              <a:spcBef>
-                <a:spcPts val="0"/>
-              </a:spcBef>
-            </a:pPr>
-            <a:r>
-              <a:rPr lang="es-ES_tradnl" altLang="es-MX" sz="3200" b="1" dirty="0" err="1">
-                <a:solidFill>
-                  <a:schemeClr val="accent4">
-                    <a:lumMod val="50000"/>
-                  </a:schemeClr>
-                </a:solidFill>
-                <a:effectLst>
-                  <a:outerShdw blurRad="38100" dist="38100" dir="2700000" algn="tl">
-                    <a:srgbClr val="C0C0C0"/>
-                  </a:outerShdw>
-                </a:effectLst>
-                <a:latin typeface="Dom Casual" charset="0"/>
-              </a:rPr>
-              <a:t>Quality</a:t>
-            </a:r>
-            <a:r>
-              <a:rPr lang="es-ES_tradnl" altLang="es-MX" sz="3200" b="1" dirty="0">
-                <a:solidFill>
-                  <a:schemeClr val="accent4">
-                    <a:lumMod val="50000"/>
-                  </a:schemeClr>
-                </a:solidFill>
-                <a:effectLst>
-                  <a:outerShdw blurRad="38100" dist="38100" dir="2700000" algn="tl">
-                    <a:srgbClr val="C0C0C0"/>
-                  </a:outerShdw>
-                </a:effectLst>
-                <a:latin typeface="Dom Casual" charset="0"/>
-              </a:rPr>
-              <a:t> </a:t>
-            </a:r>
-            <a:r>
-              <a:rPr lang="es-ES_tradnl" altLang="es-MX" sz="3200" b="1" dirty="0" err="1">
-                <a:solidFill>
-                  <a:schemeClr val="accent4">
-                    <a:lumMod val="50000"/>
-                  </a:schemeClr>
-                </a:solidFill>
-                <a:effectLst>
-                  <a:outerShdw blurRad="38100" dist="38100" dir="2700000" algn="tl">
-                    <a:srgbClr val="C0C0C0"/>
-                  </a:outerShdw>
-                </a:effectLst>
-                <a:latin typeface="Dom Casual" charset="0"/>
-              </a:rPr>
-              <a:t>of</a:t>
-            </a:r>
-            <a:r>
-              <a:rPr lang="es-ES_tradnl" altLang="es-MX" sz="3200" b="1" dirty="0">
-                <a:solidFill>
-                  <a:schemeClr val="accent4">
-                    <a:lumMod val="50000"/>
-                  </a:schemeClr>
-                </a:solidFill>
-                <a:effectLst>
-                  <a:outerShdw blurRad="38100" dist="38100" dir="2700000" algn="tl">
-                    <a:srgbClr val="C0C0C0"/>
-                  </a:outerShdw>
-                </a:effectLst>
-                <a:latin typeface="Dom Casual" charset="0"/>
-              </a:rPr>
-              <a:t> </a:t>
-            </a:r>
-            <a:r>
-              <a:rPr lang="es-ES_tradnl" altLang="es-MX" sz="3200" b="1" dirty="0" err="1">
-                <a:solidFill>
-                  <a:schemeClr val="accent4">
-                    <a:lumMod val="50000"/>
-                  </a:schemeClr>
-                </a:solidFill>
-                <a:effectLst>
-                  <a:outerShdw blurRad="38100" dist="38100" dir="2700000" algn="tl">
-                    <a:srgbClr val="C0C0C0"/>
-                  </a:outerShdw>
-                </a:effectLst>
-                <a:latin typeface="Dom Casual" charset="0"/>
-              </a:rPr>
-              <a:t>service</a:t>
-            </a:r>
-            <a:r>
-              <a:rPr lang="es-ES_tradnl" altLang="es-MX" sz="3200" b="1" dirty="0">
-                <a:solidFill>
-                  <a:schemeClr val="accent4">
-                    <a:lumMod val="50000"/>
-                  </a:schemeClr>
-                </a:solidFill>
-                <a:effectLst>
-                  <a:outerShdw blurRad="38100" dist="38100" dir="2700000" algn="tl">
-                    <a:srgbClr val="C0C0C0"/>
-                  </a:outerShdw>
-                </a:effectLst>
-                <a:latin typeface="Dom Casual" charset="0"/>
-              </a:rPr>
-              <a:t> (</a:t>
-            </a:r>
-            <a:r>
-              <a:rPr lang="es-ES_tradnl" altLang="es-MX" sz="3200" b="1" dirty="0" err="1">
-                <a:solidFill>
-                  <a:schemeClr val="accent4">
-                    <a:lumMod val="50000"/>
-                  </a:schemeClr>
-                </a:solidFill>
-                <a:effectLst>
-                  <a:outerShdw blurRad="38100" dist="38100" dir="2700000" algn="tl">
-                    <a:srgbClr val="C0C0C0"/>
-                  </a:outerShdw>
-                </a:effectLst>
-                <a:latin typeface="Dom Casual" charset="0"/>
-              </a:rPr>
-              <a:t>QoS</a:t>
-            </a:r>
-            <a:r>
-              <a:rPr lang="es-ES_tradnl" altLang="es-MX" sz="3200" b="1" dirty="0">
-                <a:solidFill>
-                  <a:schemeClr val="accent4">
-                    <a:lumMod val="50000"/>
-                  </a:schemeClr>
-                </a:solidFill>
-                <a:effectLst>
-                  <a:outerShdw blurRad="38100" dist="38100" dir="2700000" algn="tl">
-                    <a:srgbClr val="C0C0C0"/>
-                  </a:outerShdw>
-                </a:effectLst>
-                <a:latin typeface="Dom Casual" charset="0"/>
-              </a:rPr>
-              <a:t>)</a:t>
-            </a:r>
-          </a:p>
-          <a:p>
-            <a:pPr>
-              <a:spcBef>
-                <a:spcPts val="0"/>
-              </a:spcBef>
-            </a:pPr>
-            <a:r>
-              <a:rPr lang="es-ES_tradnl" altLang="es-MX" sz="1800" b="1" dirty="0" err="1">
-                <a:solidFill>
-                  <a:schemeClr val="accent3">
-                    <a:lumMod val="75000"/>
-                  </a:schemeClr>
-                </a:solidFill>
-                <a:latin typeface="Dom Casual" charset="0"/>
-              </a:rPr>
-              <a:t>Queuing</a:t>
-            </a:r>
-            <a:r>
-              <a:rPr lang="es-ES_tradnl" altLang="es-MX" sz="1800" b="1" dirty="0">
-                <a:solidFill>
-                  <a:schemeClr val="accent3">
-                    <a:lumMod val="75000"/>
-                  </a:schemeClr>
-                </a:solidFill>
-                <a:latin typeface="Dom Casual" charset="0"/>
-              </a:rPr>
-              <a:t> – Haciendo fila - Encolamiento</a:t>
-            </a:r>
-          </a:p>
-        </p:txBody>
-      </p:sp>
-      <p:pic>
-        <p:nvPicPr>
-          <p:cNvPr id="8" name="Imagen 7">
-            <a:extLst>
-              <a:ext uri="{FF2B5EF4-FFF2-40B4-BE49-F238E27FC236}">
-                <a16:creationId xmlns:a16="http://schemas.microsoft.com/office/drawing/2014/main" id="{AF549197-CD5A-CE6A-0AC6-3BADF1053C0B}"/>
-              </a:ext>
-            </a:extLst>
-          </p:cNvPr>
-          <p:cNvPicPr>
-            <a:picLocks noChangeAspect="1"/>
-          </p:cNvPicPr>
-          <p:nvPr/>
-        </p:nvPicPr>
-        <p:blipFill>
-          <a:blip r:embed="rId3"/>
-          <a:stretch>
-            <a:fillRect/>
-          </a:stretch>
-        </p:blipFill>
-        <p:spPr>
-          <a:xfrm>
-            <a:off x="305469" y="2212587"/>
-            <a:ext cx="8533061" cy="4607692"/>
-          </a:xfrm>
-          <a:prstGeom prst="rect">
-            <a:avLst/>
-          </a:prstGeom>
-        </p:spPr>
-      </p:pic>
-    </p:spTree>
-    <p:extLst>
-      <p:ext uri="{BB962C8B-B14F-4D97-AF65-F5344CB8AC3E}">
-        <p14:creationId xmlns:p14="http://schemas.microsoft.com/office/powerpoint/2010/main" val="2520040483"/>
-      </p:ext>
-    </p:extLst>
-  </p:cSld>
-  <p:clrMapOvr>
-    <a:masterClrMapping/>
-  </p:clrMapOvr>
-  <mc:AlternateContent xmlns:mc="http://schemas.openxmlformats.org/markup-compatibility/2006" xmlns:p14="http://schemas.microsoft.com/office/powerpoint/2010/main">
-    <mc:Choice Requires="p14">
-      <p:transition spd="med" p14:dur="700">
-        <p:fade/>
-      </p:transition>
-    </mc:Choice>
-    <mc:Fallback xmlns="">
-      <p:transition xmlns:p14="http://schemas.microsoft.com/office/powerpoint/2010/main" spd="med">
-        <p:fade/>
-      </p:transition>
-    </mc:Fallback>
-  </mc:AlternateContent>
-</p:sld>
-</file>
-
-<file path=ppt/slides/slide21.xml><?xml version="1.0" encoding="utf-8"?>
-<p:sld xmlns:a="http://schemas.openxmlformats.org/drawingml/2006/main" xmlns:r="http://schemas.openxmlformats.org/officeDocument/2006/relationships" xmlns:p="http://schemas.openxmlformats.org/presentationml/2006/main">
-  <p:cSld>
-    <p:spTree>
-      <p:nvGrpSpPr>
-        <p:cNvPr id="1" name=""/>
-        <p:cNvGrpSpPr/>
-        <p:nvPr/>
-      </p:nvGrpSpPr>
-      <p:grpSpPr>
-        <a:xfrm>
-          <a:off x="0" y="0"/>
-          <a:ext cx="0" cy="0"/>
-          <a:chOff x="0" y="0"/>
-          <a:chExt cx="0" cy="0"/>
-        </a:xfrm>
-      </p:grpSpPr>
-      <p:sp>
-        <p:nvSpPr>
-          <p:cNvPr id="2" name="Content Placeholder 1"/>
-          <p:cNvSpPr>
-            <a:spLocks noGrp="1"/>
-          </p:cNvSpPr>
-          <p:nvPr>
-            <p:ph idx="1"/>
-          </p:nvPr>
-        </p:nvSpPr>
-        <p:spPr>
-          <a:xfrm>
-            <a:off x="4688" y="1171097"/>
-            <a:ext cx="8671768" cy="2016224"/>
-          </a:xfrm>
-        </p:spPr>
-        <p:txBody>
-          <a:bodyPr/>
-          <a:lstStyle/>
-          <a:p>
-            <a:pPr indent="0" algn="just">
-              <a:lnSpc>
-                <a:spcPct val="150000"/>
-              </a:lnSpc>
-              <a:spcBef>
-                <a:spcPts val="0"/>
-              </a:spcBef>
-            </a:pPr>
-            <a:r>
-              <a:rPr lang="es-ES" sz="1800" dirty="0">
-                <a:solidFill>
-                  <a:schemeClr val="tx1">
-                    <a:lumMod val="95000"/>
-                    <a:lumOff val="5000"/>
-                  </a:schemeClr>
-                </a:solidFill>
-                <a:latin typeface="Arial" panose="020B0604020202020204" pitchFamily="34" charset="0"/>
-                <a:cs typeface="Arial" panose="020B0604020202020204" pitchFamily="34" charset="0"/>
-              </a:rPr>
-              <a:t>Por default, los mensajes en cola se reenviarán de forma </a:t>
-            </a:r>
-            <a:r>
-              <a:rPr lang="es-ES" sz="1800" b="1" dirty="0">
-                <a:solidFill>
-                  <a:schemeClr val="accent6">
-                    <a:lumMod val="75000"/>
-                  </a:schemeClr>
-                </a:solidFill>
-                <a:latin typeface="Arial" panose="020B0604020202020204" pitchFamily="34" charset="0"/>
-                <a:cs typeface="Arial" panose="020B0604020202020204" pitchFamily="34" charset="0"/>
-              </a:rPr>
-              <a:t>FIFO (primero en entrar, primero en salir)</a:t>
-            </a:r>
-            <a:r>
-              <a:rPr lang="es-ES" sz="1800" dirty="0">
-                <a:solidFill>
-                  <a:schemeClr val="tx1">
-                    <a:lumMod val="95000"/>
-                    <a:lumOff val="5000"/>
-                  </a:schemeClr>
-                </a:solidFill>
-                <a:latin typeface="Arial" panose="020B0604020202020204" pitchFamily="34" charset="0"/>
-                <a:cs typeface="Arial" panose="020B0604020202020204" pitchFamily="34" charset="0"/>
-              </a:rPr>
-              <a:t>. Lo que eso significa es que los mensajes se enviarán en el orden en que se reciben. </a:t>
-            </a:r>
-            <a:r>
-              <a:rPr lang="es-ES" sz="1800" dirty="0">
-                <a:solidFill>
-                  <a:schemeClr val="accent6">
-                    <a:lumMod val="75000"/>
-                  </a:schemeClr>
-                </a:solidFill>
-                <a:latin typeface="Arial" panose="020B0604020202020204" pitchFamily="34" charset="0"/>
-                <a:cs typeface="Arial" panose="020B0604020202020204" pitchFamily="34" charset="0"/>
-              </a:rPr>
-              <a:t>No se da un tratamiento especial a ningún tipo de tráfico.</a:t>
-            </a:r>
-          </a:p>
-        </p:txBody>
-      </p:sp>
-      <p:sp>
-        <p:nvSpPr>
-          <p:cNvPr id="4" name="Rectangle 5">
-            <a:extLst>
-              <a:ext uri="{FF2B5EF4-FFF2-40B4-BE49-F238E27FC236}">
-                <a16:creationId xmlns:a16="http://schemas.microsoft.com/office/drawing/2014/main" id="{BD2FAA3E-64BB-4FFB-46CC-02579F1E62D9}"/>
-              </a:ext>
-            </a:extLst>
-          </p:cNvPr>
-          <p:cNvSpPr txBox="1">
-            <a:spLocks noChangeArrowheads="1"/>
-          </p:cNvSpPr>
-          <p:nvPr/>
-        </p:nvSpPr>
-        <p:spPr bwMode="auto">
-          <a:xfrm>
-            <a:off x="1028700" y="37721"/>
-            <a:ext cx="7086600" cy="1143000"/>
-          </a:xfrm>
-          <a:prstGeom prst="rect">
-            <a:avLst/>
-          </a:prstGeom>
-          <a:noFill/>
-          <a:ln>
-            <a:noFill/>
-          </a:ln>
-          <a:extLst>
-            <a:ext uri="{909E8E84-426E-40DD-AFC4-6F175D3DCCD1}">
-              <a14:hiddenFill xmlns:a14="http://schemas.microsoft.com/office/drawing/2010/main">
-                <a:solidFill>
-                  <a:srgbClr val="FFFFFF"/>
-                </a:solidFill>
-              </a14:hiddenFill>
-            </a:ext>
-            <a:ext uri="{91240B29-F687-4F45-9708-019B960494DF}">
-              <a14:hiddenLine xmlns:a14="http://schemas.microsoft.com/office/drawing/2010/main" w="9525">
-                <a:solidFill>
-                  <a:srgbClr val="000000"/>
-                </a:solidFill>
-                <a:miter lim="800000"/>
-                <a:headEnd/>
-                <a:tailEnd/>
-              </a14:hiddenLine>
-            </a:ext>
-          </a:extLst>
-        </p:spPr>
-        <p:txBody>
-          <a:bodyPr vert="horz" lIns="91440" tIns="45720" rIns="91440" bIns="45720" rtlCol="0" anchor="ctr">
-            <a:normAutofit/>
-          </a:bodyPr>
-          <a:lstStyle>
-            <a:lvl1pPr algn="ctr" defTabSz="914400" rtl="0" eaLnBrk="1" latinLnBrk="0" hangingPunct="1">
-              <a:spcBef>
-                <a:spcPct val="0"/>
-              </a:spcBef>
-              <a:buNone/>
-              <a:defRPr sz="4400" kern="1200">
-                <a:solidFill>
-                  <a:srgbClr val="004C69"/>
-                </a:solidFill>
-                <a:latin typeface="+mj-lt"/>
-                <a:ea typeface="+mj-ea"/>
-                <a:cs typeface="+mj-cs"/>
-              </a:defRPr>
-            </a:lvl1pPr>
-          </a:lstStyle>
-          <a:p>
-            <a:pPr>
-              <a:spcBef>
-                <a:spcPts val="0"/>
-              </a:spcBef>
-            </a:pPr>
-            <a:r>
-              <a:rPr lang="es-ES_tradnl" altLang="es-MX" sz="3200" b="1" dirty="0" err="1">
-                <a:solidFill>
-                  <a:schemeClr val="accent4">
-                    <a:lumMod val="50000"/>
-                  </a:schemeClr>
-                </a:solidFill>
-                <a:effectLst>
-                  <a:outerShdw blurRad="38100" dist="38100" dir="2700000" algn="tl">
-                    <a:srgbClr val="C0C0C0"/>
-                  </a:outerShdw>
-                </a:effectLst>
-                <a:latin typeface="Dom Casual" charset="0"/>
-              </a:rPr>
-              <a:t>Quality</a:t>
-            </a:r>
-            <a:r>
-              <a:rPr lang="es-ES_tradnl" altLang="es-MX" sz="3200" b="1" dirty="0">
-                <a:solidFill>
-                  <a:schemeClr val="accent4">
-                    <a:lumMod val="50000"/>
-                  </a:schemeClr>
-                </a:solidFill>
-                <a:effectLst>
-                  <a:outerShdw blurRad="38100" dist="38100" dir="2700000" algn="tl">
-                    <a:srgbClr val="C0C0C0"/>
-                  </a:outerShdw>
-                </a:effectLst>
-                <a:latin typeface="Dom Casual" charset="0"/>
-              </a:rPr>
-              <a:t> </a:t>
-            </a:r>
-            <a:r>
-              <a:rPr lang="es-ES_tradnl" altLang="es-MX" sz="3200" b="1" dirty="0" err="1">
-                <a:solidFill>
-                  <a:schemeClr val="accent4">
-                    <a:lumMod val="50000"/>
-                  </a:schemeClr>
-                </a:solidFill>
-                <a:effectLst>
-                  <a:outerShdw blurRad="38100" dist="38100" dir="2700000" algn="tl">
-                    <a:srgbClr val="C0C0C0"/>
-                  </a:outerShdw>
-                </a:effectLst>
-                <a:latin typeface="Dom Casual" charset="0"/>
-              </a:rPr>
-              <a:t>of</a:t>
-            </a:r>
-            <a:r>
-              <a:rPr lang="es-ES_tradnl" altLang="es-MX" sz="3200" b="1" dirty="0">
-                <a:solidFill>
-                  <a:schemeClr val="accent4">
-                    <a:lumMod val="50000"/>
-                  </a:schemeClr>
-                </a:solidFill>
-                <a:effectLst>
-                  <a:outerShdw blurRad="38100" dist="38100" dir="2700000" algn="tl">
-                    <a:srgbClr val="C0C0C0"/>
-                  </a:outerShdw>
-                </a:effectLst>
-                <a:latin typeface="Dom Casual" charset="0"/>
-              </a:rPr>
-              <a:t> </a:t>
-            </a:r>
-            <a:r>
-              <a:rPr lang="es-ES_tradnl" altLang="es-MX" sz="3200" b="1" dirty="0" err="1">
-                <a:solidFill>
-                  <a:schemeClr val="accent4">
-                    <a:lumMod val="50000"/>
-                  </a:schemeClr>
-                </a:solidFill>
-                <a:effectLst>
-                  <a:outerShdw blurRad="38100" dist="38100" dir="2700000" algn="tl">
-                    <a:srgbClr val="C0C0C0"/>
-                  </a:outerShdw>
-                </a:effectLst>
-                <a:latin typeface="Dom Casual" charset="0"/>
-              </a:rPr>
-              <a:t>service</a:t>
-            </a:r>
-            <a:r>
-              <a:rPr lang="es-ES_tradnl" altLang="es-MX" sz="3200" b="1" dirty="0">
-                <a:solidFill>
-                  <a:schemeClr val="accent4">
-                    <a:lumMod val="50000"/>
-                  </a:schemeClr>
-                </a:solidFill>
-                <a:effectLst>
-                  <a:outerShdw blurRad="38100" dist="38100" dir="2700000" algn="tl">
-                    <a:srgbClr val="C0C0C0"/>
-                  </a:outerShdw>
-                </a:effectLst>
-                <a:latin typeface="Dom Casual" charset="0"/>
-              </a:rPr>
-              <a:t> (</a:t>
-            </a:r>
-            <a:r>
-              <a:rPr lang="es-ES_tradnl" altLang="es-MX" sz="3200" b="1" dirty="0" err="1">
-                <a:solidFill>
-                  <a:schemeClr val="accent4">
-                    <a:lumMod val="50000"/>
-                  </a:schemeClr>
-                </a:solidFill>
-                <a:effectLst>
-                  <a:outerShdw blurRad="38100" dist="38100" dir="2700000" algn="tl">
-                    <a:srgbClr val="C0C0C0"/>
-                  </a:outerShdw>
-                </a:effectLst>
-                <a:latin typeface="Dom Casual" charset="0"/>
-              </a:rPr>
-              <a:t>QoS</a:t>
-            </a:r>
-            <a:r>
-              <a:rPr lang="es-ES_tradnl" altLang="es-MX" sz="3200" b="1" dirty="0">
-                <a:solidFill>
-                  <a:schemeClr val="accent4">
-                    <a:lumMod val="50000"/>
-                  </a:schemeClr>
-                </a:solidFill>
-                <a:effectLst>
-                  <a:outerShdw blurRad="38100" dist="38100" dir="2700000" algn="tl">
-                    <a:srgbClr val="C0C0C0"/>
-                  </a:outerShdw>
-                </a:effectLst>
-                <a:latin typeface="Dom Casual" charset="0"/>
-              </a:rPr>
-              <a:t>)</a:t>
-            </a:r>
-          </a:p>
-          <a:p>
-            <a:pPr>
-              <a:spcBef>
-                <a:spcPts val="0"/>
-              </a:spcBef>
-            </a:pPr>
-            <a:r>
-              <a:rPr lang="es-ES_tradnl" altLang="es-MX" sz="1800" b="1" dirty="0" err="1">
-                <a:solidFill>
-                  <a:schemeClr val="accent3">
-                    <a:lumMod val="75000"/>
-                  </a:schemeClr>
-                </a:solidFill>
-                <a:latin typeface="Dom Casual" charset="0"/>
-              </a:rPr>
-              <a:t>Queuing</a:t>
-            </a:r>
-            <a:r>
-              <a:rPr lang="es-ES_tradnl" altLang="es-MX" sz="1800" b="1" dirty="0">
-                <a:solidFill>
-                  <a:schemeClr val="accent3">
-                    <a:lumMod val="75000"/>
-                  </a:schemeClr>
-                </a:solidFill>
-                <a:latin typeface="Dom Casual" charset="0"/>
-              </a:rPr>
-              <a:t> – Haciendo fila - Encolamiento</a:t>
-            </a:r>
-          </a:p>
-        </p:txBody>
-      </p:sp>
-      <p:pic>
-        <p:nvPicPr>
-          <p:cNvPr id="8" name="Imagen 7">
-            <a:extLst>
-              <a:ext uri="{FF2B5EF4-FFF2-40B4-BE49-F238E27FC236}">
-                <a16:creationId xmlns:a16="http://schemas.microsoft.com/office/drawing/2014/main" id="{AF549197-CD5A-CE6A-0AC6-3BADF1053C0B}"/>
-              </a:ext>
-            </a:extLst>
-          </p:cNvPr>
-          <p:cNvPicPr>
-            <a:picLocks noChangeAspect="1"/>
-          </p:cNvPicPr>
-          <p:nvPr/>
-        </p:nvPicPr>
-        <p:blipFill>
-          <a:blip r:embed="rId3"/>
-          <a:stretch>
-            <a:fillRect/>
-          </a:stretch>
-        </p:blipFill>
-        <p:spPr>
-          <a:xfrm>
-            <a:off x="1187624" y="2852936"/>
-            <a:ext cx="7103118" cy="3835550"/>
-          </a:xfrm>
-          <a:prstGeom prst="rect">
-            <a:avLst/>
-          </a:prstGeom>
-        </p:spPr>
-      </p:pic>
-    </p:spTree>
-    <p:extLst>
-      <p:ext uri="{BB962C8B-B14F-4D97-AF65-F5344CB8AC3E}">
-        <p14:creationId xmlns:p14="http://schemas.microsoft.com/office/powerpoint/2010/main" val="1158085153"/>
-      </p:ext>
-    </p:extLst>
-  </p:cSld>
-  <p:clrMapOvr>
-    <a:masterClrMapping/>
-  </p:clrMapOvr>
-  <mc:AlternateContent xmlns:mc="http://schemas.openxmlformats.org/markup-compatibility/2006" xmlns:p14="http://schemas.microsoft.com/office/powerpoint/2010/main">
-    <mc:Choice Requires="p14">
-      <p:transition spd="med" p14:dur="700">
-        <p:fade/>
-      </p:transition>
-    </mc:Choice>
-    <mc:Fallback xmlns="">
-      <p:transition xmlns:p14="http://schemas.microsoft.com/office/powerpoint/2010/main" spd="med">
-        <p:fade/>
-      </p:transition>
-    </mc:Fallback>
-  </mc:AlternateContent>
-</p:sld>
-</file>
-
-<file path=ppt/slides/slide22.xml><?xml version="1.0" encoding="utf-8"?>
-<p:sld xmlns:a="http://schemas.openxmlformats.org/drawingml/2006/main" xmlns:r="http://schemas.openxmlformats.org/officeDocument/2006/relationships" xmlns:p="http://schemas.openxmlformats.org/presentationml/2006/main">
-  <p:cSld>
-    <p:spTree>
-      <p:nvGrpSpPr>
-        <p:cNvPr id="1" name=""/>
-        <p:cNvGrpSpPr/>
-        <p:nvPr/>
-      </p:nvGrpSpPr>
-      <p:grpSpPr>
-        <a:xfrm>
-          <a:off x="0" y="0"/>
-          <a:ext cx="0" cy="0"/>
-          <a:chOff x="0" y="0"/>
-          <a:chExt cx="0" cy="0"/>
-        </a:xfrm>
-      </p:grpSpPr>
-      <p:sp>
-        <p:nvSpPr>
-          <p:cNvPr id="2" name="Content Placeholder 1"/>
-          <p:cNvSpPr>
-            <a:spLocks noGrp="1"/>
-          </p:cNvSpPr>
-          <p:nvPr>
-            <p:ph idx="1"/>
-          </p:nvPr>
-        </p:nvSpPr>
-        <p:spPr>
-          <a:xfrm>
-            <a:off x="4688" y="1171097"/>
-            <a:ext cx="8671768" cy="2016224"/>
-          </a:xfrm>
-        </p:spPr>
-        <p:txBody>
-          <a:bodyPr/>
-          <a:lstStyle/>
-          <a:p>
-            <a:pPr indent="0" algn="just">
-              <a:lnSpc>
-                <a:spcPct val="150000"/>
-              </a:lnSpc>
-              <a:spcBef>
-                <a:spcPts val="0"/>
-              </a:spcBef>
-            </a:pPr>
-            <a:r>
-              <a:rPr lang="es-ES" sz="1800" dirty="0">
-                <a:solidFill>
-                  <a:schemeClr val="tx1">
-                    <a:lumMod val="95000"/>
-                    <a:lumOff val="5000"/>
-                  </a:schemeClr>
-                </a:solidFill>
-                <a:latin typeface="Arial" panose="020B0604020202020204" pitchFamily="34" charset="0"/>
-                <a:cs typeface="Arial" panose="020B0604020202020204" pitchFamily="34" charset="0"/>
-              </a:rPr>
-              <a:t>¿Qué pasa si la cola se llena? El tráfico sigue llegando a G0/0 y G0/1 más rápido de lo que el ruteador puede reenviar los paquetes desde G0/2 y la cola se llena. Cuando esto sucede, se descartarán nuevos paquetes. Por lo tanto, si un nuevo paquete llega y debe reenviarse desde G0/2, pero la cola está llena, se descarta. </a:t>
-            </a:r>
-          </a:p>
-        </p:txBody>
-      </p:sp>
-      <p:sp>
-        <p:nvSpPr>
-          <p:cNvPr id="4" name="Rectangle 5">
-            <a:extLst>
-              <a:ext uri="{FF2B5EF4-FFF2-40B4-BE49-F238E27FC236}">
-                <a16:creationId xmlns:a16="http://schemas.microsoft.com/office/drawing/2014/main" id="{BD2FAA3E-64BB-4FFB-46CC-02579F1E62D9}"/>
-              </a:ext>
-            </a:extLst>
-          </p:cNvPr>
-          <p:cNvSpPr txBox="1">
-            <a:spLocks noChangeArrowheads="1"/>
-          </p:cNvSpPr>
-          <p:nvPr/>
-        </p:nvSpPr>
-        <p:spPr bwMode="auto">
-          <a:xfrm>
-            <a:off x="1028700" y="37721"/>
-            <a:ext cx="7086600" cy="1143000"/>
-          </a:xfrm>
-          <a:prstGeom prst="rect">
-            <a:avLst/>
-          </a:prstGeom>
-          <a:noFill/>
-          <a:ln>
-            <a:noFill/>
-          </a:ln>
-          <a:extLst>
-            <a:ext uri="{909E8E84-426E-40DD-AFC4-6F175D3DCCD1}">
-              <a14:hiddenFill xmlns:a14="http://schemas.microsoft.com/office/drawing/2010/main">
-                <a:solidFill>
-                  <a:srgbClr val="FFFFFF"/>
-                </a:solidFill>
-              </a14:hiddenFill>
-            </a:ext>
-            <a:ext uri="{91240B29-F687-4F45-9708-019B960494DF}">
-              <a14:hiddenLine xmlns:a14="http://schemas.microsoft.com/office/drawing/2010/main" w="9525">
-                <a:solidFill>
-                  <a:srgbClr val="000000"/>
-                </a:solidFill>
-                <a:miter lim="800000"/>
-                <a:headEnd/>
-                <a:tailEnd/>
-              </a14:hiddenLine>
-            </a:ext>
-          </a:extLst>
-        </p:spPr>
-        <p:txBody>
-          <a:bodyPr vert="horz" lIns="91440" tIns="45720" rIns="91440" bIns="45720" rtlCol="0" anchor="ctr">
-            <a:normAutofit/>
-          </a:bodyPr>
-          <a:lstStyle>
-            <a:lvl1pPr algn="ctr" defTabSz="914400" rtl="0" eaLnBrk="1" latinLnBrk="0" hangingPunct="1">
-              <a:spcBef>
-                <a:spcPct val="0"/>
-              </a:spcBef>
-              <a:buNone/>
-              <a:defRPr sz="4400" kern="1200">
-                <a:solidFill>
-                  <a:srgbClr val="004C69"/>
-                </a:solidFill>
-                <a:latin typeface="+mj-lt"/>
-                <a:ea typeface="+mj-ea"/>
-                <a:cs typeface="+mj-cs"/>
-              </a:defRPr>
-            </a:lvl1pPr>
-          </a:lstStyle>
-          <a:p>
-            <a:pPr>
-              <a:spcBef>
-                <a:spcPts val="0"/>
-              </a:spcBef>
-            </a:pPr>
-            <a:r>
-              <a:rPr lang="es-ES_tradnl" altLang="es-MX" sz="3200" b="1" dirty="0" err="1">
-                <a:solidFill>
-                  <a:schemeClr val="accent4">
-                    <a:lumMod val="50000"/>
-                  </a:schemeClr>
-                </a:solidFill>
-                <a:effectLst>
-                  <a:outerShdw blurRad="38100" dist="38100" dir="2700000" algn="tl">
-                    <a:srgbClr val="C0C0C0"/>
-                  </a:outerShdw>
-                </a:effectLst>
-                <a:latin typeface="Dom Casual" charset="0"/>
-              </a:rPr>
-              <a:t>Quality</a:t>
-            </a:r>
-            <a:r>
-              <a:rPr lang="es-ES_tradnl" altLang="es-MX" sz="3200" b="1" dirty="0">
-                <a:solidFill>
-                  <a:schemeClr val="accent4">
-                    <a:lumMod val="50000"/>
-                  </a:schemeClr>
-                </a:solidFill>
-                <a:effectLst>
-                  <a:outerShdw blurRad="38100" dist="38100" dir="2700000" algn="tl">
-                    <a:srgbClr val="C0C0C0"/>
-                  </a:outerShdw>
-                </a:effectLst>
-                <a:latin typeface="Dom Casual" charset="0"/>
-              </a:rPr>
-              <a:t> </a:t>
-            </a:r>
-            <a:r>
-              <a:rPr lang="es-ES_tradnl" altLang="es-MX" sz="3200" b="1" dirty="0" err="1">
-                <a:solidFill>
-                  <a:schemeClr val="accent4">
-                    <a:lumMod val="50000"/>
-                  </a:schemeClr>
-                </a:solidFill>
-                <a:effectLst>
-                  <a:outerShdw blurRad="38100" dist="38100" dir="2700000" algn="tl">
-                    <a:srgbClr val="C0C0C0"/>
-                  </a:outerShdw>
-                </a:effectLst>
-                <a:latin typeface="Dom Casual" charset="0"/>
-              </a:rPr>
-              <a:t>of</a:t>
-            </a:r>
-            <a:r>
-              <a:rPr lang="es-ES_tradnl" altLang="es-MX" sz="3200" b="1" dirty="0">
-                <a:solidFill>
-                  <a:schemeClr val="accent4">
-                    <a:lumMod val="50000"/>
-                  </a:schemeClr>
-                </a:solidFill>
-                <a:effectLst>
-                  <a:outerShdw blurRad="38100" dist="38100" dir="2700000" algn="tl">
-                    <a:srgbClr val="C0C0C0"/>
-                  </a:outerShdw>
-                </a:effectLst>
-                <a:latin typeface="Dom Casual" charset="0"/>
-              </a:rPr>
-              <a:t> </a:t>
-            </a:r>
-            <a:r>
-              <a:rPr lang="es-ES_tradnl" altLang="es-MX" sz="3200" b="1" dirty="0" err="1">
-                <a:solidFill>
-                  <a:schemeClr val="accent4">
-                    <a:lumMod val="50000"/>
-                  </a:schemeClr>
-                </a:solidFill>
-                <a:effectLst>
-                  <a:outerShdw blurRad="38100" dist="38100" dir="2700000" algn="tl">
-                    <a:srgbClr val="C0C0C0"/>
-                  </a:outerShdw>
-                </a:effectLst>
-                <a:latin typeface="Dom Casual" charset="0"/>
-              </a:rPr>
-              <a:t>service</a:t>
-            </a:r>
-            <a:r>
-              <a:rPr lang="es-ES_tradnl" altLang="es-MX" sz="3200" b="1" dirty="0">
-                <a:solidFill>
-                  <a:schemeClr val="accent4">
-                    <a:lumMod val="50000"/>
-                  </a:schemeClr>
-                </a:solidFill>
-                <a:effectLst>
-                  <a:outerShdw blurRad="38100" dist="38100" dir="2700000" algn="tl">
-                    <a:srgbClr val="C0C0C0"/>
-                  </a:outerShdw>
-                </a:effectLst>
-                <a:latin typeface="Dom Casual" charset="0"/>
-              </a:rPr>
-              <a:t> (</a:t>
-            </a:r>
-            <a:r>
-              <a:rPr lang="es-ES_tradnl" altLang="es-MX" sz="3200" b="1" dirty="0" err="1">
-                <a:solidFill>
-                  <a:schemeClr val="accent4">
-                    <a:lumMod val="50000"/>
-                  </a:schemeClr>
-                </a:solidFill>
-                <a:effectLst>
-                  <a:outerShdw blurRad="38100" dist="38100" dir="2700000" algn="tl">
-                    <a:srgbClr val="C0C0C0"/>
-                  </a:outerShdw>
-                </a:effectLst>
-                <a:latin typeface="Dom Casual" charset="0"/>
-              </a:rPr>
-              <a:t>QoS</a:t>
-            </a:r>
-            <a:r>
-              <a:rPr lang="es-ES_tradnl" altLang="es-MX" sz="3200" b="1" dirty="0">
-                <a:solidFill>
-                  <a:schemeClr val="accent4">
-                    <a:lumMod val="50000"/>
-                  </a:schemeClr>
-                </a:solidFill>
-                <a:effectLst>
-                  <a:outerShdw blurRad="38100" dist="38100" dir="2700000" algn="tl">
-                    <a:srgbClr val="C0C0C0"/>
-                  </a:outerShdw>
-                </a:effectLst>
-                <a:latin typeface="Dom Casual" charset="0"/>
-              </a:rPr>
-              <a:t>)</a:t>
-            </a:r>
-          </a:p>
-          <a:p>
-            <a:pPr>
-              <a:spcBef>
-                <a:spcPts val="0"/>
-              </a:spcBef>
-            </a:pPr>
-            <a:r>
-              <a:rPr lang="es-ES_tradnl" altLang="es-MX" sz="1800" b="1" dirty="0" err="1">
-                <a:solidFill>
-                  <a:schemeClr val="accent3">
-                    <a:lumMod val="75000"/>
-                  </a:schemeClr>
-                </a:solidFill>
-                <a:latin typeface="Dom Casual" charset="0"/>
-              </a:rPr>
-              <a:t>Queuing</a:t>
-            </a:r>
-            <a:r>
-              <a:rPr lang="es-ES_tradnl" altLang="es-MX" sz="1800" b="1" dirty="0">
-                <a:solidFill>
-                  <a:schemeClr val="accent3">
-                    <a:lumMod val="75000"/>
-                  </a:schemeClr>
-                </a:solidFill>
-                <a:latin typeface="Dom Casual" charset="0"/>
-              </a:rPr>
-              <a:t> – Haciendo fila - Encolamiento</a:t>
-            </a:r>
-          </a:p>
-        </p:txBody>
-      </p:sp>
-      <p:pic>
-        <p:nvPicPr>
-          <p:cNvPr id="5" name="Imagen 4">
-            <a:extLst>
-              <a:ext uri="{FF2B5EF4-FFF2-40B4-BE49-F238E27FC236}">
-                <a16:creationId xmlns:a16="http://schemas.microsoft.com/office/drawing/2014/main" id="{1B178AD4-9A3C-2563-1C51-CC145127A54D}"/>
-              </a:ext>
-            </a:extLst>
-          </p:cNvPr>
-          <p:cNvPicPr>
-            <a:picLocks noChangeAspect="1"/>
-          </p:cNvPicPr>
-          <p:nvPr/>
-        </p:nvPicPr>
-        <p:blipFill>
-          <a:blip r:embed="rId3"/>
-          <a:stretch>
-            <a:fillRect/>
-          </a:stretch>
-        </p:blipFill>
-        <p:spPr>
-          <a:xfrm>
-            <a:off x="1331640" y="3187321"/>
-            <a:ext cx="6984776" cy="3548345"/>
-          </a:xfrm>
-          <a:prstGeom prst="rect">
-            <a:avLst/>
-          </a:prstGeom>
-        </p:spPr>
-      </p:pic>
-    </p:spTree>
-    <p:extLst>
-      <p:ext uri="{BB962C8B-B14F-4D97-AF65-F5344CB8AC3E}">
-        <p14:creationId xmlns:p14="http://schemas.microsoft.com/office/powerpoint/2010/main" val="2146074444"/>
-      </p:ext>
-    </p:extLst>
-  </p:cSld>
-  <p:clrMapOvr>
-    <a:masterClrMapping/>
-  </p:clrMapOvr>
-  <mc:AlternateContent xmlns:mc="http://schemas.openxmlformats.org/markup-compatibility/2006" xmlns:p14="http://schemas.microsoft.com/office/powerpoint/2010/main">
-    <mc:Choice Requires="p14">
-      <p:transition spd="med" p14:dur="700">
-        <p:fade/>
-      </p:transition>
-    </mc:Choice>
-    <mc:Fallback xmlns="">
-      <p:transition xmlns:p14="http://schemas.microsoft.com/office/powerpoint/2010/main" spd="med">
-        <p:fade/>
-      </p:transition>
-    </mc:Fallback>
-  </mc:AlternateContent>
-</p:sld>
-</file>
-
-<file path=ppt/slides/slide23.xml><?xml version="1.0" encoding="utf-8"?>
-<p:sld xmlns:a="http://schemas.openxmlformats.org/drawingml/2006/main" xmlns:r="http://schemas.openxmlformats.org/officeDocument/2006/relationships" xmlns:p="http://schemas.openxmlformats.org/presentationml/2006/main">
-  <p:cSld>
-    <p:spTree>
-      <p:nvGrpSpPr>
-        <p:cNvPr id="1" name=""/>
-        <p:cNvGrpSpPr/>
-        <p:nvPr/>
-      </p:nvGrpSpPr>
-      <p:grpSpPr>
-        <a:xfrm>
-          <a:off x="0" y="0"/>
-          <a:ext cx="0" cy="0"/>
-          <a:chOff x="0" y="0"/>
-          <a:chExt cx="0" cy="0"/>
-        </a:xfrm>
-      </p:grpSpPr>
-      <p:sp>
-        <p:nvSpPr>
-          <p:cNvPr id="2" name="Content Placeholder 1"/>
-          <p:cNvSpPr>
-            <a:spLocks noGrp="1"/>
-          </p:cNvSpPr>
-          <p:nvPr>
-            <p:ph idx="1"/>
-          </p:nvPr>
-        </p:nvSpPr>
-        <p:spPr>
-          <a:xfrm>
-            <a:off x="746360" y="1556792"/>
-            <a:ext cx="7086600" cy="1033768"/>
-          </a:xfrm>
-        </p:spPr>
-        <p:txBody>
-          <a:bodyPr/>
-          <a:lstStyle/>
-          <a:p>
-            <a:pPr marL="571440" indent="-285750" algn="just">
-              <a:lnSpc>
-                <a:spcPct val="150000"/>
-              </a:lnSpc>
-              <a:spcBef>
-                <a:spcPts val="0"/>
-              </a:spcBef>
-              <a:buFont typeface="Arial" panose="020B0604020202020204" pitchFamily="34" charset="0"/>
-              <a:buChar char="•"/>
-            </a:pPr>
-            <a:r>
-              <a:rPr lang="es-ES" sz="1800" dirty="0">
-                <a:solidFill>
-                  <a:schemeClr val="tx1">
-                    <a:lumMod val="95000"/>
-                    <a:lumOff val="5000"/>
-                  </a:schemeClr>
-                </a:solidFill>
-                <a:latin typeface="Arial" panose="020B0604020202020204" pitchFamily="34" charset="0"/>
-                <a:cs typeface="Arial" panose="020B0604020202020204" pitchFamily="34" charset="0"/>
-              </a:rPr>
-              <a:t>Si la cola está llena, se eliminarán los paquetes nuevos.</a:t>
-            </a:r>
-          </a:p>
-          <a:p>
-            <a:pPr marL="571440" indent="-285750" algn="just">
-              <a:lnSpc>
-                <a:spcPct val="150000"/>
-              </a:lnSpc>
-              <a:spcBef>
-                <a:spcPts val="0"/>
-              </a:spcBef>
-              <a:buFont typeface="Arial" panose="020B0604020202020204" pitchFamily="34" charset="0"/>
-              <a:buChar char="•"/>
-            </a:pPr>
-            <a:r>
-              <a:rPr lang="es-ES" sz="1800" dirty="0">
-                <a:solidFill>
-                  <a:schemeClr val="tx1">
-                    <a:lumMod val="95000"/>
-                    <a:lumOff val="5000"/>
-                  </a:schemeClr>
-                </a:solidFill>
-                <a:latin typeface="Arial" panose="020B0604020202020204" pitchFamily="34" charset="0"/>
-                <a:cs typeface="Arial" panose="020B0604020202020204" pitchFamily="34" charset="0"/>
-              </a:rPr>
-              <a:t>Esto se llama caída de la fila </a:t>
-            </a:r>
-            <a:r>
-              <a:rPr lang="es-ES" sz="1800" b="1" dirty="0">
-                <a:solidFill>
-                  <a:schemeClr val="tx1">
-                    <a:lumMod val="95000"/>
-                    <a:lumOff val="5000"/>
-                  </a:schemeClr>
-                </a:solidFill>
-                <a:latin typeface="Arial" panose="020B0604020202020204" pitchFamily="34" charset="0"/>
-                <a:cs typeface="Arial" panose="020B0604020202020204" pitchFamily="34" charset="0"/>
-              </a:rPr>
-              <a:t>(</a:t>
-            </a:r>
-            <a:r>
-              <a:rPr lang="es-ES" sz="1800" b="1" dirty="0" err="1">
-                <a:solidFill>
-                  <a:schemeClr val="tx1">
-                    <a:lumMod val="95000"/>
-                    <a:lumOff val="5000"/>
-                  </a:schemeClr>
-                </a:solidFill>
-                <a:latin typeface="Arial" panose="020B0604020202020204" pitchFamily="34" charset="0"/>
-                <a:cs typeface="Arial" panose="020B0604020202020204" pitchFamily="34" charset="0"/>
-              </a:rPr>
-              <a:t>tail</a:t>
-            </a:r>
-            <a:r>
-              <a:rPr lang="es-ES" sz="1800" b="1" dirty="0">
-                <a:solidFill>
-                  <a:schemeClr val="tx1">
-                    <a:lumMod val="95000"/>
-                    <a:lumOff val="5000"/>
-                  </a:schemeClr>
-                </a:solidFill>
-                <a:latin typeface="Arial" panose="020B0604020202020204" pitchFamily="34" charset="0"/>
-                <a:cs typeface="Arial" panose="020B0604020202020204" pitchFamily="34" charset="0"/>
-              </a:rPr>
-              <a:t> </a:t>
-            </a:r>
-            <a:r>
-              <a:rPr lang="es-ES" sz="1800" b="1" dirty="0" err="1">
-                <a:solidFill>
-                  <a:schemeClr val="tx1">
-                    <a:lumMod val="95000"/>
-                    <a:lumOff val="5000"/>
-                  </a:schemeClr>
-                </a:solidFill>
-                <a:latin typeface="Arial" panose="020B0604020202020204" pitchFamily="34" charset="0"/>
-                <a:cs typeface="Arial" panose="020B0604020202020204" pitchFamily="34" charset="0"/>
-              </a:rPr>
-              <a:t>drop</a:t>
-            </a:r>
-            <a:r>
-              <a:rPr lang="es-ES" sz="1800" b="1" dirty="0">
-                <a:solidFill>
-                  <a:schemeClr val="tx1">
-                    <a:lumMod val="95000"/>
-                    <a:lumOff val="5000"/>
-                  </a:schemeClr>
-                </a:solidFill>
-                <a:latin typeface="Arial" panose="020B0604020202020204" pitchFamily="34" charset="0"/>
-                <a:cs typeface="Arial" panose="020B0604020202020204" pitchFamily="34" charset="0"/>
-              </a:rPr>
-              <a:t>)</a:t>
-            </a:r>
-          </a:p>
-        </p:txBody>
-      </p:sp>
-      <p:sp>
-        <p:nvSpPr>
-          <p:cNvPr id="4" name="Rectangle 5">
-            <a:extLst>
-              <a:ext uri="{FF2B5EF4-FFF2-40B4-BE49-F238E27FC236}">
-                <a16:creationId xmlns:a16="http://schemas.microsoft.com/office/drawing/2014/main" id="{BD2FAA3E-64BB-4FFB-46CC-02579F1E62D9}"/>
-              </a:ext>
-            </a:extLst>
-          </p:cNvPr>
-          <p:cNvSpPr txBox="1">
-            <a:spLocks noChangeArrowheads="1"/>
-          </p:cNvSpPr>
-          <p:nvPr/>
-        </p:nvSpPr>
-        <p:spPr bwMode="auto">
-          <a:xfrm>
-            <a:off x="1028700" y="37721"/>
-            <a:ext cx="7086600" cy="1143000"/>
-          </a:xfrm>
-          <a:prstGeom prst="rect">
-            <a:avLst/>
-          </a:prstGeom>
-          <a:noFill/>
-          <a:ln>
-            <a:noFill/>
-          </a:ln>
-          <a:extLst>
-            <a:ext uri="{909E8E84-426E-40DD-AFC4-6F175D3DCCD1}">
-              <a14:hiddenFill xmlns:a14="http://schemas.microsoft.com/office/drawing/2010/main">
-                <a:solidFill>
-                  <a:srgbClr val="FFFFFF"/>
-                </a:solidFill>
-              </a14:hiddenFill>
-            </a:ext>
-            <a:ext uri="{91240B29-F687-4F45-9708-019B960494DF}">
-              <a14:hiddenLine xmlns:a14="http://schemas.microsoft.com/office/drawing/2010/main" w="9525">
-                <a:solidFill>
-                  <a:srgbClr val="000000"/>
-                </a:solidFill>
-                <a:miter lim="800000"/>
-                <a:headEnd/>
-                <a:tailEnd/>
-              </a14:hiddenLine>
-            </a:ext>
-          </a:extLst>
-        </p:spPr>
-        <p:txBody>
-          <a:bodyPr vert="horz" lIns="91440" tIns="45720" rIns="91440" bIns="45720" rtlCol="0" anchor="ctr">
-            <a:normAutofit/>
-          </a:bodyPr>
-          <a:lstStyle>
-            <a:lvl1pPr algn="ctr" defTabSz="914400" rtl="0" eaLnBrk="1" latinLnBrk="0" hangingPunct="1">
-              <a:spcBef>
-                <a:spcPct val="0"/>
-              </a:spcBef>
-              <a:buNone/>
-              <a:defRPr sz="4400" kern="1200">
-                <a:solidFill>
-                  <a:srgbClr val="004C69"/>
-                </a:solidFill>
-                <a:latin typeface="+mj-lt"/>
-                <a:ea typeface="+mj-ea"/>
-                <a:cs typeface="+mj-cs"/>
-              </a:defRPr>
-            </a:lvl1pPr>
-          </a:lstStyle>
-          <a:p>
-            <a:pPr>
-              <a:spcBef>
-                <a:spcPts val="0"/>
-              </a:spcBef>
-            </a:pPr>
-            <a:r>
-              <a:rPr lang="es-ES_tradnl" altLang="es-MX" sz="3200" b="1" dirty="0" err="1">
-                <a:solidFill>
-                  <a:schemeClr val="accent4">
-                    <a:lumMod val="50000"/>
-                  </a:schemeClr>
-                </a:solidFill>
-                <a:effectLst>
-                  <a:outerShdw blurRad="38100" dist="38100" dir="2700000" algn="tl">
-                    <a:srgbClr val="C0C0C0"/>
-                  </a:outerShdw>
-                </a:effectLst>
-                <a:latin typeface="Dom Casual" charset="0"/>
-              </a:rPr>
-              <a:t>Quality</a:t>
-            </a:r>
-            <a:r>
-              <a:rPr lang="es-ES_tradnl" altLang="es-MX" sz="3200" b="1" dirty="0">
-                <a:solidFill>
-                  <a:schemeClr val="accent4">
-                    <a:lumMod val="50000"/>
-                  </a:schemeClr>
-                </a:solidFill>
-                <a:effectLst>
-                  <a:outerShdw blurRad="38100" dist="38100" dir="2700000" algn="tl">
-                    <a:srgbClr val="C0C0C0"/>
-                  </a:outerShdw>
-                </a:effectLst>
-                <a:latin typeface="Dom Casual" charset="0"/>
-              </a:rPr>
-              <a:t> </a:t>
-            </a:r>
-            <a:r>
-              <a:rPr lang="es-ES_tradnl" altLang="es-MX" sz="3200" b="1" dirty="0" err="1">
-                <a:solidFill>
-                  <a:schemeClr val="accent4">
-                    <a:lumMod val="50000"/>
-                  </a:schemeClr>
-                </a:solidFill>
-                <a:effectLst>
-                  <a:outerShdw blurRad="38100" dist="38100" dir="2700000" algn="tl">
-                    <a:srgbClr val="C0C0C0"/>
-                  </a:outerShdw>
-                </a:effectLst>
-                <a:latin typeface="Dom Casual" charset="0"/>
-              </a:rPr>
-              <a:t>of</a:t>
-            </a:r>
-            <a:r>
-              <a:rPr lang="es-ES_tradnl" altLang="es-MX" sz="3200" b="1" dirty="0">
-                <a:solidFill>
-                  <a:schemeClr val="accent4">
-                    <a:lumMod val="50000"/>
-                  </a:schemeClr>
-                </a:solidFill>
-                <a:effectLst>
-                  <a:outerShdw blurRad="38100" dist="38100" dir="2700000" algn="tl">
-                    <a:srgbClr val="C0C0C0"/>
-                  </a:outerShdw>
-                </a:effectLst>
-                <a:latin typeface="Dom Casual" charset="0"/>
-              </a:rPr>
-              <a:t> </a:t>
-            </a:r>
-            <a:r>
-              <a:rPr lang="es-ES_tradnl" altLang="es-MX" sz="3200" b="1" dirty="0" err="1">
-                <a:solidFill>
-                  <a:schemeClr val="accent4">
-                    <a:lumMod val="50000"/>
-                  </a:schemeClr>
-                </a:solidFill>
-                <a:effectLst>
-                  <a:outerShdw blurRad="38100" dist="38100" dir="2700000" algn="tl">
-                    <a:srgbClr val="C0C0C0"/>
-                  </a:outerShdw>
-                </a:effectLst>
-                <a:latin typeface="Dom Casual" charset="0"/>
-              </a:rPr>
-              <a:t>service</a:t>
-            </a:r>
-            <a:r>
-              <a:rPr lang="es-ES_tradnl" altLang="es-MX" sz="3200" b="1" dirty="0">
-                <a:solidFill>
-                  <a:schemeClr val="accent4">
-                    <a:lumMod val="50000"/>
-                  </a:schemeClr>
-                </a:solidFill>
-                <a:effectLst>
-                  <a:outerShdw blurRad="38100" dist="38100" dir="2700000" algn="tl">
-                    <a:srgbClr val="C0C0C0"/>
-                  </a:outerShdw>
-                </a:effectLst>
-                <a:latin typeface="Dom Casual" charset="0"/>
-              </a:rPr>
-              <a:t> (</a:t>
-            </a:r>
-            <a:r>
-              <a:rPr lang="es-ES_tradnl" altLang="es-MX" sz="3200" b="1" dirty="0" err="1">
-                <a:solidFill>
-                  <a:schemeClr val="accent4">
-                    <a:lumMod val="50000"/>
-                  </a:schemeClr>
-                </a:solidFill>
-                <a:effectLst>
-                  <a:outerShdw blurRad="38100" dist="38100" dir="2700000" algn="tl">
-                    <a:srgbClr val="C0C0C0"/>
-                  </a:outerShdw>
-                </a:effectLst>
-                <a:latin typeface="Dom Casual" charset="0"/>
-              </a:rPr>
-              <a:t>QoS</a:t>
-            </a:r>
-            <a:r>
-              <a:rPr lang="es-ES_tradnl" altLang="es-MX" sz="3200" b="1" dirty="0">
-                <a:solidFill>
-                  <a:schemeClr val="accent4">
-                    <a:lumMod val="50000"/>
-                  </a:schemeClr>
-                </a:solidFill>
-                <a:effectLst>
-                  <a:outerShdw blurRad="38100" dist="38100" dir="2700000" algn="tl">
-                    <a:srgbClr val="C0C0C0"/>
-                  </a:outerShdw>
-                </a:effectLst>
-                <a:latin typeface="Dom Casual" charset="0"/>
-              </a:rPr>
-              <a:t>)</a:t>
-            </a:r>
-          </a:p>
-          <a:p>
-            <a:pPr>
-              <a:spcBef>
-                <a:spcPts val="0"/>
-              </a:spcBef>
-            </a:pPr>
-            <a:r>
-              <a:rPr lang="es-ES_tradnl" altLang="es-MX" sz="1800" b="1" dirty="0" err="1">
-                <a:solidFill>
-                  <a:schemeClr val="accent3">
-                    <a:lumMod val="75000"/>
-                  </a:schemeClr>
-                </a:solidFill>
-                <a:latin typeface="Dom Casual" charset="0"/>
-              </a:rPr>
-              <a:t>Queuing</a:t>
-            </a:r>
-            <a:r>
-              <a:rPr lang="es-ES_tradnl" altLang="es-MX" sz="1800" b="1" dirty="0">
-                <a:solidFill>
-                  <a:schemeClr val="accent3">
-                    <a:lumMod val="75000"/>
-                  </a:schemeClr>
-                </a:solidFill>
-                <a:latin typeface="Dom Casual" charset="0"/>
-              </a:rPr>
-              <a:t> – Haciendo fila - Encolamiento</a:t>
-            </a:r>
-          </a:p>
-        </p:txBody>
-      </p:sp>
-      <p:pic>
-        <p:nvPicPr>
-          <p:cNvPr id="5" name="Imagen 4">
-            <a:extLst>
-              <a:ext uri="{FF2B5EF4-FFF2-40B4-BE49-F238E27FC236}">
-                <a16:creationId xmlns:a16="http://schemas.microsoft.com/office/drawing/2014/main" id="{1B178AD4-9A3C-2563-1C51-CC145127A54D}"/>
-              </a:ext>
-            </a:extLst>
-          </p:cNvPr>
-          <p:cNvPicPr>
-            <a:picLocks noChangeAspect="1"/>
-          </p:cNvPicPr>
-          <p:nvPr/>
-        </p:nvPicPr>
-        <p:blipFill>
-          <a:blip r:embed="rId3"/>
-          <a:stretch>
-            <a:fillRect/>
-          </a:stretch>
-        </p:blipFill>
-        <p:spPr>
-          <a:xfrm>
-            <a:off x="1028700" y="2852936"/>
-            <a:ext cx="6984776" cy="3548345"/>
-          </a:xfrm>
-          <a:prstGeom prst="rect">
-            <a:avLst/>
-          </a:prstGeom>
-        </p:spPr>
-      </p:pic>
-    </p:spTree>
-    <p:extLst>
-      <p:ext uri="{BB962C8B-B14F-4D97-AF65-F5344CB8AC3E}">
-        <p14:creationId xmlns:p14="http://schemas.microsoft.com/office/powerpoint/2010/main" val="2869956386"/>
-      </p:ext>
-    </p:extLst>
-  </p:cSld>
-  <p:clrMapOvr>
-    <a:masterClrMapping/>
-  </p:clrMapOvr>
-  <mc:AlternateContent xmlns:mc="http://schemas.openxmlformats.org/markup-compatibility/2006" xmlns:p14="http://schemas.microsoft.com/office/powerpoint/2010/main">
-    <mc:Choice Requires="p14">
-      <p:transition spd="med" p14:dur="700">
-        <p:fade/>
-      </p:transition>
-    </mc:Choice>
-    <mc:Fallback xmlns="">
-      <p:transition xmlns:p14="http://schemas.microsoft.com/office/powerpoint/2010/main" spd="med">
-        <p:fade/>
-      </p:transition>
-    </mc:Fallback>
-  </mc:AlternateContent>
-</p:sld>
-</file>
-
-<file path=ppt/slides/slide24.xml><?xml version="1.0" encoding="utf-8"?>
 <p:sld xmlns:a="http://schemas.openxmlformats.org/drawingml/2006/main" xmlns:r="http://schemas.openxmlformats.org/officeDocument/2006/relationships" xmlns:p="http://schemas.openxmlformats.org/presentationml/2006/main">
   <p:cSld>
     <p:bg>
@@ -14459,7 +8192,7 @@
 </p:sld>
 </file>
 
-<file path=ppt/slides/slide25.xml><?xml version="1.0" encoding="utf-8"?>
+<file path=ppt/slides/slide14.xml><?xml version="1.0" encoding="utf-8"?>
 <p:sld xmlns:a="http://schemas.openxmlformats.org/drawingml/2006/main" xmlns:r="http://schemas.openxmlformats.org/officeDocument/2006/relationships" xmlns:p="http://schemas.openxmlformats.org/presentationml/2006/main">
   <p:cSld>
     <p:spTree>
@@ -14585,7 +8318,7 @@
             <a:r>
               <a:rPr lang="es-ES" sz="1800" b="1" dirty="0">
                 <a:solidFill>
-                  <a:srgbClr val="00B0F0"/>
+                  <a:srgbClr val="0070C0"/>
                 </a:solidFill>
                 <a:latin typeface="Arial" panose="020B0604020202020204" pitchFamily="34" charset="0"/>
                 <a:cs typeface="Arial" panose="020B0604020202020204" pitchFamily="34" charset="0"/>
@@ -14605,7 +8338,7 @@
             <a:r>
               <a:rPr lang="es-ES" sz="1800" b="1" dirty="0" err="1">
                 <a:solidFill>
-                  <a:srgbClr val="00B0F0"/>
+                  <a:srgbClr val="0070C0"/>
                 </a:solidFill>
                 <a:latin typeface="Arial" panose="020B0604020202020204" pitchFamily="34" charset="0"/>
                 <a:cs typeface="Arial" panose="020B0604020202020204" pitchFamily="34" charset="0"/>
@@ -14823,7 +8556,7 @@
 </p:sld>
 </file>
 
-<file path=ppt/slides/slide26.xml><?xml version="1.0" encoding="utf-8"?>
+<file path=ppt/slides/slide15.xml><?xml version="1.0" encoding="utf-8"?>
 <p:sld xmlns:a="http://schemas.openxmlformats.org/drawingml/2006/main" xmlns:r="http://schemas.openxmlformats.org/officeDocument/2006/relationships" xmlns:p="http://schemas.openxmlformats.org/presentationml/2006/main">
   <p:cSld>
     <p:spTree>
@@ -15010,7 +8743,7 @@
             <a:r>
               <a:rPr lang="es-ES" b="1" dirty="0">
                 <a:solidFill>
-                  <a:srgbClr val="00B0F0"/>
+                  <a:srgbClr val="0070C0"/>
                 </a:solidFill>
                 <a:latin typeface="Arial" panose="020B0604020202020204" pitchFamily="34" charset="0"/>
                 <a:cs typeface="Arial" panose="020B0604020202020204" pitchFamily="34" charset="0"/>
@@ -15114,7 +8847,7 @@
             <a:r>
               <a:rPr lang="es-ES" sz="2000" b="1" dirty="0">
                 <a:solidFill>
-                  <a:srgbClr val="00B0F0"/>
+                  <a:srgbClr val="0070C0"/>
                 </a:solidFill>
                 <a:latin typeface="Arial" panose="020B0604020202020204" pitchFamily="34" charset="0"/>
                 <a:cs typeface="Arial" panose="020B0604020202020204" pitchFamily="34" charset="0"/>
@@ -15333,7 +9066,7 @@
 </p:sld>
 </file>
 
-<file path=ppt/slides/slide27.xml><?xml version="1.0" encoding="utf-8"?>
+<file path=ppt/slides/slide16.xml><?xml version="1.0" encoding="utf-8"?>
 <p:sld xmlns:a="http://schemas.openxmlformats.org/drawingml/2006/main" xmlns:r="http://schemas.openxmlformats.org/officeDocument/2006/relationships" xmlns:p="http://schemas.openxmlformats.org/presentationml/2006/main">
   <p:cSld>
     <p:spTree>
@@ -15772,7 +9505,7 @@
 </p:sld>
 </file>
 
-<file path=ppt/slides/slide28.xml><?xml version="1.0" encoding="utf-8"?>
+<file path=ppt/slides/slide17.xml><?xml version="1.0" encoding="utf-8"?>
 <p:sld xmlns:a="http://schemas.openxmlformats.org/drawingml/2006/main" xmlns:r="http://schemas.openxmlformats.org/officeDocument/2006/relationships" xmlns:p="http://schemas.openxmlformats.org/presentationml/2006/main">
   <p:cSld>
     <p:spTree>
@@ -15879,7 +9612,7 @@
             <a:r>
               <a:rPr lang="es-ES" sz="1800" b="1" dirty="0">
                 <a:solidFill>
-                  <a:srgbClr val="00B0F0"/>
+                  <a:srgbClr val="0070C0"/>
                 </a:solidFill>
                 <a:latin typeface="Arial" panose="020B0604020202020204" pitchFamily="34" charset="0"/>
                 <a:cs typeface="Arial" panose="020B0604020202020204" pitchFamily="34" charset="0"/>
@@ -15889,7 +9622,7 @@
             <a:r>
               <a:rPr lang="es-ES" sz="1800" b="1" u="sng" dirty="0">
                 <a:solidFill>
-                  <a:srgbClr val="00B0F0"/>
+                  <a:srgbClr val="0070C0"/>
                 </a:solidFill>
                 <a:latin typeface="Arial" panose="020B0604020202020204" pitchFamily="34" charset="0"/>
                 <a:cs typeface="Arial" panose="020B0604020202020204" pitchFamily="34" charset="0"/>
@@ -15899,7 +9632,7 @@
             <a:r>
               <a:rPr lang="es-ES" sz="1800" b="1" dirty="0">
                 <a:solidFill>
-                  <a:srgbClr val="00B0F0"/>
+                  <a:srgbClr val="0070C0"/>
                 </a:solidFill>
                 <a:latin typeface="Arial" panose="020B0604020202020204" pitchFamily="34" charset="0"/>
                 <a:cs typeface="Arial" panose="020B0604020202020204" pitchFamily="34" charset="0"/>
@@ -15909,7 +9642,7 @@
             <a:r>
               <a:rPr lang="es-ES" sz="1800" dirty="0">
                 <a:solidFill>
-                  <a:srgbClr val="00B0F0"/>
+                  <a:srgbClr val="0070C0"/>
                 </a:solidFill>
                 <a:latin typeface="Arial" panose="020B0604020202020204" pitchFamily="34" charset="0"/>
                 <a:cs typeface="Arial" panose="020B0604020202020204" pitchFamily="34" charset="0"/>
@@ -16359,7 +10092,7 @@
 </p:sld>
 </file>
 
-<file path=ppt/slides/slide29.xml><?xml version="1.0" encoding="utf-8"?>
+<file path=ppt/slides/slide18.xml><?xml version="1.0" encoding="utf-8"?>
 <p:sld xmlns:a="http://schemas.openxmlformats.org/drawingml/2006/main" xmlns:r="http://schemas.openxmlformats.org/officeDocument/2006/relationships" xmlns:p="http://schemas.openxmlformats.org/presentationml/2006/main">
   <p:cSld>
     <p:spTree>
@@ -16715,7 +10448,7 @@
 </p:sld>
 </file>
 
-<file path=ppt/slides/slide3.xml><?xml version="1.0" encoding="utf-8"?>
+<file path=ppt/slides/slide19.xml><?xml version="1.0" encoding="utf-8"?>
 <p:sld xmlns:a="http://schemas.openxmlformats.org/drawingml/2006/main" xmlns:r="http://schemas.openxmlformats.org/officeDocument/2006/relationships" xmlns:p="http://schemas.openxmlformats.org/presentationml/2006/main">
   <p:cSld>
     <p:spTree>
@@ -16744,462 +10477,6 @@
         </p:nvSpPr>
         <p:spPr>
           <a:xfrm>
-            <a:off x="251520" y="1628800"/>
-            <a:ext cx="4464496" cy="3960440"/>
-          </a:xfrm>
-        </p:spPr>
-        <p:txBody>
-          <a:bodyPr/>
-          <a:lstStyle/>
-          <a:p>
-            <a:pPr marL="571440" indent="-285750" algn="just">
-              <a:lnSpc>
-                <a:spcPct val="150000"/>
-              </a:lnSpc>
-              <a:spcBef>
-                <a:spcPts val="0"/>
-              </a:spcBef>
-              <a:buFont typeface="Arial" panose="020B0604020202020204" pitchFamily="34" charset="0"/>
-              <a:buChar char="•"/>
-            </a:pPr>
-            <a:r>
-              <a:rPr lang="es-ES" sz="1800" dirty="0" err="1">
-                <a:solidFill>
-                  <a:srgbClr val="000000"/>
-                </a:solidFill>
-                <a:latin typeface="Arial" panose="020B0604020202020204" pitchFamily="34" charset="0"/>
-                <a:cs typeface="Arial" panose="020B0604020202020204" pitchFamily="34" charset="0"/>
-              </a:rPr>
-              <a:t>QoS</a:t>
-            </a:r>
-            <a:r>
-              <a:rPr lang="es-ES" sz="1800" dirty="0">
-                <a:solidFill>
-                  <a:srgbClr val="000000"/>
-                </a:solidFill>
-                <a:latin typeface="Arial" panose="020B0604020202020204" pitchFamily="34" charset="0"/>
-                <a:cs typeface="Arial" panose="020B0604020202020204" pitchFamily="34" charset="0"/>
-              </a:rPr>
-              <a:t> se usa para </a:t>
-            </a:r>
-            <a:r>
-              <a:rPr lang="es-ES" sz="1800" b="1" dirty="0">
-                <a:solidFill>
-                  <a:schemeClr val="accent6">
-                    <a:lumMod val="75000"/>
-                  </a:schemeClr>
-                </a:solidFill>
-                <a:latin typeface="Arial" panose="020B0604020202020204" pitchFamily="34" charset="0"/>
-                <a:cs typeface="Arial" panose="020B0604020202020204" pitchFamily="34" charset="0"/>
-              </a:rPr>
-              <a:t>dar prioridad a ciertos tipos de tráfico de red y para minimizar la demora y la pérdida de paquetes</a:t>
-            </a:r>
-            <a:r>
-              <a:rPr lang="es-ES" sz="1800" dirty="0">
-                <a:solidFill>
-                  <a:srgbClr val="000000"/>
-                </a:solidFill>
-                <a:latin typeface="Arial" panose="020B0604020202020204" pitchFamily="34" charset="0"/>
-                <a:cs typeface="Arial" panose="020B0604020202020204" pitchFamily="34" charset="0"/>
-              </a:rPr>
-              <a:t>. </a:t>
-            </a:r>
-          </a:p>
-          <a:p>
-            <a:pPr marL="571440" indent="-285750" algn="just">
-              <a:lnSpc>
-                <a:spcPct val="150000"/>
-              </a:lnSpc>
-              <a:spcBef>
-                <a:spcPts val="0"/>
-              </a:spcBef>
-              <a:buFont typeface="Arial" panose="020B0604020202020204" pitchFamily="34" charset="0"/>
-              <a:buChar char="•"/>
-            </a:pPr>
-            <a:r>
-              <a:rPr lang="es-ES" sz="1800" dirty="0" err="1">
-                <a:solidFill>
-                  <a:srgbClr val="000000"/>
-                </a:solidFill>
-                <a:latin typeface="Arial" panose="020B0604020202020204" pitchFamily="34" charset="0"/>
-                <a:cs typeface="Arial" panose="020B0604020202020204" pitchFamily="34" charset="0"/>
-              </a:rPr>
-              <a:t>QoS</a:t>
-            </a:r>
-            <a:r>
-              <a:rPr lang="es-ES" sz="1800" dirty="0">
-                <a:solidFill>
-                  <a:srgbClr val="000000"/>
-                </a:solidFill>
-                <a:latin typeface="Arial" panose="020B0604020202020204" pitchFamily="34" charset="0"/>
-                <a:cs typeface="Arial" panose="020B0604020202020204" pitchFamily="34" charset="0"/>
-              </a:rPr>
-              <a:t> a menudo se usa para </a:t>
-            </a:r>
-            <a:r>
-              <a:rPr lang="es-ES" sz="1800" b="1" dirty="0">
-                <a:solidFill>
-                  <a:schemeClr val="accent6">
-                    <a:lumMod val="75000"/>
-                  </a:schemeClr>
-                </a:solidFill>
-                <a:latin typeface="Arial" panose="020B0604020202020204" pitchFamily="34" charset="0"/>
-                <a:cs typeface="Arial" panose="020B0604020202020204" pitchFamily="34" charset="0"/>
-              </a:rPr>
-              <a:t>priorizar el tráfico de voz sobre IP </a:t>
-            </a:r>
-            <a:r>
-              <a:rPr lang="es-ES" sz="1800" dirty="0">
-                <a:solidFill>
-                  <a:srgbClr val="000000"/>
-                </a:solidFill>
-                <a:latin typeface="Arial" panose="020B0604020202020204" pitchFamily="34" charset="0"/>
-                <a:cs typeface="Arial" panose="020B0604020202020204" pitchFamily="34" charset="0"/>
-              </a:rPr>
-              <a:t>desde teléfonos IP para garantizar que la calidad de audio sea aceptable.</a:t>
-            </a:r>
-            <a:endParaRPr lang="en-US" sz="1800" dirty="0">
-              <a:solidFill>
-                <a:srgbClr val="000000"/>
-              </a:solidFill>
-              <a:latin typeface="Arial" panose="020B0604020202020204" pitchFamily="34" charset="0"/>
-              <a:cs typeface="Arial" panose="020B0604020202020204" pitchFamily="34" charset="0"/>
-            </a:endParaRPr>
-          </a:p>
-        </p:txBody>
-      </p:sp>
-      <p:sp>
-        <p:nvSpPr>
-          <p:cNvPr id="4" name="Rectangle 5">
-            <a:extLst>
-              <a:ext uri="{FF2B5EF4-FFF2-40B4-BE49-F238E27FC236}">
-                <a16:creationId xmlns:a16="http://schemas.microsoft.com/office/drawing/2014/main" id="{E00053A9-C954-D220-8547-5064D8450A0C}"/>
-              </a:ext>
-            </a:extLst>
-          </p:cNvPr>
-          <p:cNvSpPr txBox="1">
-            <a:spLocks noChangeArrowheads="1"/>
-          </p:cNvSpPr>
-          <p:nvPr/>
-        </p:nvSpPr>
-        <p:spPr bwMode="auto">
-          <a:xfrm>
-            <a:off x="1028700" y="0"/>
-            <a:ext cx="7086600" cy="1143000"/>
-          </a:xfrm>
-          <a:prstGeom prst="rect">
-            <a:avLst/>
-          </a:prstGeom>
-          <a:noFill/>
-          <a:ln>
-            <a:noFill/>
-          </a:ln>
-          <a:extLst>
-            <a:ext uri="{909E8E84-426E-40DD-AFC4-6F175D3DCCD1}">
-              <a14:hiddenFill xmlns:a14="http://schemas.microsoft.com/office/drawing/2010/main">
-                <a:solidFill>
-                  <a:srgbClr val="FFFFFF"/>
-                </a:solidFill>
-              </a14:hiddenFill>
-            </a:ext>
-            <a:ext uri="{91240B29-F687-4F45-9708-019B960494DF}">
-              <a14:hiddenLine xmlns:a14="http://schemas.microsoft.com/office/drawing/2010/main" w="9525">
-                <a:solidFill>
-                  <a:srgbClr val="000000"/>
-                </a:solidFill>
-                <a:miter lim="800000"/>
-                <a:headEnd/>
-                <a:tailEnd/>
-              </a14:hiddenLine>
-            </a:ext>
-          </a:extLst>
-        </p:spPr>
-        <p:txBody>
-          <a:bodyPr vert="horz" lIns="91440" tIns="45720" rIns="91440" bIns="45720" rtlCol="0" anchor="ctr">
-            <a:normAutofit/>
-          </a:bodyPr>
-          <a:lstStyle>
-            <a:lvl1pPr algn="ctr" defTabSz="914400" rtl="0" eaLnBrk="1" latinLnBrk="0" hangingPunct="1">
-              <a:spcBef>
-                <a:spcPct val="0"/>
-              </a:spcBef>
-              <a:buNone/>
-              <a:defRPr sz="4400" kern="1200">
-                <a:solidFill>
-                  <a:srgbClr val="004C69"/>
-                </a:solidFill>
-                <a:latin typeface="+mj-lt"/>
-                <a:ea typeface="+mj-ea"/>
-                <a:cs typeface="+mj-cs"/>
-              </a:defRPr>
-            </a:lvl1pPr>
-          </a:lstStyle>
-          <a:p>
-            <a:pPr>
-              <a:spcBef>
-                <a:spcPts val="0"/>
-              </a:spcBef>
-            </a:pPr>
-            <a:r>
-              <a:rPr lang="es-ES_tradnl" altLang="es-MX" sz="3200" b="1" dirty="0" err="1">
-                <a:solidFill>
-                  <a:schemeClr val="accent4">
-                    <a:lumMod val="50000"/>
-                  </a:schemeClr>
-                </a:solidFill>
-                <a:effectLst>
-                  <a:outerShdw blurRad="38100" dist="38100" dir="2700000" algn="tl">
-                    <a:srgbClr val="C0C0C0"/>
-                  </a:outerShdw>
-                </a:effectLst>
-                <a:latin typeface="Dom Casual" charset="0"/>
-              </a:rPr>
-              <a:t>Quality</a:t>
-            </a:r>
-            <a:r>
-              <a:rPr lang="es-ES_tradnl" altLang="es-MX" sz="3200" b="1" dirty="0">
-                <a:solidFill>
-                  <a:schemeClr val="accent4">
-                    <a:lumMod val="50000"/>
-                  </a:schemeClr>
-                </a:solidFill>
-                <a:effectLst>
-                  <a:outerShdw blurRad="38100" dist="38100" dir="2700000" algn="tl">
-                    <a:srgbClr val="C0C0C0"/>
-                  </a:outerShdw>
-                </a:effectLst>
-                <a:latin typeface="Dom Casual" charset="0"/>
-              </a:rPr>
-              <a:t> </a:t>
-            </a:r>
-            <a:r>
-              <a:rPr lang="es-ES_tradnl" altLang="es-MX" sz="3200" b="1" dirty="0" err="1">
-                <a:solidFill>
-                  <a:schemeClr val="accent4">
-                    <a:lumMod val="50000"/>
-                  </a:schemeClr>
-                </a:solidFill>
-                <a:effectLst>
-                  <a:outerShdw blurRad="38100" dist="38100" dir="2700000" algn="tl">
-                    <a:srgbClr val="C0C0C0"/>
-                  </a:outerShdw>
-                </a:effectLst>
-                <a:latin typeface="Dom Casual" charset="0"/>
-              </a:rPr>
-              <a:t>of</a:t>
-            </a:r>
-            <a:r>
-              <a:rPr lang="es-ES_tradnl" altLang="es-MX" sz="3200" b="1" dirty="0">
-                <a:solidFill>
-                  <a:schemeClr val="accent4">
-                    <a:lumMod val="50000"/>
-                  </a:schemeClr>
-                </a:solidFill>
-                <a:effectLst>
-                  <a:outerShdw blurRad="38100" dist="38100" dir="2700000" algn="tl">
-                    <a:srgbClr val="C0C0C0"/>
-                  </a:outerShdw>
-                </a:effectLst>
-                <a:latin typeface="Dom Casual" charset="0"/>
-              </a:rPr>
-              <a:t> </a:t>
-            </a:r>
-            <a:r>
-              <a:rPr lang="es-ES_tradnl" altLang="es-MX" sz="3200" b="1" dirty="0" err="1">
-                <a:solidFill>
-                  <a:schemeClr val="accent4">
-                    <a:lumMod val="50000"/>
-                  </a:schemeClr>
-                </a:solidFill>
-                <a:effectLst>
-                  <a:outerShdw blurRad="38100" dist="38100" dir="2700000" algn="tl">
-                    <a:srgbClr val="C0C0C0"/>
-                  </a:outerShdw>
-                </a:effectLst>
-                <a:latin typeface="Dom Casual" charset="0"/>
-              </a:rPr>
-              <a:t>service</a:t>
-            </a:r>
-            <a:r>
-              <a:rPr lang="es-ES_tradnl" altLang="es-MX" sz="3200" b="1" dirty="0">
-                <a:solidFill>
-                  <a:schemeClr val="accent4">
-                    <a:lumMod val="50000"/>
-                  </a:schemeClr>
-                </a:solidFill>
-                <a:effectLst>
-                  <a:outerShdw blurRad="38100" dist="38100" dir="2700000" algn="tl">
-                    <a:srgbClr val="C0C0C0"/>
-                  </a:outerShdw>
-                </a:effectLst>
-                <a:latin typeface="Dom Casual" charset="0"/>
-              </a:rPr>
-              <a:t> (</a:t>
-            </a:r>
-            <a:r>
-              <a:rPr lang="es-ES_tradnl" altLang="es-MX" sz="3200" b="1" dirty="0" err="1">
-                <a:solidFill>
-                  <a:schemeClr val="accent4">
-                    <a:lumMod val="50000"/>
-                  </a:schemeClr>
-                </a:solidFill>
-                <a:effectLst>
-                  <a:outerShdw blurRad="38100" dist="38100" dir="2700000" algn="tl">
-                    <a:srgbClr val="C0C0C0"/>
-                  </a:outerShdw>
-                </a:effectLst>
-                <a:latin typeface="Dom Casual" charset="0"/>
-              </a:rPr>
-              <a:t>QoS</a:t>
-            </a:r>
-            <a:r>
-              <a:rPr lang="es-ES_tradnl" altLang="es-MX" sz="3200" b="1" dirty="0">
-                <a:solidFill>
-                  <a:schemeClr val="accent4">
-                    <a:lumMod val="50000"/>
-                  </a:schemeClr>
-                </a:solidFill>
-                <a:effectLst>
-                  <a:outerShdw blurRad="38100" dist="38100" dir="2700000" algn="tl">
-                    <a:srgbClr val="C0C0C0"/>
-                  </a:outerShdw>
-                </a:effectLst>
-                <a:latin typeface="Dom Casual" charset="0"/>
-              </a:rPr>
-              <a:t>)</a:t>
-            </a:r>
-            <a:br>
-              <a:rPr lang="es-ES_tradnl" altLang="es-MX" sz="3200" b="1" dirty="0">
-                <a:solidFill>
-                  <a:schemeClr val="accent4">
-                    <a:lumMod val="50000"/>
-                  </a:schemeClr>
-                </a:solidFill>
-                <a:effectLst>
-                  <a:outerShdw blurRad="38100" dist="38100" dir="2700000" algn="tl">
-                    <a:srgbClr val="C0C0C0"/>
-                  </a:outerShdw>
-                </a:effectLst>
-                <a:latin typeface="Dom Casual" charset="0"/>
-              </a:rPr>
-            </a:br>
-            <a:r>
-              <a:rPr lang="es-ES_tradnl" altLang="es-MX" sz="2200" b="1" dirty="0">
-                <a:solidFill>
-                  <a:schemeClr val="accent3">
-                    <a:lumMod val="75000"/>
-                  </a:schemeClr>
-                </a:solidFill>
-                <a:latin typeface="Arial" panose="020B0604020202020204" pitchFamily="34" charset="0"/>
-              </a:rPr>
-              <a:t>Calidad del servicio</a:t>
-            </a:r>
-            <a:endParaRPr lang="es-ES_tradnl" altLang="es-MX" sz="2200" b="1" dirty="0">
-              <a:solidFill>
-                <a:schemeClr val="accent3">
-                  <a:lumMod val="75000"/>
-                </a:schemeClr>
-              </a:solidFill>
-              <a:effectLst>
-                <a:outerShdw blurRad="38100" dist="38100" dir="2700000" algn="tl">
-                  <a:srgbClr val="C0C0C0"/>
-                </a:outerShdw>
-              </a:effectLst>
-              <a:latin typeface="Dom Casual" charset="0"/>
-            </a:endParaRPr>
-          </a:p>
-        </p:txBody>
-      </p:sp>
-      <p:pic>
-        <p:nvPicPr>
-          <p:cNvPr id="6" name="Imagen 5" descr="Gráfico, Gráfico de burbujas&#10;&#10;Descripción generada automáticamente">
-            <a:extLst>
-              <a:ext uri="{FF2B5EF4-FFF2-40B4-BE49-F238E27FC236}">
-                <a16:creationId xmlns:a16="http://schemas.microsoft.com/office/drawing/2014/main" id="{5C3DBB10-C79F-24F0-F575-8F7040645B58}"/>
-              </a:ext>
-            </a:extLst>
-          </p:cNvPr>
-          <p:cNvPicPr>
-            <a:picLocks noChangeAspect="1"/>
-          </p:cNvPicPr>
-          <p:nvPr/>
-        </p:nvPicPr>
-        <p:blipFill>
-          <a:blip r:embed="rId3">
-            <a:extLst>
-              <a:ext uri="{28A0092B-C50C-407E-A947-70E740481C1C}">
-                <a14:useLocalDpi xmlns:a14="http://schemas.microsoft.com/office/drawing/2010/main" val="0"/>
-              </a:ext>
-            </a:extLst>
-          </a:blip>
-          <a:stretch>
-            <a:fillRect/>
-          </a:stretch>
-        </p:blipFill>
-        <p:spPr>
-          <a:xfrm>
-            <a:off x="5148064" y="2096852"/>
-            <a:ext cx="3217379" cy="3024336"/>
-          </a:xfrm>
-          <a:prstGeom prst="rect">
-            <a:avLst/>
-          </a:prstGeom>
-        </p:spPr>
-      </p:pic>
-    </p:spTree>
-    <p:extLst>
-      <p:ext uri="{BB962C8B-B14F-4D97-AF65-F5344CB8AC3E}">
-        <p14:creationId xmlns:p14="http://schemas.microsoft.com/office/powerpoint/2010/main" val="1586875883"/>
-      </p:ext>
-    </p:extLst>
-  </p:cSld>
-  <p:clrMapOvr>
-    <a:masterClrMapping/>
-  </p:clrMapOvr>
-  <mc:AlternateContent xmlns:mc="http://schemas.openxmlformats.org/markup-compatibility/2006" xmlns:p14="http://schemas.microsoft.com/office/powerpoint/2010/main">
-    <mc:Choice Requires="p14">
-      <p:transition spd="med" p14:dur="700">
-        <p:fade/>
-      </p:transition>
-    </mc:Choice>
-    <mc:Fallback xmlns="">
-      <p:transition xmlns:p14="http://schemas.microsoft.com/office/powerpoint/2010/main" spd="med">
-        <p:fade/>
-      </p:transition>
-    </mc:Fallback>
-  </mc:AlternateContent>
-</p:sld>
-</file>
-
-<file path=ppt/slides/slide30.xml><?xml version="1.0" encoding="utf-8"?>
-<p:sld xmlns:a="http://schemas.openxmlformats.org/drawingml/2006/main" xmlns:r="http://schemas.openxmlformats.org/officeDocument/2006/relationships" xmlns:p="http://schemas.openxmlformats.org/presentationml/2006/main">
-  <p:cSld>
-    <p:spTree>
-      <p:nvGrpSpPr>
-        <p:cNvPr id="1" name=""/>
-        <p:cNvGrpSpPr/>
-        <p:nvPr/>
-      </p:nvGrpSpPr>
-      <p:grpSpPr>
-        <a:xfrm>
-          <a:off x="0" y="0"/>
-          <a:ext cx="0" cy="0"/>
-          <a:chOff x="0" y="0"/>
-          <a:chExt cx="0" cy="0"/>
-        </a:xfrm>
-      </p:grpSpPr>
-      <p:sp>
-        <p:nvSpPr>
-          <p:cNvPr id="2" name="Content Placeholder 1"/>
-          <p:cNvSpPr>
-            <a:spLocks noGrp="1"/>
-          </p:cNvSpPr>
-          <p:nvPr>
-            <p:ph idx="1"/>
-          </p:nvPr>
-        </p:nvSpPr>
-        <p:spPr>
-          <a:xfrm>
             <a:off x="611560" y="1334840"/>
             <a:ext cx="7992888" cy="3330370"/>
           </a:xfrm>
@@ -17257,7 +10534,7 @@
             <a:r>
               <a:rPr lang="es-ES" sz="1800" b="1" dirty="0">
                 <a:solidFill>
-                  <a:srgbClr val="00B0F0"/>
+                  <a:srgbClr val="0070C0"/>
                 </a:solidFill>
                 <a:latin typeface="Arial" panose="020B0604020202020204" pitchFamily="34" charset="0"/>
                 <a:cs typeface="Arial" panose="020B0604020202020204" pitchFamily="34" charset="0"/>
@@ -17267,7 +10544,7 @@
             <a:r>
               <a:rPr lang="es-ES" sz="1800" b="1" u="sng" dirty="0">
                 <a:solidFill>
-                  <a:srgbClr val="00B0F0"/>
+                  <a:srgbClr val="0070C0"/>
                 </a:solidFill>
                 <a:latin typeface="Arial" panose="020B0604020202020204" pitchFamily="34" charset="0"/>
                 <a:cs typeface="Arial" panose="020B0604020202020204" pitchFamily="34" charset="0"/>
@@ -17277,7 +10554,7 @@
             <a:r>
               <a:rPr lang="es-ES" sz="1800" b="1" dirty="0">
                 <a:solidFill>
-                  <a:srgbClr val="00B0F0"/>
+                  <a:srgbClr val="0070C0"/>
                 </a:solidFill>
                 <a:latin typeface="Arial" panose="020B0604020202020204" pitchFamily="34" charset="0"/>
                 <a:cs typeface="Arial" panose="020B0604020202020204" pitchFamily="34" charset="0"/>
@@ -17287,7 +10564,7 @@
             <a:r>
               <a:rPr lang="es-ES" sz="1800" dirty="0">
                 <a:solidFill>
-                  <a:srgbClr val="00B0F0"/>
+                  <a:srgbClr val="0070C0"/>
                 </a:solidFill>
                 <a:latin typeface="Arial" panose="020B0604020202020204" pitchFamily="34" charset="0"/>
                 <a:cs typeface="Arial" panose="020B0604020202020204" pitchFamily="34" charset="0"/>
@@ -17769,7 +11046,7 @@
 </p:sld>
 </file>
 
-<file path=ppt/slides/slide31.xml><?xml version="1.0" encoding="utf-8"?>
+<file path=ppt/slides/slide2.xml><?xml version="1.0" encoding="utf-8"?>
 <p:sld xmlns:a="http://schemas.openxmlformats.org/drawingml/2006/main" xmlns:r="http://schemas.openxmlformats.org/officeDocument/2006/relationships" xmlns:p="http://schemas.openxmlformats.org/presentationml/2006/main">
   <p:cSld>
     <p:spTree>
@@ -17786,6 +11063,529 @@
           <a:chExt cx="0" cy="0"/>
         </a:xfrm>
       </p:grpSpPr>
+      <p:pic>
+        <p:nvPicPr>
+          <p:cNvPr id="7" name="Imagen 6" descr="Una pantalla de una computadora&#10;&#10;Descripción generada automáticamente con confianza media">
+            <a:extLst>
+              <a:ext uri="{FF2B5EF4-FFF2-40B4-BE49-F238E27FC236}">
+                <a16:creationId xmlns:a16="http://schemas.microsoft.com/office/drawing/2014/main" id="{069253FC-52A6-4B7E-B893-87B9E83FEFC8}"/>
+              </a:ext>
+            </a:extLst>
+          </p:cNvPr>
+          <p:cNvPicPr>
+            <a:picLocks noChangeAspect="1"/>
+          </p:cNvPicPr>
+          <p:nvPr/>
+        </p:nvPicPr>
+        <p:blipFill>
+          <a:blip r:embed="rId2">
+            <a:extLst>
+              <a:ext uri="{28A0092B-C50C-407E-A947-70E740481C1C}">
+                <a14:useLocalDpi xmlns:a14="http://schemas.microsoft.com/office/drawing/2010/main" val="0"/>
+              </a:ext>
+            </a:extLst>
+          </a:blip>
+          <a:stretch>
+            <a:fillRect/>
+          </a:stretch>
+        </p:blipFill>
+        <p:spPr>
+          <a:xfrm>
+            <a:off x="4343297" y="2021171"/>
+            <a:ext cx="4104456" cy="2815657"/>
+          </a:xfrm>
+          <a:prstGeom prst="rect">
+            <a:avLst/>
+          </a:prstGeom>
+        </p:spPr>
+      </p:pic>
+      <p:sp>
+        <p:nvSpPr>
+          <p:cNvPr id="26629" name="Text Box 5"/>
+          <p:cNvSpPr txBox="1">
+            <a:spLocks noChangeArrowheads="1"/>
+          </p:cNvSpPr>
+          <p:nvPr/>
+        </p:nvSpPr>
+        <p:spPr bwMode="auto">
+          <a:xfrm>
+            <a:off x="814905" y="2348880"/>
+            <a:ext cx="3528392" cy="1154675"/>
+          </a:xfrm>
+          <a:prstGeom prst="rect">
+            <a:avLst/>
+          </a:prstGeom>
+          <a:noFill/>
+          <a:ln>
+            <a:noFill/>
+          </a:ln>
+          <a:extLst>
+            <a:ext uri="{909E8E84-426E-40DD-AFC4-6F175D3DCCD1}">
+              <a14:hiddenFill xmlns:a14="http://schemas.microsoft.com/office/drawing/2010/main">
+                <a:solidFill>
+                  <a:srgbClr val="FFFFFF"/>
+                </a:solidFill>
+              </a14:hiddenFill>
+            </a:ext>
+            <a:ext uri="{91240B29-F687-4F45-9708-019B960494DF}">
+              <a14:hiddenLine xmlns:a14="http://schemas.microsoft.com/office/drawing/2010/main" w="9525">
+                <a:solidFill>
+                  <a:srgbClr val="000000"/>
+                </a:solidFill>
+                <a:miter lim="800000"/>
+                <a:headEnd/>
+                <a:tailEnd/>
+              </a14:hiddenLine>
+            </a:ext>
+          </a:extLst>
+        </p:spPr>
+        <p:txBody>
+          <a:bodyPr wrap="square">
+            <a:spAutoFit/>
+          </a:bodyPr>
+          <a:lstStyle>
+            <a:lvl1pPr>
+              <a:defRPr sz="1600">
+                <a:solidFill>
+                  <a:schemeClr val="tx1"/>
+                </a:solidFill>
+                <a:latin typeface="Times New Roman" pitchFamily="18" charset="0"/>
+              </a:defRPr>
+            </a:lvl1pPr>
+            <a:lvl2pPr marL="742950" indent="-285750">
+              <a:defRPr sz="1600">
+                <a:solidFill>
+                  <a:schemeClr val="tx1"/>
+                </a:solidFill>
+                <a:latin typeface="Times New Roman" pitchFamily="18" charset="0"/>
+              </a:defRPr>
+            </a:lvl2pPr>
+            <a:lvl3pPr marL="1143000" indent="-228600">
+              <a:defRPr sz="1600">
+                <a:solidFill>
+                  <a:schemeClr val="tx1"/>
+                </a:solidFill>
+                <a:latin typeface="Times New Roman" pitchFamily="18" charset="0"/>
+              </a:defRPr>
+            </a:lvl3pPr>
+            <a:lvl4pPr marL="1600200" indent="-228600">
+              <a:defRPr sz="1600">
+                <a:solidFill>
+                  <a:schemeClr val="tx1"/>
+                </a:solidFill>
+                <a:latin typeface="Times New Roman" pitchFamily="18" charset="0"/>
+              </a:defRPr>
+            </a:lvl4pPr>
+            <a:lvl5pPr marL="2057400" indent="-228600">
+              <a:defRPr sz="1600">
+                <a:solidFill>
+                  <a:schemeClr val="tx1"/>
+                </a:solidFill>
+                <a:latin typeface="Times New Roman" pitchFamily="18" charset="0"/>
+              </a:defRPr>
+            </a:lvl5pPr>
+            <a:lvl6pPr marL="2514600" indent="-228600" eaLnBrk="0" fontAlgn="base" hangingPunct="0">
+              <a:spcBef>
+                <a:spcPct val="0"/>
+              </a:spcBef>
+              <a:spcAft>
+                <a:spcPct val="0"/>
+              </a:spcAft>
+              <a:defRPr sz="1600">
+                <a:solidFill>
+                  <a:schemeClr val="tx1"/>
+                </a:solidFill>
+                <a:latin typeface="Times New Roman" pitchFamily="18" charset="0"/>
+              </a:defRPr>
+            </a:lvl6pPr>
+            <a:lvl7pPr marL="2971800" indent="-228600" eaLnBrk="0" fontAlgn="base" hangingPunct="0">
+              <a:spcBef>
+                <a:spcPct val="0"/>
+              </a:spcBef>
+              <a:spcAft>
+                <a:spcPct val="0"/>
+              </a:spcAft>
+              <a:defRPr sz="1600">
+                <a:solidFill>
+                  <a:schemeClr val="tx1"/>
+                </a:solidFill>
+                <a:latin typeface="Times New Roman" pitchFamily="18" charset="0"/>
+              </a:defRPr>
+            </a:lvl7pPr>
+            <a:lvl8pPr marL="3429000" indent="-228600" eaLnBrk="0" fontAlgn="base" hangingPunct="0">
+              <a:spcBef>
+                <a:spcPct val="0"/>
+              </a:spcBef>
+              <a:spcAft>
+                <a:spcPct val="0"/>
+              </a:spcAft>
+              <a:defRPr sz="1600">
+                <a:solidFill>
+                  <a:schemeClr val="tx1"/>
+                </a:solidFill>
+                <a:latin typeface="Times New Roman" pitchFamily="18" charset="0"/>
+              </a:defRPr>
+            </a:lvl8pPr>
+            <a:lvl9pPr marL="3886200" indent="-228600" eaLnBrk="0" fontAlgn="base" hangingPunct="0">
+              <a:spcBef>
+                <a:spcPct val="0"/>
+              </a:spcBef>
+              <a:spcAft>
+                <a:spcPct val="0"/>
+              </a:spcAft>
+              <a:defRPr sz="1600">
+                <a:solidFill>
+                  <a:schemeClr val="tx1"/>
+                </a:solidFill>
+                <a:latin typeface="Times New Roman" pitchFamily="18" charset="0"/>
+              </a:defRPr>
+            </a:lvl9pPr>
+          </a:lstStyle>
+          <a:p>
+            <a:pPr marL="285750" indent="-285750">
+              <a:lnSpc>
+                <a:spcPct val="150000"/>
+              </a:lnSpc>
+              <a:buFont typeface="Arial" panose="020B0604020202020204" pitchFamily="34" charset="0"/>
+              <a:buChar char="•"/>
+            </a:pPr>
+            <a:r>
+              <a:rPr lang="es-MX" dirty="0">
+                <a:latin typeface="Arial" panose="020B0604020202020204" pitchFamily="34" charset="0"/>
+                <a:cs typeface="Arial" panose="020B0604020202020204" pitchFamily="34" charset="0"/>
+              </a:rPr>
+              <a:t>Introducción a la calidad del servicio (</a:t>
+            </a:r>
+            <a:r>
+              <a:rPr lang="es-MX" dirty="0" err="1">
+                <a:latin typeface="Arial" panose="020B0604020202020204" pitchFamily="34" charset="0"/>
+                <a:cs typeface="Arial" panose="020B0604020202020204" pitchFamily="34" charset="0"/>
+              </a:rPr>
+              <a:t>QoS</a:t>
+            </a:r>
+            <a:r>
+              <a:rPr lang="es-MX" dirty="0">
+                <a:latin typeface="Arial" panose="020B0604020202020204" pitchFamily="34" charset="0"/>
+                <a:cs typeface="Arial" panose="020B0604020202020204" pitchFamily="34" charset="0"/>
+              </a:rPr>
+              <a:t>)</a:t>
+            </a:r>
+          </a:p>
+          <a:p>
+            <a:pPr marL="285750" indent="-285750">
+              <a:lnSpc>
+                <a:spcPct val="150000"/>
+              </a:lnSpc>
+              <a:buFont typeface="Arial" panose="020B0604020202020204" pitchFamily="34" charset="0"/>
+              <a:buChar char="•"/>
+            </a:pPr>
+            <a:r>
+              <a:rPr lang="es-MX" dirty="0">
+                <a:latin typeface="Arial" panose="020B0604020202020204" pitchFamily="34" charset="0"/>
+                <a:cs typeface="Arial" panose="020B0604020202020204" pitchFamily="34" charset="0"/>
+              </a:rPr>
+              <a:t>Configuración de </a:t>
+            </a:r>
+            <a:r>
+              <a:rPr lang="es-MX" dirty="0" err="1">
+                <a:latin typeface="Arial" panose="020B0604020202020204" pitchFamily="34" charset="0"/>
+                <a:cs typeface="Arial" panose="020B0604020202020204" pitchFamily="34" charset="0"/>
+              </a:rPr>
+              <a:t>QoS</a:t>
+            </a:r>
+            <a:endParaRPr lang="es-MX" dirty="0">
+              <a:latin typeface="Arial" panose="020B0604020202020204" pitchFamily="34" charset="0"/>
+              <a:cs typeface="Arial" panose="020B0604020202020204" pitchFamily="34" charset="0"/>
+            </a:endParaRPr>
+          </a:p>
+        </p:txBody>
+      </p:sp>
+      <p:sp>
+        <p:nvSpPr>
+          <p:cNvPr id="3078" name="Text Box 6"/>
+          <p:cNvSpPr txBox="1">
+            <a:spLocks noChangeArrowheads="1"/>
+          </p:cNvSpPr>
+          <p:nvPr/>
+        </p:nvSpPr>
+        <p:spPr bwMode="auto">
+          <a:xfrm>
+            <a:off x="792025" y="692696"/>
+            <a:ext cx="7539037" cy="584775"/>
+          </a:xfrm>
+          <a:prstGeom prst="rect">
+            <a:avLst/>
+          </a:prstGeom>
+          <a:noFill/>
+          <a:ln>
+            <a:noFill/>
+          </a:ln>
+          <a:extLst>
+            <a:ext uri="{909E8E84-426E-40DD-AFC4-6F175D3DCCD1}">
+              <a14:hiddenFill xmlns:a14="http://schemas.microsoft.com/office/drawing/2010/main">
+                <a:solidFill>
+                  <a:srgbClr val="FFFFFF"/>
+                </a:solidFill>
+              </a14:hiddenFill>
+            </a:ext>
+            <a:ext uri="{91240B29-F687-4F45-9708-019B960494DF}">
+              <a14:hiddenLine xmlns:a14="http://schemas.microsoft.com/office/drawing/2010/main" w="9525">
+                <a:solidFill>
+                  <a:srgbClr val="000000"/>
+                </a:solidFill>
+                <a:miter lim="800000"/>
+                <a:headEnd/>
+                <a:tailEnd/>
+              </a14:hiddenLine>
+            </a:ext>
+          </a:extLst>
+        </p:spPr>
+        <p:txBody>
+          <a:bodyPr wrap="square">
+            <a:spAutoFit/>
+          </a:bodyPr>
+          <a:lstStyle>
+            <a:lvl1pPr>
+              <a:defRPr sz="1600">
+                <a:solidFill>
+                  <a:schemeClr val="tx1"/>
+                </a:solidFill>
+                <a:latin typeface="Times New Roman" pitchFamily="18" charset="0"/>
+              </a:defRPr>
+            </a:lvl1pPr>
+            <a:lvl2pPr marL="742950" indent="-285750">
+              <a:defRPr sz="1600">
+                <a:solidFill>
+                  <a:schemeClr val="tx1"/>
+                </a:solidFill>
+                <a:latin typeface="Times New Roman" pitchFamily="18" charset="0"/>
+              </a:defRPr>
+            </a:lvl2pPr>
+            <a:lvl3pPr marL="1143000" indent="-228600">
+              <a:defRPr sz="1600">
+                <a:solidFill>
+                  <a:schemeClr val="tx1"/>
+                </a:solidFill>
+                <a:latin typeface="Times New Roman" pitchFamily="18" charset="0"/>
+              </a:defRPr>
+            </a:lvl3pPr>
+            <a:lvl4pPr marL="1600200" indent="-228600">
+              <a:defRPr sz="1600">
+                <a:solidFill>
+                  <a:schemeClr val="tx1"/>
+                </a:solidFill>
+                <a:latin typeface="Times New Roman" pitchFamily="18" charset="0"/>
+              </a:defRPr>
+            </a:lvl4pPr>
+            <a:lvl5pPr marL="2057400" indent="-228600">
+              <a:defRPr sz="1600">
+                <a:solidFill>
+                  <a:schemeClr val="tx1"/>
+                </a:solidFill>
+                <a:latin typeface="Times New Roman" pitchFamily="18" charset="0"/>
+              </a:defRPr>
+            </a:lvl5pPr>
+            <a:lvl6pPr marL="2514600" indent="-228600" eaLnBrk="0" fontAlgn="base" hangingPunct="0">
+              <a:spcBef>
+                <a:spcPct val="0"/>
+              </a:spcBef>
+              <a:spcAft>
+                <a:spcPct val="0"/>
+              </a:spcAft>
+              <a:defRPr sz="1600">
+                <a:solidFill>
+                  <a:schemeClr val="tx1"/>
+                </a:solidFill>
+                <a:latin typeface="Times New Roman" pitchFamily="18" charset="0"/>
+              </a:defRPr>
+            </a:lvl6pPr>
+            <a:lvl7pPr marL="2971800" indent="-228600" eaLnBrk="0" fontAlgn="base" hangingPunct="0">
+              <a:spcBef>
+                <a:spcPct val="0"/>
+              </a:spcBef>
+              <a:spcAft>
+                <a:spcPct val="0"/>
+              </a:spcAft>
+              <a:defRPr sz="1600">
+                <a:solidFill>
+                  <a:schemeClr val="tx1"/>
+                </a:solidFill>
+                <a:latin typeface="Times New Roman" pitchFamily="18" charset="0"/>
+              </a:defRPr>
+            </a:lvl7pPr>
+            <a:lvl8pPr marL="3429000" indent="-228600" eaLnBrk="0" fontAlgn="base" hangingPunct="0">
+              <a:spcBef>
+                <a:spcPct val="0"/>
+              </a:spcBef>
+              <a:spcAft>
+                <a:spcPct val="0"/>
+              </a:spcAft>
+              <a:defRPr sz="1600">
+                <a:solidFill>
+                  <a:schemeClr val="tx1"/>
+                </a:solidFill>
+                <a:latin typeface="Times New Roman" pitchFamily="18" charset="0"/>
+              </a:defRPr>
+            </a:lvl8pPr>
+            <a:lvl9pPr marL="3886200" indent="-228600" eaLnBrk="0" fontAlgn="base" hangingPunct="0">
+              <a:spcBef>
+                <a:spcPct val="0"/>
+              </a:spcBef>
+              <a:spcAft>
+                <a:spcPct val="0"/>
+              </a:spcAft>
+              <a:defRPr sz="1600">
+                <a:solidFill>
+                  <a:schemeClr val="tx1"/>
+                </a:solidFill>
+                <a:latin typeface="Times New Roman" pitchFamily="18" charset="0"/>
+              </a:defRPr>
+            </a:lvl9pPr>
+          </a:lstStyle>
+          <a:p>
+            <a:pPr algn="ctr">
+              <a:spcBef>
+                <a:spcPct val="50000"/>
+              </a:spcBef>
+            </a:pPr>
+            <a:r>
+              <a:rPr lang="es-MX" sz="3200" b="1" dirty="0">
+                <a:solidFill>
+                  <a:schemeClr val="accent4">
+                    <a:lumMod val="50000"/>
+                  </a:schemeClr>
+                </a:solidFill>
+                <a:effectLst>
+                  <a:outerShdw blurRad="38100" dist="38100" dir="2700000" algn="tl">
+                    <a:srgbClr val="C0C0C0"/>
+                  </a:outerShdw>
+                </a:effectLst>
+                <a:latin typeface="Dom Casual" charset="0"/>
+                <a:ea typeface="+mj-ea"/>
+                <a:cs typeface="+mj-cs"/>
+              </a:rPr>
+              <a:t>Agenda de esta sesión</a:t>
+            </a:r>
+          </a:p>
+        </p:txBody>
+      </p:sp>
+    </p:spTree>
+    <p:extLst>
+      <p:ext uri="{BB962C8B-B14F-4D97-AF65-F5344CB8AC3E}">
+        <p14:creationId xmlns:p14="http://schemas.microsoft.com/office/powerpoint/2010/main" val="1009664677"/>
+      </p:ext>
+    </p:extLst>
+  </p:cSld>
+  <p:clrMapOvr>
+    <a:masterClrMapping/>
+  </p:clrMapOvr>
+  <p:transition/>
+  <p:timing>
+    <p:tnLst>
+      <p:par>
+        <p:cTn id="1" dur="indefinite" restart="never" nodeType="tmRoot">
+          <p:childTnLst>
+            <p:seq concurrent="1" nextAc="seek">
+              <p:cTn id="2" dur="indefinite" nodeType="mainSeq">
+                <p:childTnLst>
+                  <p:par>
+                    <p:cTn id="3" fill="hold" nodeType="clickPar">
+                      <p:stCondLst>
+                        <p:cond delay="indefinite"/>
+                      </p:stCondLst>
+                      <p:childTnLst>
+                        <p:par>
+                          <p:cTn id="4" fill="hold" nodeType="withGroup">
+                            <p:stCondLst>
+                              <p:cond delay="0"/>
+                            </p:stCondLst>
+                            <p:childTnLst>
+                              <p:par>
+                                <p:cTn id="5" presetID="4" presetClass="entr" presetSubtype="16" fill="hold" grpId="0" nodeType="clickEffect">
+                                  <p:stCondLst>
+                                    <p:cond delay="0"/>
+                                  </p:stCondLst>
+                                  <p:childTnLst>
+                                    <p:set>
+                                      <p:cBhvr>
+                                        <p:cTn id="6" dur="1" fill="hold">
+                                          <p:stCondLst>
+                                            <p:cond delay="0"/>
+                                          </p:stCondLst>
+                                        </p:cTn>
+                                        <p:tgtEl>
+                                          <p:spTgt spid="26629"/>
+                                        </p:tgtEl>
+                                        <p:attrNameLst>
+                                          <p:attrName>style.visibility</p:attrName>
+                                        </p:attrNameLst>
+                                      </p:cBhvr>
+                                      <p:to>
+                                        <p:strVal val="visible"/>
+                                      </p:to>
+                                    </p:set>
+                                    <p:animEffect transition="in" filter="box(in)">
+                                      <p:cBhvr>
+                                        <p:cTn id="7" dur="500"/>
+                                        <p:tgtEl>
+                                          <p:spTgt spid="26629"/>
+                                        </p:tgtEl>
+                                      </p:cBhvr>
+                                    </p:animEffect>
+                                  </p:childTnLst>
+                                </p:cTn>
+                              </p:par>
+                            </p:childTnLst>
+                          </p:cTn>
+                        </p:par>
+                      </p:childTnLst>
+                    </p:cTn>
+                  </p:par>
+                </p:childTnLst>
+              </p:cTn>
+              <p:prevCondLst>
+                <p:cond evt="onPrev" delay="0">
+                  <p:tgtEl>
+                    <p:sldTgt/>
+                  </p:tgtEl>
+                </p:cond>
+              </p:prevCondLst>
+              <p:nextCondLst>
+                <p:cond evt="onNext" delay="0">
+                  <p:tgtEl>
+                    <p:sldTgt/>
+                  </p:tgtEl>
+                </p:cond>
+              </p:nextCondLst>
+            </p:seq>
+          </p:childTnLst>
+        </p:cTn>
+      </p:par>
+    </p:tnLst>
+    <p:bldLst>
+      <p:bldP spid="26629" grpId="0"/>
+    </p:bldLst>
+  </p:timing>
+</p:sld>
+</file>
+
+<file path=ppt/slides/slide20.xml><?xml version="1.0" encoding="utf-8"?>
+<p:sld xmlns:a="http://schemas.openxmlformats.org/drawingml/2006/main" xmlns:r="http://schemas.openxmlformats.org/officeDocument/2006/relationships" xmlns:p="http://schemas.openxmlformats.org/presentationml/2006/main">
+  <p:cSld>
+    <p:spTree>
+      <p:nvGrpSpPr>
+        <p:cNvPr id="1" name=""/>
+        <p:cNvGrpSpPr/>
+        <p:nvPr/>
+      </p:nvGrpSpPr>
+      <p:grpSpPr>
+        <a:xfrm>
+          <a:off x="0" y="0"/>
+          <a:ext cx="0" cy="0"/>
+          <a:chOff x="0" y="0"/>
+          <a:chExt cx="0" cy="0"/>
+        </a:xfrm>
+      </p:grpSpPr>
       <p:sp>
         <p:nvSpPr>
           <p:cNvPr id="2" name="Content Placeholder 1"/>
@@ -17798,8 +11598,8 @@
         </p:nvSpPr>
         <p:spPr>
           <a:xfrm>
-            <a:off x="179512" y="1484784"/>
-            <a:ext cx="8604448" cy="4968552"/>
+            <a:off x="251520" y="1052736"/>
+            <a:ext cx="8640960" cy="5589240"/>
           </a:xfrm>
         </p:spPr>
         <p:txBody>
@@ -17978,12 +11778,22 @@
                 <a:latin typeface="Arial" panose="020B0604020202020204" pitchFamily="34" charset="0"/>
                 <a:cs typeface="Arial" panose="020B0604020202020204" pitchFamily="34" charset="0"/>
               </a:rPr>
-              <a:t>DSCP (</a:t>
-            </a:r>
-            <a:r>
-              <a:rPr lang="es-ES" sz="1800" b="1" dirty="0" err="1">
-                <a:solidFill>
-                  <a:srgbClr val="FF0000"/>
+              <a:t>DSCP </a:t>
+            </a:r>
+            <a:r>
+              <a:rPr lang="es-ES" sz="1800" dirty="0">
+                <a:solidFill>
+                  <a:schemeClr val="tx1"/>
+                </a:solidFill>
+                <a:latin typeface="Arial" panose="020B0604020202020204" pitchFamily="34" charset="0"/>
+                <a:cs typeface="Arial" panose="020B0604020202020204" pitchFamily="34" charset="0"/>
+              </a:rPr>
+              <a:t>(</a:t>
+            </a:r>
+            <a:r>
+              <a:rPr lang="es-ES" sz="1800" dirty="0" err="1">
+                <a:solidFill>
+                  <a:schemeClr val="tx1"/>
                 </a:solidFill>
                 <a:latin typeface="Arial" panose="020B0604020202020204" pitchFamily="34" charset="0"/>
                 <a:cs typeface="Arial" panose="020B0604020202020204" pitchFamily="34" charset="0"/>
@@ -17991,39 +11801,19 @@
               <a:t>Differentiated</a:t>
             </a:r>
             <a:r>
-              <a:rPr lang="es-ES" sz="1800" b="1" dirty="0">
-                <a:solidFill>
-                  <a:srgbClr val="FF0000"/>
-                </a:solidFill>
-                <a:latin typeface="Arial" panose="020B0604020202020204" pitchFamily="34" charset="0"/>
-                <a:cs typeface="Arial" panose="020B0604020202020204" pitchFamily="34" charset="0"/>
-              </a:rPr>
-              <a:t> </a:t>
-            </a:r>
-            <a:r>
-              <a:rPr lang="es-ES" sz="1800" b="1" dirty="0" err="1">
-                <a:solidFill>
-                  <a:srgbClr val="FF0000"/>
-                </a:solidFill>
-                <a:latin typeface="Arial" panose="020B0604020202020204" pitchFamily="34" charset="0"/>
-                <a:cs typeface="Arial" panose="020B0604020202020204" pitchFamily="34" charset="0"/>
-              </a:rPr>
-              <a:t>Services</a:t>
-            </a:r>
-            <a:r>
-              <a:rPr lang="es-ES" sz="1800" b="1" dirty="0">
-                <a:solidFill>
-                  <a:srgbClr val="FF0000"/>
-                </a:solidFill>
-                <a:latin typeface="Arial" panose="020B0604020202020204" pitchFamily="34" charset="0"/>
-                <a:cs typeface="Arial" panose="020B0604020202020204" pitchFamily="34" charset="0"/>
-              </a:rPr>
-              <a:t> </a:t>
-            </a:r>
-            <a:r>
-              <a:rPr lang="es-ES" sz="1800" b="1" dirty="0" err="1">
-                <a:solidFill>
-                  <a:srgbClr val="FF0000"/>
+              <a:rPr lang="es-ES" sz="1800" dirty="0">
+                <a:solidFill>
+                  <a:schemeClr val="tx1"/>
+                </a:solidFill>
+                <a:latin typeface="Arial" panose="020B0604020202020204" pitchFamily="34" charset="0"/>
+                <a:cs typeface="Arial" panose="020B0604020202020204" pitchFamily="34" charset="0"/>
+              </a:rPr>
+              <a:t> Services </a:t>
+            </a:r>
+            <a:r>
+              <a:rPr lang="es-ES" sz="1800" dirty="0" err="1">
+                <a:solidFill>
+                  <a:schemeClr val="tx1"/>
                 </a:solidFill>
                 <a:latin typeface="Arial" panose="020B0604020202020204" pitchFamily="34" charset="0"/>
                 <a:cs typeface="Arial" panose="020B0604020202020204" pitchFamily="34" charset="0"/>
@@ -18031,24 +11821,14 @@
               <a:t>Code</a:t>
             </a:r>
             <a:r>
-              <a:rPr lang="es-ES" sz="1800" b="1" dirty="0">
-                <a:solidFill>
-                  <a:srgbClr val="FF0000"/>
-                </a:solidFill>
-                <a:latin typeface="Arial" panose="020B0604020202020204" pitchFamily="34" charset="0"/>
-                <a:cs typeface="Arial" panose="020B0604020202020204" pitchFamily="34" charset="0"/>
-              </a:rPr>
-              <a:t> Point)</a:t>
-            </a:r>
-            <a:r>
               <a:rPr lang="es-ES" sz="1800" dirty="0">
                 <a:solidFill>
-                  <a:srgbClr val="FF0000"/>
-                </a:solidFill>
-                <a:latin typeface="Arial" panose="020B0604020202020204" pitchFamily="34" charset="0"/>
-                <a:cs typeface="Arial" panose="020B0604020202020204" pitchFamily="34" charset="0"/>
-              </a:rPr>
-              <a:t> </a:t>
+                  <a:schemeClr val="tx1"/>
+                </a:solidFill>
+                <a:latin typeface="Arial" panose="020B0604020202020204" pitchFamily="34" charset="0"/>
+                <a:cs typeface="Arial" panose="020B0604020202020204" pitchFamily="34" charset="0"/>
+              </a:rPr>
+              <a:t> Point – Punto de código de servicios diferenciados) </a:t>
             </a:r>
           </a:p>
           <a:p>
@@ -18279,7 +12059,7 @@
         </p:nvSpPr>
         <p:spPr bwMode="auto">
           <a:xfrm>
-            <a:off x="1028700" y="188640"/>
+            <a:off x="1028700" y="0"/>
             <a:ext cx="7086600" cy="1143000"/>
           </a:xfrm>
           <a:prstGeom prst="rect">
@@ -18421,7 +12201,7 @@
 </p:sld>
 </file>
 
-<file path=ppt/slides/slide32.xml><?xml version="1.0" encoding="utf-8"?>
+<file path=ppt/slides/slide21.xml><?xml version="1.0" encoding="utf-8"?>
 <p:sld xmlns:a="http://schemas.openxmlformats.org/drawingml/2006/main" xmlns:r="http://schemas.openxmlformats.org/officeDocument/2006/relationships" xmlns:p="http://schemas.openxmlformats.org/presentationml/2006/main">
   <p:cSld>
     <p:spTree>
@@ -18941,7 +12721,7 @@
 </p:sld>
 </file>
 
-<file path=ppt/slides/slide33.xml><?xml version="1.0" encoding="utf-8"?>
+<file path=ppt/slides/slide22.xml><?xml version="1.0" encoding="utf-8"?>
 <p:sld xmlns:a="http://schemas.openxmlformats.org/drawingml/2006/main" xmlns:r="http://schemas.openxmlformats.org/officeDocument/2006/relationships" xmlns:p="http://schemas.openxmlformats.org/presentationml/2006/main">
   <p:cSld>
     <p:spTree>
@@ -18970,8 +12750,8 @@
         </p:nvSpPr>
         <p:spPr>
           <a:xfrm>
-            <a:off x="179512" y="1628800"/>
-            <a:ext cx="4282441" cy="3024336"/>
+            <a:off x="148717" y="1556791"/>
+            <a:ext cx="4423283" cy="4709323"/>
           </a:xfrm>
         </p:spPr>
         <p:txBody>
@@ -18987,7 +12767,7 @@
               </a:spcBef>
             </a:pPr>
             <a:r>
-              <a:rPr lang="es-ES" sz="1800" b="1" dirty="0">
+              <a:rPr lang="es-ES" sz="1600" b="1" dirty="0">
                 <a:solidFill>
                   <a:schemeClr val="accent6">
                     <a:lumMod val="75000"/>
@@ -18996,79 +12776,37 @@
                 <a:latin typeface="Arial" panose="020B0604020202020204" pitchFamily="34" charset="0"/>
                 <a:cs typeface="Arial" panose="020B0604020202020204" pitchFamily="34" charset="0"/>
               </a:rPr>
-              <a:t>DSCP (</a:t>
-            </a:r>
-            <a:r>
-              <a:rPr lang="es-ES" sz="1800" b="1" dirty="0" err="1">
-                <a:solidFill>
-                  <a:schemeClr val="accent6">
-                    <a:lumMod val="75000"/>
-                  </a:schemeClr>
-                </a:solidFill>
-                <a:latin typeface="Arial" panose="020B0604020202020204" pitchFamily="34" charset="0"/>
-                <a:cs typeface="Arial" panose="020B0604020202020204" pitchFamily="34" charset="0"/>
-              </a:rPr>
-              <a:t>Differentiated</a:t>
-            </a:r>
-            <a:r>
-              <a:rPr lang="es-ES" sz="1800" b="1" dirty="0">
-                <a:solidFill>
-                  <a:schemeClr val="accent6">
-                    <a:lumMod val="75000"/>
-                  </a:schemeClr>
-                </a:solidFill>
-                <a:latin typeface="Arial" panose="020B0604020202020204" pitchFamily="34" charset="0"/>
-                <a:cs typeface="Arial" panose="020B0604020202020204" pitchFamily="34" charset="0"/>
-              </a:rPr>
-              <a:t> </a:t>
-            </a:r>
-            <a:r>
-              <a:rPr lang="es-ES" sz="1800" b="1" dirty="0" err="1">
-                <a:solidFill>
-                  <a:schemeClr val="accent6">
-                    <a:lumMod val="75000"/>
-                  </a:schemeClr>
-                </a:solidFill>
-                <a:latin typeface="Arial" panose="020B0604020202020204" pitchFamily="34" charset="0"/>
-                <a:cs typeface="Arial" panose="020B0604020202020204" pitchFamily="34" charset="0"/>
-              </a:rPr>
-              <a:t>Services</a:t>
-            </a:r>
-            <a:r>
-              <a:rPr lang="es-ES" sz="1800" b="1" dirty="0">
-                <a:solidFill>
-                  <a:schemeClr val="accent6">
-                    <a:lumMod val="75000"/>
-                  </a:schemeClr>
-                </a:solidFill>
-                <a:latin typeface="Arial" panose="020B0604020202020204" pitchFamily="34" charset="0"/>
-                <a:cs typeface="Arial" panose="020B0604020202020204" pitchFamily="34" charset="0"/>
-              </a:rPr>
-              <a:t> </a:t>
-            </a:r>
-            <a:r>
-              <a:rPr lang="es-ES" sz="1800" b="1" dirty="0" err="1">
-                <a:solidFill>
-                  <a:schemeClr val="accent6">
-                    <a:lumMod val="75000"/>
-                  </a:schemeClr>
-                </a:solidFill>
-                <a:latin typeface="Arial" panose="020B0604020202020204" pitchFamily="34" charset="0"/>
-                <a:cs typeface="Arial" panose="020B0604020202020204" pitchFamily="34" charset="0"/>
-              </a:rPr>
-              <a:t>Code</a:t>
-            </a:r>
-            <a:r>
-              <a:rPr lang="es-ES" sz="1800" b="1" dirty="0">
-                <a:solidFill>
-                  <a:schemeClr val="accent6">
-                    <a:lumMod val="75000"/>
-                  </a:schemeClr>
-                </a:solidFill>
-                <a:latin typeface="Arial" panose="020B0604020202020204" pitchFamily="34" charset="0"/>
-                <a:cs typeface="Arial" panose="020B0604020202020204" pitchFamily="34" charset="0"/>
-              </a:rPr>
-              <a:t> Point) </a:t>
+              <a:t>DSCP </a:t>
+            </a:r>
+            <a:r>
+              <a:rPr lang="es-ES" sz="1600" dirty="0">
+                <a:solidFill>
+                  <a:schemeClr val="tx1"/>
+                </a:solidFill>
+                <a:latin typeface="Arial" panose="020B0604020202020204" pitchFamily="34" charset="0"/>
+                <a:cs typeface="Arial" panose="020B0604020202020204" pitchFamily="34" charset="0"/>
+              </a:rPr>
+              <a:t>Se utiliza para determinar </a:t>
+            </a:r>
+            <a:r>
+              <a:rPr lang="es-ES" sz="1600" b="1" dirty="0">
+                <a:solidFill>
+                  <a:schemeClr val="tx1"/>
+                </a:solidFill>
+                <a:latin typeface="Arial" panose="020B0604020202020204" pitchFamily="34" charset="0"/>
+                <a:cs typeface="Arial" panose="020B0604020202020204" pitchFamily="34" charset="0"/>
+              </a:rPr>
+              <a:t>qué tráfico de red requiere un mayor ancho de banda, tiene una mayor prioridad y tiene más probabilidades de pérdida de paquetes</a:t>
+            </a:r>
+            <a:r>
+              <a:rPr lang="es-ES" sz="1600" dirty="0">
+                <a:solidFill>
+                  <a:schemeClr val="tx1"/>
+                </a:solidFill>
+                <a:latin typeface="Arial" panose="020B0604020202020204" pitchFamily="34" charset="0"/>
+                <a:cs typeface="Arial" panose="020B0604020202020204" pitchFamily="34" charset="0"/>
+              </a:rPr>
+              <a:t>.</a:t>
             </a:r>
           </a:p>
           <a:p>
@@ -19080,35 +12818,89 @@
                 <a:spcPts val="0"/>
               </a:spcBef>
             </a:pPr>
-            <a:r>
-              <a:rPr lang="es-ES" sz="1800" dirty="0">
-                <a:solidFill>
-                  <a:schemeClr val="tx1"/>
-                </a:solidFill>
-                <a:latin typeface="Arial" panose="020B0604020202020204" pitchFamily="34" charset="0"/>
-                <a:cs typeface="Arial" panose="020B0604020202020204" pitchFamily="34" charset="0"/>
-              </a:rPr>
-              <a:t>Se utiliza para determinar </a:t>
-            </a:r>
-            <a:r>
-              <a:rPr lang="es-ES" sz="1800" b="1" dirty="0">
-                <a:solidFill>
-                  <a:schemeClr val="tx1"/>
-                </a:solidFill>
-                <a:latin typeface="Arial" panose="020B0604020202020204" pitchFamily="34" charset="0"/>
-                <a:cs typeface="Arial" panose="020B0604020202020204" pitchFamily="34" charset="0"/>
-              </a:rPr>
-              <a:t>qué tráfico de red requiere un mayor ancho de banda, tiene una mayor prioridad y tiene más probabilidades de pérdida de paquetes</a:t>
-            </a:r>
-            <a:r>
-              <a:rPr lang="es-ES" sz="1800" dirty="0">
-                <a:solidFill>
-                  <a:schemeClr val="tx1"/>
-                </a:solidFill>
-                <a:latin typeface="Arial" panose="020B0604020202020204" pitchFamily="34" charset="0"/>
-                <a:cs typeface="Arial" panose="020B0604020202020204" pitchFamily="34" charset="0"/>
-              </a:rPr>
-              <a:t>.</a:t>
+            <a:endParaRPr lang="es-MX" sz="800" b="0" i="0" dirty="0">
+              <a:solidFill>
+                <a:srgbClr val="001D35"/>
+              </a:solidFill>
+              <a:effectLst/>
+              <a:latin typeface="Arial" panose="020B0604020202020204" pitchFamily="34" charset="0"/>
+              <a:cs typeface="Arial" panose="020B0604020202020204" pitchFamily="34" charset="0"/>
+            </a:endParaRPr>
+          </a:p>
+          <a:p>
+            <a:pPr indent="0" algn="just">
+              <a:lnSpc>
+                <a:spcPct val="150000"/>
+              </a:lnSpc>
+              <a:spcBef>
+                <a:spcPts val="0"/>
+              </a:spcBef>
+            </a:pPr>
+            <a:r>
+              <a:rPr lang="es-MX" sz="1600" b="0" i="0" dirty="0">
+                <a:solidFill>
+                  <a:srgbClr val="001D35"/>
+                </a:solidFill>
+                <a:effectLst/>
+                <a:latin typeface="Arial" panose="020B0604020202020204" pitchFamily="34" charset="0"/>
+                <a:cs typeface="Arial" panose="020B0604020202020204" pitchFamily="34" charset="0"/>
+              </a:rPr>
+              <a:t>La </a:t>
+            </a:r>
+            <a:r>
+              <a:rPr lang="es-MX" sz="1600" b="1" i="0" dirty="0">
+                <a:solidFill>
+                  <a:srgbClr val="001D35"/>
+                </a:solidFill>
+                <a:effectLst/>
+                <a:latin typeface="Arial" panose="020B0604020202020204" pitchFamily="34" charset="0"/>
+                <a:cs typeface="Arial" panose="020B0604020202020204" pitchFamily="34" charset="0"/>
+              </a:rPr>
+              <a:t>precedencia IP </a:t>
+            </a:r>
+            <a:r>
+              <a:rPr lang="es-MX" sz="1600" b="0" i="0" dirty="0">
+                <a:solidFill>
+                  <a:srgbClr val="001D35"/>
+                </a:solidFill>
+                <a:effectLst/>
+                <a:latin typeface="Arial" panose="020B0604020202020204" pitchFamily="34" charset="0"/>
+                <a:cs typeface="Arial" panose="020B0604020202020204" pitchFamily="34" charset="0"/>
+              </a:rPr>
+              <a:t>es un campo de tres bits dentro del encabezado IP que indica la </a:t>
+            </a:r>
+            <a:r>
+              <a:rPr lang="es-MX" sz="1600" b="1" i="0" dirty="0">
+                <a:solidFill>
+                  <a:srgbClr val="001D35"/>
+                </a:solidFill>
+                <a:effectLst/>
+                <a:latin typeface="Arial" panose="020B0604020202020204" pitchFamily="34" charset="0"/>
+                <a:cs typeface="Arial" panose="020B0604020202020204" pitchFamily="34" charset="0"/>
+              </a:rPr>
+              <a:t>prioridad de un paquete en la red</a:t>
+            </a:r>
+            <a:r>
+              <a:rPr lang="es-MX" sz="1600" b="0" i="0" dirty="0">
+                <a:solidFill>
+                  <a:srgbClr val="001D35"/>
+                </a:solidFill>
+                <a:effectLst/>
+                <a:latin typeface="Arial" panose="020B0604020202020204" pitchFamily="34" charset="0"/>
+                <a:cs typeface="Arial" panose="020B0604020202020204" pitchFamily="34" charset="0"/>
+              </a:rPr>
+              <a:t>. </a:t>
+            </a:r>
+            <a:r>
+              <a:rPr lang="es-MX" sz="1600" b="0" i="0" dirty="0">
+                <a:solidFill>
+                  <a:srgbClr val="000000"/>
+                </a:solidFill>
+                <a:effectLst/>
+                <a:latin typeface="Arial" panose="020B0604020202020204" pitchFamily="34" charset="0"/>
+                <a:cs typeface="Arial" panose="020B0604020202020204" pitchFamily="34" charset="0"/>
+              </a:rPr>
+              <a:t>Cuanto mayor sea el valor, mayor será la importancia del paquete IP; en caso de congestión, el ruteador descartará primero los paquetes de baja prioridad. </a:t>
             </a:r>
             <a:endParaRPr lang="es-ES" sz="1800" b="1" dirty="0">
               <a:solidFill>
@@ -19344,7 +13136,7 @@
         </p:blipFill>
         <p:spPr>
           <a:xfrm>
-            <a:off x="4682049" y="1772816"/>
+            <a:off x="4716016" y="1664802"/>
             <a:ext cx="3744416" cy="4493299"/>
           </a:xfrm>
           <a:prstGeom prst="rect">
@@ -19377,7 +13169,7 @@
 </p:sld>
 </file>
 
-<file path=ppt/slides/slide34.xml><?xml version="1.0" encoding="utf-8"?>
+<file path=ppt/slides/slide23.xml><?xml version="1.0" encoding="utf-8"?>
 <p:sld xmlns:a="http://schemas.openxmlformats.org/drawingml/2006/main" xmlns:r="http://schemas.openxmlformats.org/officeDocument/2006/relationships" xmlns:p="http://schemas.openxmlformats.org/presentationml/2006/main">
   <p:cSld>
     <p:spTree>
@@ -19833,7 +13625,7 @@
 </p:sld>
 </file>
 
-<file path=ppt/slides/slide35.xml><?xml version="1.0" encoding="utf-8"?>
+<file path=ppt/slides/slide24.xml><?xml version="1.0" encoding="utf-8"?>
 <p:sld xmlns:a="http://schemas.openxmlformats.org/drawingml/2006/main" xmlns:r="http://schemas.openxmlformats.org/officeDocument/2006/relationships" xmlns:p="http://schemas.openxmlformats.org/presentationml/2006/main">
   <p:cSld>
     <p:spTree>
@@ -20289,7 +14081,7 @@
 </p:sld>
 </file>
 
-<file path=ppt/slides/slide36.xml><?xml version="1.0" encoding="utf-8"?>
+<file path=ppt/slides/slide25.xml><?xml version="1.0" encoding="utf-8"?>
 <p:sld xmlns:a="http://schemas.openxmlformats.org/drawingml/2006/main" xmlns:r="http://schemas.openxmlformats.org/officeDocument/2006/relationships" xmlns:p="http://schemas.openxmlformats.org/presentationml/2006/main">
   <p:cSld>
     <p:spTree>
@@ -20600,6 +14392,462 @@
     <p:extLst>
       <p:ext uri="{BB962C8B-B14F-4D97-AF65-F5344CB8AC3E}">
         <p14:creationId xmlns:p14="http://schemas.microsoft.com/office/powerpoint/2010/main" val="1707022247"/>
+      </p:ext>
+    </p:extLst>
+  </p:cSld>
+  <p:clrMapOvr>
+    <a:masterClrMapping/>
+  </p:clrMapOvr>
+  <mc:AlternateContent xmlns:mc="http://schemas.openxmlformats.org/markup-compatibility/2006" xmlns:p14="http://schemas.microsoft.com/office/powerpoint/2010/main">
+    <mc:Choice Requires="p14">
+      <p:transition spd="med" p14:dur="700">
+        <p:fade/>
+      </p:transition>
+    </mc:Choice>
+    <mc:Fallback xmlns="">
+      <p:transition xmlns:p14="http://schemas.microsoft.com/office/powerpoint/2010/main" spd="med">
+        <p:fade/>
+      </p:transition>
+    </mc:Fallback>
+  </mc:AlternateContent>
+</p:sld>
+</file>
+
+<file path=ppt/slides/slide3.xml><?xml version="1.0" encoding="utf-8"?>
+<p:sld xmlns:a="http://schemas.openxmlformats.org/drawingml/2006/main" xmlns:r="http://schemas.openxmlformats.org/officeDocument/2006/relationships" xmlns:p="http://schemas.openxmlformats.org/presentationml/2006/main">
+  <p:cSld>
+    <p:spTree>
+      <p:nvGrpSpPr>
+        <p:cNvPr id="1" name=""/>
+        <p:cNvGrpSpPr/>
+        <p:nvPr/>
+      </p:nvGrpSpPr>
+      <p:grpSpPr>
+        <a:xfrm>
+          <a:off x="0" y="0"/>
+          <a:ext cx="0" cy="0"/>
+          <a:chOff x="0" y="0"/>
+          <a:chExt cx="0" cy="0"/>
+        </a:xfrm>
+      </p:grpSpPr>
+      <p:sp>
+        <p:nvSpPr>
+          <p:cNvPr id="2" name="Content Placeholder 1"/>
+          <p:cNvSpPr>
+            <a:spLocks noGrp="1"/>
+          </p:cNvSpPr>
+          <p:nvPr>
+            <p:ph idx="1"/>
+          </p:nvPr>
+        </p:nvSpPr>
+        <p:spPr>
+          <a:xfrm>
+            <a:off x="251520" y="1628800"/>
+            <a:ext cx="4464496" cy="3960440"/>
+          </a:xfrm>
+        </p:spPr>
+        <p:txBody>
+          <a:bodyPr/>
+          <a:lstStyle/>
+          <a:p>
+            <a:pPr marL="571440" indent="-285750" algn="just">
+              <a:lnSpc>
+                <a:spcPct val="150000"/>
+              </a:lnSpc>
+              <a:spcBef>
+                <a:spcPts val="0"/>
+              </a:spcBef>
+              <a:buFont typeface="Arial" panose="020B0604020202020204" pitchFamily="34" charset="0"/>
+              <a:buChar char="•"/>
+            </a:pPr>
+            <a:r>
+              <a:rPr lang="es-ES" sz="1800" dirty="0" err="1">
+                <a:solidFill>
+                  <a:srgbClr val="000000"/>
+                </a:solidFill>
+                <a:latin typeface="Arial" panose="020B0604020202020204" pitchFamily="34" charset="0"/>
+                <a:cs typeface="Arial" panose="020B0604020202020204" pitchFamily="34" charset="0"/>
+              </a:rPr>
+              <a:t>QoS</a:t>
+            </a:r>
+            <a:r>
+              <a:rPr lang="es-ES" sz="1800" dirty="0">
+                <a:solidFill>
+                  <a:srgbClr val="000000"/>
+                </a:solidFill>
+                <a:latin typeface="Arial" panose="020B0604020202020204" pitchFamily="34" charset="0"/>
+                <a:cs typeface="Arial" panose="020B0604020202020204" pitchFamily="34" charset="0"/>
+              </a:rPr>
+              <a:t> se usa para </a:t>
+            </a:r>
+            <a:r>
+              <a:rPr lang="es-ES" sz="1800" b="1" dirty="0">
+                <a:solidFill>
+                  <a:schemeClr val="accent6">
+                    <a:lumMod val="75000"/>
+                  </a:schemeClr>
+                </a:solidFill>
+                <a:latin typeface="Arial" panose="020B0604020202020204" pitchFamily="34" charset="0"/>
+                <a:cs typeface="Arial" panose="020B0604020202020204" pitchFamily="34" charset="0"/>
+              </a:rPr>
+              <a:t>dar prioridad a ciertos tipos de tráfico de red y para minimizar la demora y la pérdida de paquetes</a:t>
+            </a:r>
+            <a:r>
+              <a:rPr lang="es-ES" sz="1800" dirty="0">
+                <a:solidFill>
+                  <a:srgbClr val="000000"/>
+                </a:solidFill>
+                <a:latin typeface="Arial" panose="020B0604020202020204" pitchFamily="34" charset="0"/>
+                <a:cs typeface="Arial" panose="020B0604020202020204" pitchFamily="34" charset="0"/>
+              </a:rPr>
+              <a:t>. </a:t>
+            </a:r>
+          </a:p>
+          <a:p>
+            <a:pPr marL="571440" indent="-285750" algn="just">
+              <a:lnSpc>
+                <a:spcPct val="150000"/>
+              </a:lnSpc>
+              <a:spcBef>
+                <a:spcPts val="0"/>
+              </a:spcBef>
+              <a:buFont typeface="Arial" panose="020B0604020202020204" pitchFamily="34" charset="0"/>
+              <a:buChar char="•"/>
+            </a:pPr>
+            <a:r>
+              <a:rPr lang="es-ES" sz="1800" dirty="0" err="1">
+                <a:solidFill>
+                  <a:srgbClr val="000000"/>
+                </a:solidFill>
+                <a:latin typeface="Arial" panose="020B0604020202020204" pitchFamily="34" charset="0"/>
+                <a:cs typeface="Arial" panose="020B0604020202020204" pitchFamily="34" charset="0"/>
+              </a:rPr>
+              <a:t>QoS</a:t>
+            </a:r>
+            <a:r>
+              <a:rPr lang="es-ES" sz="1800" dirty="0">
+                <a:solidFill>
+                  <a:srgbClr val="000000"/>
+                </a:solidFill>
+                <a:latin typeface="Arial" panose="020B0604020202020204" pitchFamily="34" charset="0"/>
+                <a:cs typeface="Arial" panose="020B0604020202020204" pitchFamily="34" charset="0"/>
+              </a:rPr>
+              <a:t> a menudo se usa para </a:t>
+            </a:r>
+            <a:r>
+              <a:rPr lang="es-ES" sz="1800" b="1" dirty="0">
+                <a:solidFill>
+                  <a:schemeClr val="accent6">
+                    <a:lumMod val="75000"/>
+                  </a:schemeClr>
+                </a:solidFill>
+                <a:latin typeface="Arial" panose="020B0604020202020204" pitchFamily="34" charset="0"/>
+                <a:cs typeface="Arial" panose="020B0604020202020204" pitchFamily="34" charset="0"/>
+              </a:rPr>
+              <a:t>priorizar el tráfico de voz sobre IP </a:t>
+            </a:r>
+            <a:r>
+              <a:rPr lang="es-ES" sz="1800" dirty="0">
+                <a:solidFill>
+                  <a:srgbClr val="000000"/>
+                </a:solidFill>
+                <a:latin typeface="Arial" panose="020B0604020202020204" pitchFamily="34" charset="0"/>
+                <a:cs typeface="Arial" panose="020B0604020202020204" pitchFamily="34" charset="0"/>
+              </a:rPr>
+              <a:t>desde teléfonos IP para garantizar que la calidad de audio sea aceptable.</a:t>
+            </a:r>
+            <a:endParaRPr lang="en-US" sz="1800" dirty="0">
+              <a:solidFill>
+                <a:srgbClr val="000000"/>
+              </a:solidFill>
+              <a:latin typeface="Arial" panose="020B0604020202020204" pitchFamily="34" charset="0"/>
+              <a:cs typeface="Arial" panose="020B0604020202020204" pitchFamily="34" charset="0"/>
+            </a:endParaRPr>
+          </a:p>
+        </p:txBody>
+      </p:sp>
+      <p:sp>
+        <p:nvSpPr>
+          <p:cNvPr id="4" name="Rectangle 5">
+            <a:extLst>
+              <a:ext uri="{FF2B5EF4-FFF2-40B4-BE49-F238E27FC236}">
+                <a16:creationId xmlns:a16="http://schemas.microsoft.com/office/drawing/2014/main" id="{E00053A9-C954-D220-8547-5064D8450A0C}"/>
+              </a:ext>
+            </a:extLst>
+          </p:cNvPr>
+          <p:cNvSpPr txBox="1">
+            <a:spLocks noChangeArrowheads="1"/>
+          </p:cNvSpPr>
+          <p:nvPr/>
+        </p:nvSpPr>
+        <p:spPr bwMode="auto">
+          <a:xfrm>
+            <a:off x="1028700" y="0"/>
+            <a:ext cx="7086600" cy="1143000"/>
+          </a:xfrm>
+          <a:prstGeom prst="rect">
+            <a:avLst/>
+          </a:prstGeom>
+          <a:noFill/>
+          <a:ln>
+            <a:noFill/>
+          </a:ln>
+          <a:extLst>
+            <a:ext uri="{909E8E84-426E-40DD-AFC4-6F175D3DCCD1}">
+              <a14:hiddenFill xmlns:a14="http://schemas.microsoft.com/office/drawing/2010/main">
+                <a:solidFill>
+                  <a:srgbClr val="FFFFFF"/>
+                </a:solidFill>
+              </a14:hiddenFill>
+            </a:ext>
+            <a:ext uri="{91240B29-F687-4F45-9708-019B960494DF}">
+              <a14:hiddenLine xmlns:a14="http://schemas.microsoft.com/office/drawing/2010/main" w="9525">
+                <a:solidFill>
+                  <a:srgbClr val="000000"/>
+                </a:solidFill>
+                <a:miter lim="800000"/>
+                <a:headEnd/>
+                <a:tailEnd/>
+              </a14:hiddenLine>
+            </a:ext>
+          </a:extLst>
+        </p:spPr>
+        <p:txBody>
+          <a:bodyPr vert="horz" lIns="91440" tIns="45720" rIns="91440" bIns="45720" rtlCol="0" anchor="ctr">
+            <a:normAutofit/>
+          </a:bodyPr>
+          <a:lstStyle>
+            <a:lvl1pPr algn="ctr" defTabSz="914400" rtl="0" eaLnBrk="1" latinLnBrk="0" hangingPunct="1">
+              <a:spcBef>
+                <a:spcPct val="0"/>
+              </a:spcBef>
+              <a:buNone/>
+              <a:defRPr sz="4400" kern="1200">
+                <a:solidFill>
+                  <a:srgbClr val="004C69"/>
+                </a:solidFill>
+                <a:latin typeface="+mj-lt"/>
+                <a:ea typeface="+mj-ea"/>
+                <a:cs typeface="+mj-cs"/>
+              </a:defRPr>
+            </a:lvl1pPr>
+          </a:lstStyle>
+          <a:p>
+            <a:pPr>
+              <a:spcBef>
+                <a:spcPts val="0"/>
+              </a:spcBef>
+            </a:pPr>
+            <a:r>
+              <a:rPr lang="es-ES_tradnl" altLang="es-MX" sz="3200" b="1" dirty="0" err="1">
+                <a:solidFill>
+                  <a:schemeClr val="accent4">
+                    <a:lumMod val="50000"/>
+                  </a:schemeClr>
+                </a:solidFill>
+                <a:effectLst>
+                  <a:outerShdw blurRad="38100" dist="38100" dir="2700000" algn="tl">
+                    <a:srgbClr val="C0C0C0"/>
+                  </a:outerShdw>
+                </a:effectLst>
+                <a:latin typeface="Dom Casual" charset="0"/>
+              </a:rPr>
+              <a:t>Quality</a:t>
+            </a:r>
+            <a:r>
+              <a:rPr lang="es-ES_tradnl" altLang="es-MX" sz="3200" b="1" dirty="0">
+                <a:solidFill>
+                  <a:schemeClr val="accent4">
+                    <a:lumMod val="50000"/>
+                  </a:schemeClr>
+                </a:solidFill>
+                <a:effectLst>
+                  <a:outerShdw blurRad="38100" dist="38100" dir="2700000" algn="tl">
+                    <a:srgbClr val="C0C0C0"/>
+                  </a:outerShdw>
+                </a:effectLst>
+                <a:latin typeface="Dom Casual" charset="0"/>
+              </a:rPr>
+              <a:t> </a:t>
+            </a:r>
+            <a:r>
+              <a:rPr lang="es-ES_tradnl" altLang="es-MX" sz="3200" b="1" dirty="0" err="1">
+                <a:solidFill>
+                  <a:schemeClr val="accent4">
+                    <a:lumMod val="50000"/>
+                  </a:schemeClr>
+                </a:solidFill>
+                <a:effectLst>
+                  <a:outerShdw blurRad="38100" dist="38100" dir="2700000" algn="tl">
+                    <a:srgbClr val="C0C0C0"/>
+                  </a:outerShdw>
+                </a:effectLst>
+                <a:latin typeface="Dom Casual" charset="0"/>
+              </a:rPr>
+              <a:t>of</a:t>
+            </a:r>
+            <a:r>
+              <a:rPr lang="es-ES_tradnl" altLang="es-MX" sz="3200" b="1" dirty="0">
+                <a:solidFill>
+                  <a:schemeClr val="accent4">
+                    <a:lumMod val="50000"/>
+                  </a:schemeClr>
+                </a:solidFill>
+                <a:effectLst>
+                  <a:outerShdw blurRad="38100" dist="38100" dir="2700000" algn="tl">
+                    <a:srgbClr val="C0C0C0"/>
+                  </a:outerShdw>
+                </a:effectLst>
+                <a:latin typeface="Dom Casual" charset="0"/>
+              </a:rPr>
+              <a:t> </a:t>
+            </a:r>
+            <a:r>
+              <a:rPr lang="es-ES_tradnl" altLang="es-MX" sz="3200" b="1" dirty="0" err="1">
+                <a:solidFill>
+                  <a:schemeClr val="accent4">
+                    <a:lumMod val="50000"/>
+                  </a:schemeClr>
+                </a:solidFill>
+                <a:effectLst>
+                  <a:outerShdw blurRad="38100" dist="38100" dir="2700000" algn="tl">
+                    <a:srgbClr val="C0C0C0"/>
+                  </a:outerShdw>
+                </a:effectLst>
+                <a:latin typeface="Dom Casual" charset="0"/>
+              </a:rPr>
+              <a:t>service</a:t>
+            </a:r>
+            <a:r>
+              <a:rPr lang="es-ES_tradnl" altLang="es-MX" sz="3200" b="1" dirty="0">
+                <a:solidFill>
+                  <a:schemeClr val="accent4">
+                    <a:lumMod val="50000"/>
+                  </a:schemeClr>
+                </a:solidFill>
+                <a:effectLst>
+                  <a:outerShdw blurRad="38100" dist="38100" dir="2700000" algn="tl">
+                    <a:srgbClr val="C0C0C0"/>
+                  </a:outerShdw>
+                </a:effectLst>
+                <a:latin typeface="Dom Casual" charset="0"/>
+              </a:rPr>
+              <a:t> (</a:t>
+            </a:r>
+            <a:r>
+              <a:rPr lang="es-ES_tradnl" altLang="es-MX" sz="3200" b="1" dirty="0" err="1">
+                <a:solidFill>
+                  <a:schemeClr val="accent4">
+                    <a:lumMod val="50000"/>
+                  </a:schemeClr>
+                </a:solidFill>
+                <a:effectLst>
+                  <a:outerShdw blurRad="38100" dist="38100" dir="2700000" algn="tl">
+                    <a:srgbClr val="C0C0C0"/>
+                  </a:outerShdw>
+                </a:effectLst>
+                <a:latin typeface="Dom Casual" charset="0"/>
+              </a:rPr>
+              <a:t>QoS</a:t>
+            </a:r>
+            <a:r>
+              <a:rPr lang="es-ES_tradnl" altLang="es-MX" sz="3200" b="1" dirty="0">
+                <a:solidFill>
+                  <a:schemeClr val="accent4">
+                    <a:lumMod val="50000"/>
+                  </a:schemeClr>
+                </a:solidFill>
+                <a:effectLst>
+                  <a:outerShdw blurRad="38100" dist="38100" dir="2700000" algn="tl">
+                    <a:srgbClr val="C0C0C0"/>
+                  </a:outerShdw>
+                </a:effectLst>
+                <a:latin typeface="Dom Casual" charset="0"/>
+              </a:rPr>
+              <a:t>)</a:t>
+            </a:r>
+            <a:br>
+              <a:rPr lang="es-ES_tradnl" altLang="es-MX" sz="3200" b="1" dirty="0">
+                <a:solidFill>
+                  <a:schemeClr val="accent4">
+                    <a:lumMod val="50000"/>
+                  </a:schemeClr>
+                </a:solidFill>
+                <a:effectLst>
+                  <a:outerShdw blurRad="38100" dist="38100" dir="2700000" algn="tl">
+                    <a:srgbClr val="C0C0C0"/>
+                  </a:outerShdw>
+                </a:effectLst>
+                <a:latin typeface="Dom Casual" charset="0"/>
+              </a:rPr>
+            </a:br>
+            <a:r>
+              <a:rPr lang="es-ES_tradnl" altLang="es-MX" sz="2200" b="1" dirty="0">
+                <a:solidFill>
+                  <a:schemeClr val="accent3">
+                    <a:lumMod val="75000"/>
+                  </a:schemeClr>
+                </a:solidFill>
+                <a:latin typeface="Arial" panose="020B0604020202020204" pitchFamily="34" charset="0"/>
+              </a:rPr>
+              <a:t>Calidad del servicio</a:t>
+            </a:r>
+            <a:endParaRPr lang="es-ES_tradnl" altLang="es-MX" sz="2200" b="1" dirty="0">
+              <a:solidFill>
+                <a:schemeClr val="accent3">
+                  <a:lumMod val="75000"/>
+                </a:schemeClr>
+              </a:solidFill>
+              <a:effectLst>
+                <a:outerShdw blurRad="38100" dist="38100" dir="2700000" algn="tl">
+                  <a:srgbClr val="C0C0C0"/>
+                </a:outerShdw>
+              </a:effectLst>
+              <a:latin typeface="Dom Casual" charset="0"/>
+            </a:endParaRPr>
+          </a:p>
+        </p:txBody>
+      </p:sp>
+      <p:pic>
+        <p:nvPicPr>
+          <p:cNvPr id="6" name="Imagen 5" descr="Gráfico, Gráfico de burbujas&#10;&#10;Descripción generada automáticamente">
+            <a:extLst>
+              <a:ext uri="{FF2B5EF4-FFF2-40B4-BE49-F238E27FC236}">
+                <a16:creationId xmlns:a16="http://schemas.microsoft.com/office/drawing/2014/main" id="{5C3DBB10-C79F-24F0-F575-8F7040645B58}"/>
+              </a:ext>
+            </a:extLst>
+          </p:cNvPr>
+          <p:cNvPicPr>
+            <a:picLocks noChangeAspect="1"/>
+          </p:cNvPicPr>
+          <p:nvPr/>
+        </p:nvPicPr>
+        <p:blipFill>
+          <a:blip r:embed="rId3">
+            <a:extLst>
+              <a:ext uri="{28A0092B-C50C-407E-A947-70E740481C1C}">
+                <a14:useLocalDpi xmlns:a14="http://schemas.microsoft.com/office/drawing/2010/main" val="0"/>
+              </a:ext>
+            </a:extLst>
+          </a:blip>
+          <a:stretch>
+            <a:fillRect/>
+          </a:stretch>
+        </p:blipFill>
+        <p:spPr>
+          <a:xfrm>
+            <a:off x="5148064" y="2096852"/>
+            <a:ext cx="3217379" cy="3024336"/>
+          </a:xfrm>
+          <a:prstGeom prst="rect">
+            <a:avLst/>
+          </a:prstGeom>
+        </p:spPr>
+      </p:pic>
+    </p:spTree>
+    <p:extLst>
+      <p:ext uri="{BB962C8B-B14F-4D97-AF65-F5344CB8AC3E}">
+        <p14:creationId xmlns:p14="http://schemas.microsoft.com/office/powerpoint/2010/main" val="1586875883"/>
       </p:ext>
     </p:extLst>
   </p:cSld>
@@ -22214,7 +16462,7 @@
               <a:t>. El tráfico de voz y el tráfico de datos solían utilizar redes separadas enteras. </a:t>
             </a:r>
             <a:r>
-              <a:rPr lang="es-ES" sz="1800" dirty="0">
+              <a:rPr lang="es-ES" sz="1800" b="1" dirty="0">
                 <a:solidFill>
                   <a:schemeClr val="accent6">
                     <a:lumMod val="75000"/>
@@ -22223,7 +16471,19 @@
                 <a:latin typeface="Arial" panose="020B0604020202020204" pitchFamily="34" charset="0"/>
                 <a:cs typeface="Arial" panose="020B0604020202020204" pitchFamily="34" charset="0"/>
               </a:rPr>
-              <a:t>La calidad de audio de una llamada telefónica no se veía afectada si la conexión a Internet estaba ocupada.</a:t>
+              <a:t>La calidad de audio de una llamada telefónica no se veía afectada si la conexión a Internet estaba ocupada</a:t>
+            </a:r>
+            <a:r>
+              <a:rPr lang="es-ES" sz="1800" dirty="0">
+                <a:solidFill>
+                  <a:schemeClr val="accent6">
+                    <a:lumMod val="75000"/>
+                  </a:schemeClr>
+                </a:solidFill>
+                <a:latin typeface="Arial" panose="020B0604020202020204" pitchFamily="34" charset="0"/>
+                <a:cs typeface="Arial" panose="020B0604020202020204" pitchFamily="34" charset="0"/>
+              </a:rPr>
+              <a:t>.</a:t>
             </a:r>
             <a:endParaRPr lang="en-US" sz="2600" dirty="0">
               <a:solidFill>
